--- a/lecons/F3/46_FORM4_LESSON42_Water_Scarcity.pptx
+++ b/lecons/F3/46_FORM4_LESSON42_Water_Scarcity.pptx
@@ -51,9 +51,15 @@
     <p:sldId id="299" r:id="rId45"/>
     <p:sldId id="300" r:id="rId46"/>
     <p:sldId id="301" r:id="rId47"/>
+    <p:sldId id="302" r:id="rId48"/>
+    <p:sldId id="303" r:id="rId49"/>
+    <p:sldId id="304" r:id="rId50"/>
+    <p:sldId id="305" r:id="rId51"/>
+    <p:sldId id="306" r:id="rId52"/>
+    <p:sldId id="307" r:id="rId53"/>
   </p:sldIdLst>
   <p:notesMasterIdLst>
-    <p:notesMasterId r:id="rId48"/>
+    <p:notesMasterId r:id="rId54"/>
   </p:notesMasterIdLst>
   <p:sldSz cx="12192000" cy="6858000"/>
   <p:notesSz cx="6858000" cy="12192000"/>
@@ -723,7 +729,7 @@
           <a:p>
             <a:r>
               <a:rPr lang="en-US" dirty="0"/>
-              <a:t>Good. There is not enough water in March.</a:t>
+              <a:t>Good. The neighbourhood lacks water, and Aminatou does not know the causes or how to save water.</a:t>
             </a:r>
             <a:endParaRPr lang="en-US" dirty="0"/>
           </a:p>
@@ -811,7 +817,7 @@
           <a:p>
             <a:r>
               <a:rPr lang="en-US" dirty="0"/>
-              <a:t>Question 2: What do the people do? Think for a moment, then raise your hand to answer.</a:t>
+              <a:t>Question 2: When do the taps run dry? Think for a moment, then raise your hand to answer.</a:t>
             </a:r>
             <a:endParaRPr lang="en-US" dirty="0"/>
           </a:p>
@@ -899,7 +905,7 @@
           <a:p>
             <a:r>
               <a:rPr lang="en-US" dirty="0"/>
-              <a:t>Good. They queue at the borehole or buy water.</a:t>
+              <a:t>Good. In March, in the dry season.</a:t>
             </a:r>
             <a:endParaRPr lang="en-US" dirty="0"/>
           </a:p>
@@ -987,7 +993,7 @@
           <a:p>
             <a:r>
               <a:rPr lang="en-US" dirty="0"/>
-              <a:t>Question 3: What can families do? Think for a moment, then raise your hand to answer.</a:t>
+              <a:t>Question 3: What do water sellers do? Think for a moment, then raise your hand to answer.</a:t>
             </a:r>
             <a:endParaRPr lang="en-US" dirty="0"/>
           </a:p>
@@ -1075,7 +1081,7 @@
           <a:p>
             <a:r>
               <a:rPr lang="en-US" dirty="0"/>
-              <a:t>Good. Store rain water and save water.</a:t>
+              <a:t>Good. They raise their prices.</a:t>
             </a:r>
             <a:endParaRPr lang="en-US" dirty="0"/>
           </a:p>
@@ -1339,7 +1345,7 @@
           <a:p>
             <a:r>
               <a:rPr lang="en-US" dirty="0"/>
-              <a:t>Activity 1. Look carefully at this picture: children fetch water at a hand pump. Observe every detail before I ask the question.</a:t>
+              <a:t>Activity 1. Look carefully at this picture: people queue at a borehole. Observe every detail before I ask the question.</a:t>
             </a:r>
             <a:endParaRPr lang="en-US" dirty="0"/>
           </a:p>
@@ -1691,7 +1697,7 @@
           <a:p>
             <a:r>
               <a:rPr lang="en-US" dirty="0"/>
-              <a:t>Activity 2. Look carefully at this picture: a tap that leaks. Observe every detail before I ask the question.</a:t>
+              <a:t>Activity 2. Look carefully at this picture: a leaking tap. Observe every detail before I ask the question.</a:t>
             </a:r>
             <a:endParaRPr lang="en-US" dirty="0"/>
           </a:p>
@@ -1779,7 +1785,7 @@
           <a:p>
             <a:r>
               <a:rPr lang="en-US" dirty="0"/>
-              <a:t>Here is the question for Activity 2: Give one human cause of water scarcity. Take one minute to think and write your answer in your rough notebook.</a:t>
+              <a:t>Here is the question for Activity 2: How does this tap make water scarcer? Take one minute to think and write your answer in your rough notebook.</a:t>
             </a:r>
             <a:endParaRPr lang="en-US" dirty="0"/>
           </a:p>
@@ -1867,7 +1873,7 @@
           <a:p>
             <a:r>
               <a:rPr lang="en-US" dirty="0"/>
-              <a:t>Let us check the answer together. Wasting water (leaks) or too many people.</a:t>
+              <a:t>Let us check the answer together. It wastes water all day.</a:t>
             </a:r>
             <a:endParaRPr lang="en-US" dirty="0"/>
           </a:p>
@@ -1955,7 +1961,7 @@
           <a:p>
             <a:r>
               <a:rPr lang="en-US" dirty="0"/>
-              <a:t>Activity 3. Look carefully at this diagram: collecting rain water. Observe every detail before I ask the question.</a:t>
+              <a:t>Activity 3. Look carefully at this diagram: water from a roof. Observe every detail before I ask the question.</a:t>
             </a:r>
             <a:endParaRPr lang="en-US" dirty="0"/>
           </a:p>
@@ -2131,7 +2137,7 @@
           <a:p>
             <a:r>
               <a:rPr lang="en-US" dirty="0"/>
-              <a:t>Let us check the answer together. Collect rain water from the roof in a tank.</a:t>
+              <a:t>Let us check the answer together. By collecting rain water from the roof in a tank.</a:t>
             </a:r>
             <a:endParaRPr lang="en-US" dirty="0"/>
           </a:p>
@@ -2307,7 +2313,7 @@
           <a:p>
             <a:r>
               <a:rPr lang="en-US" dirty="0"/>
-              <a:t>Let us copy Meaning of Water Scarcity. Water scarcity is defined as follows. On this slide we have Water scarcity. Write each point on a new line, with the key term first, and explain it in your own words when we revise.</a:t>
+              <a:t>Let us copy the definitions. The key terms of this lesson are defined as follows. On this slide we have Water scarcity and Water stress. Write each point on a new line, with the key term first, and explain it in your own words when we revise. When you finish, we go to the next slide.</a:t>
             </a:r>
             <a:endParaRPr lang="en-US" dirty="0"/>
           </a:p>
@@ -2395,7 +2401,7 @@
           <a:p>
             <a:r>
               <a:rPr lang="en-US" dirty="0"/>
-              <a:t>Let us copy Causes of Water Scarcity. Water scarcity has the following causes. On this slide we have Natural causes and Human causes. Write each point on a new line, with the key term first, and explain it in your own words when we revise. When you finish, we go to the next slide.</a:t>
+              <a:t>We continue with the definitions. On this slide we have Water conservation. Write each point on a new line, with the key term first, and explain it in your own words when we revise.</a:t>
             </a:r>
             <a:endParaRPr lang="en-US" dirty="0"/>
           </a:p>
@@ -2571,7 +2577,7 @@
           <a:p>
             <a:r>
               <a:rPr lang="en-US" dirty="0"/>
-              <a:t>We continue with Causes of Water Scarcity. On this slide we have Poor networks. Write each point on a new line, with the key term first, and explain it in your own words when we revise.</a:t>
+              <a:t>Let us copy Causes of Water Scarcity. Water scarcity has the following causes. On this slide we have Climate. Write each point on a new line, with the key term first, and explain it in your own words when we revise.</a:t>
             </a:r>
             <a:endParaRPr lang="en-US" dirty="0"/>
           </a:p>
@@ -2659,7 +2665,7 @@
           <a:p>
             <a:r>
               <a:rPr lang="en-US" dirty="0"/>
-              <a:t>Let us copy Effects of Water Scarcity. Water scarcity has the following effects. On this slide we have Loss of time and Diseases. Write each point on a new line, with the key term first, and explain it in your own words when we revise. When you finish, we go to the next slide.</a:t>
+              <a:t>Copy the point on Population growth on the left, then draw the diagram on the right: a queue at a borehole. Give it a title and label it clearly.</a:t>
             </a:r>
             <a:endParaRPr lang="en-US" dirty="0"/>
           </a:p>
@@ -2747,7 +2753,7 @@
           <a:p>
             <a:r>
               <a:rPr lang="en-US" dirty="0"/>
-              <a:t>We continue with Effects of Water Scarcity. On this slide we have Cost and schooling. Write each point on a new line, with the key term first, and explain it in your own words when we revise.</a:t>
+              <a:t>We continue with Causes of Water Scarcity. On this slide we have Pollution. Write each point on a new line, with the key term first, and explain it in your own words when we revise.</a:t>
             </a:r>
             <a:endParaRPr lang="en-US" dirty="0"/>
           </a:p>
@@ -2835,7 +2841,7 @@
           <a:p>
             <a:r>
               <a:rPr lang="en-US" dirty="0"/>
-              <a:t>Let us copy Water Conservation Methods. Water can be conserved in the following ways. On this slide we have At home and Rainwater harvesting. Write each point on a new line, with the key term first, and explain it in your own words when we revise. When you finish, we go to the next slide.</a:t>
+              <a:t>Copy the point on Waste on the left, then draw the diagram on the right: a leaking tap. Give it a title and label it clearly.</a:t>
             </a:r>
             <a:endParaRPr lang="en-US" dirty="0"/>
           </a:p>
@@ -2923,7 +2929,7 @@
           <a:p>
             <a:r>
               <a:rPr lang="en-US" dirty="0"/>
-              <a:t>We continue with Water Conservation Methods. On this slide we have In farming and Large projects. Write each point on a new line, with the key term first, and explain it in your own words when we revise.</a:t>
+              <a:t>We continue with Causes of Water Scarcity. On this slide we have Poor networks. Write each point on a new line, with the key term first, and explain it in your own words when we revise.</a:t>
             </a:r>
             <a:endParaRPr lang="en-US" dirty="0"/>
           </a:p>
@@ -3011,7 +3017,7 @@
           <a:p>
             <a:r>
               <a:rPr lang="en-US" dirty="0"/>
-              <a:t>Now draw this illustration in your notebook: rainwater harvesting. Give it a title and label it clearly.</a:t>
+              <a:t>Let us copy Effects of Water Scarcity. Water scarcity has the following effects. Copy the point on Loss of time on the left, then draw the diagram on the right: fetching water. Give it a title and label it clearly.</a:t>
             </a:r>
             <a:endParaRPr lang="en-US" dirty="0"/>
           </a:p>
@@ -3099,7 +3105,7 @@
           <a:p>
             <a:r>
               <a:rPr lang="en-US" dirty="0"/>
-              <a:t>Now let us check what you have understood. Question 1: Give two effects of water scarcity. Answer in your exercise book.</a:t>
+              <a:t>We continue with Effects of Water Scarcity. On this slide we have Diseases, High cost and Schooling. Write each point on a new line, with the key term first, and explain it in your own words when we revise. When you finish, we go to the next slide.</a:t>
             </a:r>
             <a:endParaRPr lang="en-US" dirty="0"/>
           </a:p>
@@ -3187,7 +3193,7 @@
           <a:p>
             <a:r>
               <a:rPr lang="en-US" dirty="0"/>
-              <a:t>The expected answer is: long queues and diseases like cholera. If you got it right, well done.</a:t>
+              <a:t>We continue with Effects of Water Scarcity. On this slide we have Farming and conflicts. Write each point on a new line, with the key term first, and explain it in your own words when we revise.</a:t>
             </a:r>
             <a:endParaRPr lang="en-US" dirty="0"/>
           </a:p>
@@ -3275,7 +3281,7 @@
           <a:p>
             <a:r>
               <a:rPr lang="en-US" dirty="0"/>
-              <a:t>Now let us check what you have understood. Question 2: Give two ways of saving water at home. Answer in your exercise book.</a:t>
+              <a:t>Let us copy Water Conservation Methods. Water can be conserved in the following ways. On this slide we have At home. Write each point on a new line, with the key term first, and explain it in your own words when we revise.</a:t>
             </a:r>
             <a:endParaRPr lang="en-US" dirty="0"/>
           </a:p>
@@ -3363,7 +3369,7 @@
           <a:p>
             <a:r>
               <a:rPr lang="en-US" dirty="0"/>
-              <a:t>The expected answer is: repair leaks and close taps. If you got it right, well done.</a:t>
+              <a:t>Copy the point on Rainwater harvesting on the left, then draw the diagram on the right: rainwater harvesting. Give it a title and label it clearly.</a:t>
             </a:r>
             <a:endParaRPr lang="en-US" dirty="0"/>
           </a:p>
@@ -3539,7 +3545,7 @@
           <a:p>
             <a:r>
               <a:rPr lang="en-US" dirty="0"/>
-              <a:t>For those who need more practice, fill in the blanks in your exercise book. The answers are: number 1, scarcity; number 2, conservation; number 3, tank.</a:t>
+              <a:t>We continue with Water Conservation Methods. On this slide we have In farming and Protecting sources. Write each point on a new line, with the key term first, and explain it in your own words when we revise. When you finish, we go to the next slide.</a:t>
             </a:r>
             <a:endParaRPr lang="en-US" dirty="0"/>
           </a:p>
@@ -3627,7 +3633,7 @@
           <a:p>
             <a:r>
               <a:rPr lang="en-US" dirty="0"/>
-              <a:t>For your homework: Revise Lessons 30 to 42. Draw one diagram of your choice (layers of the atmosphere, Stevenson screen, types of rainfall, pressure belts or water cycle) and label it. We shall correct it at the beginning of our next lesson.</a:t>
+              <a:t>We continue with Water Conservation Methods. On this slide we have Large projects. Write each point on a new line, with the key term first, and explain it in your own words when we revise.</a:t>
             </a:r>
             <a:endParaRPr lang="en-US" dirty="0"/>
           </a:p>
@@ -3715,7 +3721,7 @@
           <a:p>
             <a:r>
               <a:rPr lang="en-US" dirty="0"/>
-              <a:t>Let us play the bilingual game. I say a word in English, and you give me the French word. Then we do the reverse.</a:t>
+              <a:t>Now let us check what you have understood. Question 1: Give two effects of water scarcity. Answer in your exercise book.</a:t>
             </a:r>
             <a:endParaRPr lang="en-US" dirty="0"/>
           </a:p>
@@ -3803,7 +3809,7 @@
           <a:p>
             <a:r>
               <a:rPr lang="en-US" dirty="0"/>
-              <a:t>I record this information in the official logbook of the class after the lesson.</a:t>
+              <a:t>The expected answer is: long queues and diseases like cholera. If you got it right, well done.</a:t>
             </a:r>
             <a:endParaRPr lang="en-US" dirty="0"/>
           </a:p>
@@ -3891,7 +3897,7 @@
           <a:p>
             <a:r>
               <a:rPr lang="en-US" dirty="0"/>
-              <a:t>I complete the second page of the logbook: the matter taught, the evaluation, the homework and the attendance.</a:t>
+              <a:t>Now let us check what you have understood. Question 2: Give two ways of saving water at home. Answer in your exercise book.</a:t>
             </a:r>
             <a:endParaRPr lang="en-US" dirty="0"/>
           </a:p>
@@ -3979,7 +3985,7 @@
           <a:p>
             <a:r>
               <a:rPr lang="en-US" dirty="0"/>
-              <a:t>This slide is for me, the teacher: it gives the timing of the lesson and what to do if the projector is not available.</a:t>
+              <a:t>The expected answer is: repair leaks and close taps. If you got it right, well done.</a:t>
             </a:r>
             <a:endParaRPr lang="en-US" dirty="0"/>
           </a:p>
@@ -4067,7 +4073,7 @@
           <a:p>
             <a:r>
               <a:rPr lang="en-US" dirty="0"/>
-              <a:t>These are the references and picture credits used to prepare this lesson.</a:t>
+              <a:t>For those who need more practice, fill in the blanks in your exercise book. The answers are: number 1, scarcity; number 2, conservation; number 3, tank.</a:t>
             </a:r>
             <a:endParaRPr lang="en-US" dirty="0"/>
           </a:p>
@@ -4091,6 +4097,270 @@
             <a:fld id="{F7021451-1387-4CA6-816F-3879F97B5CBC}" type="slidenum">
               <a:rPr lang="en-US"/>
               <a:t>46</a:t>
+            </a:fld>
+            <a:endParaRPr lang="en-US"/>
+          </a:p>
+        </p:txBody>
+      </p:sp>
+    </p:spTree>
+    <p:extLst>
+      <p:ext uri="{BB962C8B-B14F-4D97-AF65-F5344CB8AC3E}">
+        <p14:creationId xmlns:p14="http://schemas.microsoft.com/office/powerpoint/2010/main" val="1024086991"/>
+      </p:ext>
+    </p:extLst>
+  </p:cSld>
+  <p:clrMapOvr>
+    <a:masterClrMapping/>
+  </p:clrMapOvr>
+</p:notes>
+</file>
+
+<file path=ppt/notesSlides/notesSlide47.xml><?xml version="1.0" encoding="utf-8"?>
+<p:notes xmlns:a="http://schemas.openxmlformats.org/drawingml/2006/main" xmlns:r="http://schemas.openxmlformats.org/officeDocument/2006/relationships" xmlns:p="http://schemas.openxmlformats.org/presentationml/2006/main">
+  <p:cSld>
+    <p:spTree>
+      <p:nvGrpSpPr>
+        <p:cNvPr id="1" name=""/>
+        <p:cNvGrpSpPr/>
+        <p:nvPr/>
+      </p:nvGrpSpPr>
+      <p:grpSpPr>
+        <a:xfrm>
+          <a:off x="0" y="0"/>
+          <a:ext cx="0" cy="0"/>
+          <a:chOff x="0" y="0"/>
+          <a:chExt cx="0" cy="0"/>
+        </a:xfrm>
+      </p:grpSpPr>
+      <p:sp>
+        <p:nvSpPr>
+          <p:cNvPr id="2" name="Slide Image Placeholder 1"/>
+          <p:cNvSpPr>
+            <a:spLocks noGrp="1" noRot="1" noChangeAspect="1"/>
+          </p:cNvSpPr>
+          <p:nvPr>
+            <p:ph type="sldImg"/>
+          </p:nvPr>
+        </p:nvSpPr>
+        <p:spPr/>
+      </p:sp>
+      <p:sp>
+        <p:nvSpPr>
+          <p:cNvPr id="3" name="Notes Placeholder 2"/>
+          <p:cNvSpPr>
+            <a:spLocks noGrp="1"/>
+          </p:cNvSpPr>
+          <p:nvPr>
+            <p:ph type="body" idx="1"/>
+          </p:nvPr>
+        </p:nvSpPr>
+        <p:spPr/>
+        <p:txBody>
+          <a:bodyPr/>
+          <a:lstStyle/>
+          <a:p>
+            <a:r>
+              <a:rPr lang="en-US" dirty="0"/>
+              <a:t>For your homework: Revise Lessons 30 to 42. Draw one diagram of your choice (layers of the atmosphere, Stevenson screen, types of rainfall, pressure belts or water cycle) and label it. We shall correct it at the beginning of our next lesson.</a:t>
+            </a:r>
+            <a:endParaRPr lang="en-US" dirty="0"/>
+          </a:p>
+        </p:txBody>
+      </p:sp>
+      <p:sp>
+        <p:nvSpPr>
+          <p:cNvPr id="4" name="Slide Number Placeholder 3"/>
+          <p:cNvSpPr>
+            <a:spLocks noGrp="1"/>
+          </p:cNvSpPr>
+          <p:nvPr>
+            <p:ph type="sldNum" sz="quarter" idx="10"/>
+          </p:nvPr>
+        </p:nvSpPr>
+        <p:spPr/>
+        <p:txBody>
+          <a:bodyPr/>
+          <a:lstStyle/>
+          <a:p>
+            <a:fld id="{F7021451-1387-4CA6-816F-3879F97B5CBC}" type="slidenum">
+              <a:rPr lang="en-US"/>
+              <a:t>47</a:t>
+            </a:fld>
+            <a:endParaRPr lang="en-US"/>
+          </a:p>
+        </p:txBody>
+      </p:sp>
+    </p:spTree>
+    <p:extLst>
+      <p:ext uri="{BB962C8B-B14F-4D97-AF65-F5344CB8AC3E}">
+        <p14:creationId xmlns:p14="http://schemas.microsoft.com/office/powerpoint/2010/main" val="1024086991"/>
+      </p:ext>
+    </p:extLst>
+  </p:cSld>
+  <p:clrMapOvr>
+    <a:masterClrMapping/>
+  </p:clrMapOvr>
+</p:notes>
+</file>
+
+<file path=ppt/notesSlides/notesSlide48.xml><?xml version="1.0" encoding="utf-8"?>
+<p:notes xmlns:a="http://schemas.openxmlformats.org/drawingml/2006/main" xmlns:r="http://schemas.openxmlformats.org/officeDocument/2006/relationships" xmlns:p="http://schemas.openxmlformats.org/presentationml/2006/main">
+  <p:cSld>
+    <p:spTree>
+      <p:nvGrpSpPr>
+        <p:cNvPr id="1" name=""/>
+        <p:cNvGrpSpPr/>
+        <p:nvPr/>
+      </p:nvGrpSpPr>
+      <p:grpSpPr>
+        <a:xfrm>
+          <a:off x="0" y="0"/>
+          <a:ext cx="0" cy="0"/>
+          <a:chOff x="0" y="0"/>
+          <a:chExt cx="0" cy="0"/>
+        </a:xfrm>
+      </p:grpSpPr>
+      <p:sp>
+        <p:nvSpPr>
+          <p:cNvPr id="2" name="Slide Image Placeholder 1"/>
+          <p:cNvSpPr>
+            <a:spLocks noGrp="1" noRot="1" noChangeAspect="1"/>
+          </p:cNvSpPr>
+          <p:nvPr>
+            <p:ph type="sldImg"/>
+          </p:nvPr>
+        </p:nvSpPr>
+        <p:spPr/>
+      </p:sp>
+      <p:sp>
+        <p:nvSpPr>
+          <p:cNvPr id="3" name="Notes Placeholder 2"/>
+          <p:cNvSpPr>
+            <a:spLocks noGrp="1"/>
+          </p:cNvSpPr>
+          <p:nvPr>
+            <p:ph type="body" idx="1"/>
+          </p:nvPr>
+        </p:nvSpPr>
+        <p:spPr/>
+        <p:txBody>
+          <a:bodyPr/>
+          <a:lstStyle/>
+          <a:p>
+            <a:r>
+              <a:rPr lang="en-US" dirty="0"/>
+              <a:t>Let us play the bilingual game. I say a word in English, and you give me the French word. Then we do the reverse.</a:t>
+            </a:r>
+            <a:endParaRPr lang="en-US" dirty="0"/>
+          </a:p>
+        </p:txBody>
+      </p:sp>
+      <p:sp>
+        <p:nvSpPr>
+          <p:cNvPr id="4" name="Slide Number Placeholder 3"/>
+          <p:cNvSpPr>
+            <a:spLocks noGrp="1"/>
+          </p:cNvSpPr>
+          <p:nvPr>
+            <p:ph type="sldNum" sz="quarter" idx="10"/>
+          </p:nvPr>
+        </p:nvSpPr>
+        <p:spPr/>
+        <p:txBody>
+          <a:bodyPr/>
+          <a:lstStyle/>
+          <a:p>
+            <a:fld id="{F7021451-1387-4CA6-816F-3879F97B5CBC}" type="slidenum">
+              <a:rPr lang="en-US"/>
+              <a:t>48</a:t>
+            </a:fld>
+            <a:endParaRPr lang="en-US"/>
+          </a:p>
+        </p:txBody>
+      </p:sp>
+    </p:spTree>
+    <p:extLst>
+      <p:ext uri="{BB962C8B-B14F-4D97-AF65-F5344CB8AC3E}">
+        <p14:creationId xmlns:p14="http://schemas.microsoft.com/office/powerpoint/2010/main" val="1024086991"/>
+      </p:ext>
+    </p:extLst>
+  </p:cSld>
+  <p:clrMapOvr>
+    <a:masterClrMapping/>
+  </p:clrMapOvr>
+</p:notes>
+</file>
+
+<file path=ppt/notesSlides/notesSlide49.xml><?xml version="1.0" encoding="utf-8"?>
+<p:notes xmlns:a="http://schemas.openxmlformats.org/drawingml/2006/main" xmlns:r="http://schemas.openxmlformats.org/officeDocument/2006/relationships" xmlns:p="http://schemas.openxmlformats.org/presentationml/2006/main">
+  <p:cSld>
+    <p:spTree>
+      <p:nvGrpSpPr>
+        <p:cNvPr id="1" name=""/>
+        <p:cNvGrpSpPr/>
+        <p:nvPr/>
+      </p:nvGrpSpPr>
+      <p:grpSpPr>
+        <a:xfrm>
+          <a:off x="0" y="0"/>
+          <a:ext cx="0" cy="0"/>
+          <a:chOff x="0" y="0"/>
+          <a:chExt cx="0" cy="0"/>
+        </a:xfrm>
+      </p:grpSpPr>
+      <p:sp>
+        <p:nvSpPr>
+          <p:cNvPr id="2" name="Slide Image Placeholder 1"/>
+          <p:cNvSpPr>
+            <a:spLocks noGrp="1" noRot="1" noChangeAspect="1"/>
+          </p:cNvSpPr>
+          <p:nvPr>
+            <p:ph type="sldImg"/>
+          </p:nvPr>
+        </p:nvSpPr>
+        <p:spPr/>
+      </p:sp>
+      <p:sp>
+        <p:nvSpPr>
+          <p:cNvPr id="3" name="Notes Placeholder 2"/>
+          <p:cNvSpPr>
+            <a:spLocks noGrp="1"/>
+          </p:cNvSpPr>
+          <p:nvPr>
+            <p:ph type="body" idx="1"/>
+          </p:nvPr>
+        </p:nvSpPr>
+        <p:spPr/>
+        <p:txBody>
+          <a:bodyPr/>
+          <a:lstStyle/>
+          <a:p>
+            <a:r>
+              <a:rPr lang="en-US" dirty="0"/>
+              <a:t>I record this information in the official logbook of the class after the lesson.</a:t>
+            </a:r>
+            <a:endParaRPr lang="en-US" dirty="0"/>
+          </a:p>
+        </p:txBody>
+      </p:sp>
+      <p:sp>
+        <p:nvSpPr>
+          <p:cNvPr id="4" name="Slide Number Placeholder 3"/>
+          <p:cNvSpPr>
+            <a:spLocks noGrp="1"/>
+          </p:cNvSpPr>
+          <p:nvPr>
+            <p:ph type="sldNum" sz="quarter" idx="10"/>
+          </p:nvPr>
+        </p:nvSpPr>
+        <p:spPr/>
+        <p:txBody>
+          <a:bodyPr/>
+          <a:lstStyle/>
+          <a:p>
+            <a:fld id="{F7021451-1387-4CA6-816F-3879F97B5CBC}" type="slidenum">
+              <a:rPr lang="en-US"/>
+              <a:t>49</a:t>
             </a:fld>
             <a:endParaRPr lang="en-US"/>
           </a:p>
@@ -4197,6 +4467,270 @@
 </p:notes>
 </file>
 
+<file path=ppt/notesSlides/notesSlide50.xml><?xml version="1.0" encoding="utf-8"?>
+<p:notes xmlns:a="http://schemas.openxmlformats.org/drawingml/2006/main" xmlns:r="http://schemas.openxmlformats.org/officeDocument/2006/relationships" xmlns:p="http://schemas.openxmlformats.org/presentationml/2006/main">
+  <p:cSld>
+    <p:spTree>
+      <p:nvGrpSpPr>
+        <p:cNvPr id="1" name=""/>
+        <p:cNvGrpSpPr/>
+        <p:nvPr/>
+      </p:nvGrpSpPr>
+      <p:grpSpPr>
+        <a:xfrm>
+          <a:off x="0" y="0"/>
+          <a:ext cx="0" cy="0"/>
+          <a:chOff x="0" y="0"/>
+          <a:chExt cx="0" cy="0"/>
+        </a:xfrm>
+      </p:grpSpPr>
+      <p:sp>
+        <p:nvSpPr>
+          <p:cNvPr id="2" name="Slide Image Placeholder 1"/>
+          <p:cNvSpPr>
+            <a:spLocks noGrp="1" noRot="1" noChangeAspect="1"/>
+          </p:cNvSpPr>
+          <p:nvPr>
+            <p:ph type="sldImg"/>
+          </p:nvPr>
+        </p:nvSpPr>
+        <p:spPr/>
+      </p:sp>
+      <p:sp>
+        <p:nvSpPr>
+          <p:cNvPr id="3" name="Notes Placeholder 2"/>
+          <p:cNvSpPr>
+            <a:spLocks noGrp="1"/>
+          </p:cNvSpPr>
+          <p:nvPr>
+            <p:ph type="body" idx="1"/>
+          </p:nvPr>
+        </p:nvSpPr>
+        <p:spPr/>
+        <p:txBody>
+          <a:bodyPr/>
+          <a:lstStyle/>
+          <a:p>
+            <a:r>
+              <a:rPr lang="en-US" dirty="0"/>
+              <a:t>I complete the second page of the logbook: the matter taught, the evaluation, the homework and the attendance.</a:t>
+            </a:r>
+            <a:endParaRPr lang="en-US" dirty="0"/>
+          </a:p>
+        </p:txBody>
+      </p:sp>
+      <p:sp>
+        <p:nvSpPr>
+          <p:cNvPr id="4" name="Slide Number Placeholder 3"/>
+          <p:cNvSpPr>
+            <a:spLocks noGrp="1"/>
+          </p:cNvSpPr>
+          <p:nvPr>
+            <p:ph type="sldNum" sz="quarter" idx="10"/>
+          </p:nvPr>
+        </p:nvSpPr>
+        <p:spPr/>
+        <p:txBody>
+          <a:bodyPr/>
+          <a:lstStyle/>
+          <a:p>
+            <a:fld id="{F7021451-1387-4CA6-816F-3879F97B5CBC}" type="slidenum">
+              <a:rPr lang="en-US"/>
+              <a:t>50</a:t>
+            </a:fld>
+            <a:endParaRPr lang="en-US"/>
+          </a:p>
+        </p:txBody>
+      </p:sp>
+    </p:spTree>
+    <p:extLst>
+      <p:ext uri="{BB962C8B-B14F-4D97-AF65-F5344CB8AC3E}">
+        <p14:creationId xmlns:p14="http://schemas.microsoft.com/office/powerpoint/2010/main" val="1024086991"/>
+      </p:ext>
+    </p:extLst>
+  </p:cSld>
+  <p:clrMapOvr>
+    <a:masterClrMapping/>
+  </p:clrMapOvr>
+</p:notes>
+</file>
+
+<file path=ppt/notesSlides/notesSlide51.xml><?xml version="1.0" encoding="utf-8"?>
+<p:notes xmlns:a="http://schemas.openxmlformats.org/drawingml/2006/main" xmlns:r="http://schemas.openxmlformats.org/officeDocument/2006/relationships" xmlns:p="http://schemas.openxmlformats.org/presentationml/2006/main">
+  <p:cSld>
+    <p:spTree>
+      <p:nvGrpSpPr>
+        <p:cNvPr id="1" name=""/>
+        <p:cNvGrpSpPr/>
+        <p:nvPr/>
+      </p:nvGrpSpPr>
+      <p:grpSpPr>
+        <a:xfrm>
+          <a:off x="0" y="0"/>
+          <a:ext cx="0" cy="0"/>
+          <a:chOff x="0" y="0"/>
+          <a:chExt cx="0" cy="0"/>
+        </a:xfrm>
+      </p:grpSpPr>
+      <p:sp>
+        <p:nvSpPr>
+          <p:cNvPr id="2" name="Slide Image Placeholder 1"/>
+          <p:cNvSpPr>
+            <a:spLocks noGrp="1" noRot="1" noChangeAspect="1"/>
+          </p:cNvSpPr>
+          <p:nvPr>
+            <p:ph type="sldImg"/>
+          </p:nvPr>
+        </p:nvSpPr>
+        <p:spPr/>
+      </p:sp>
+      <p:sp>
+        <p:nvSpPr>
+          <p:cNvPr id="3" name="Notes Placeholder 2"/>
+          <p:cNvSpPr>
+            <a:spLocks noGrp="1"/>
+          </p:cNvSpPr>
+          <p:nvPr>
+            <p:ph type="body" idx="1"/>
+          </p:nvPr>
+        </p:nvSpPr>
+        <p:spPr/>
+        <p:txBody>
+          <a:bodyPr/>
+          <a:lstStyle/>
+          <a:p>
+            <a:r>
+              <a:rPr lang="en-US" dirty="0"/>
+              <a:t>This slide is for me, the teacher: it gives the timing of the lesson and what to do if the projector is not available.</a:t>
+            </a:r>
+            <a:endParaRPr lang="en-US" dirty="0"/>
+          </a:p>
+        </p:txBody>
+      </p:sp>
+      <p:sp>
+        <p:nvSpPr>
+          <p:cNvPr id="4" name="Slide Number Placeholder 3"/>
+          <p:cNvSpPr>
+            <a:spLocks noGrp="1"/>
+          </p:cNvSpPr>
+          <p:nvPr>
+            <p:ph type="sldNum" sz="quarter" idx="10"/>
+          </p:nvPr>
+        </p:nvSpPr>
+        <p:spPr/>
+        <p:txBody>
+          <a:bodyPr/>
+          <a:lstStyle/>
+          <a:p>
+            <a:fld id="{F7021451-1387-4CA6-816F-3879F97B5CBC}" type="slidenum">
+              <a:rPr lang="en-US"/>
+              <a:t>51</a:t>
+            </a:fld>
+            <a:endParaRPr lang="en-US"/>
+          </a:p>
+        </p:txBody>
+      </p:sp>
+    </p:spTree>
+    <p:extLst>
+      <p:ext uri="{BB962C8B-B14F-4D97-AF65-F5344CB8AC3E}">
+        <p14:creationId xmlns:p14="http://schemas.microsoft.com/office/powerpoint/2010/main" val="1024086991"/>
+      </p:ext>
+    </p:extLst>
+  </p:cSld>
+  <p:clrMapOvr>
+    <a:masterClrMapping/>
+  </p:clrMapOvr>
+</p:notes>
+</file>
+
+<file path=ppt/notesSlides/notesSlide52.xml><?xml version="1.0" encoding="utf-8"?>
+<p:notes xmlns:a="http://schemas.openxmlformats.org/drawingml/2006/main" xmlns:r="http://schemas.openxmlformats.org/officeDocument/2006/relationships" xmlns:p="http://schemas.openxmlformats.org/presentationml/2006/main">
+  <p:cSld>
+    <p:spTree>
+      <p:nvGrpSpPr>
+        <p:cNvPr id="1" name=""/>
+        <p:cNvGrpSpPr/>
+        <p:nvPr/>
+      </p:nvGrpSpPr>
+      <p:grpSpPr>
+        <a:xfrm>
+          <a:off x="0" y="0"/>
+          <a:ext cx="0" cy="0"/>
+          <a:chOff x="0" y="0"/>
+          <a:chExt cx="0" cy="0"/>
+        </a:xfrm>
+      </p:grpSpPr>
+      <p:sp>
+        <p:nvSpPr>
+          <p:cNvPr id="2" name="Slide Image Placeholder 1"/>
+          <p:cNvSpPr>
+            <a:spLocks noGrp="1" noRot="1" noChangeAspect="1"/>
+          </p:cNvSpPr>
+          <p:nvPr>
+            <p:ph type="sldImg"/>
+          </p:nvPr>
+        </p:nvSpPr>
+        <p:spPr/>
+      </p:sp>
+      <p:sp>
+        <p:nvSpPr>
+          <p:cNvPr id="3" name="Notes Placeholder 2"/>
+          <p:cNvSpPr>
+            <a:spLocks noGrp="1"/>
+          </p:cNvSpPr>
+          <p:nvPr>
+            <p:ph type="body" idx="1"/>
+          </p:nvPr>
+        </p:nvSpPr>
+        <p:spPr/>
+        <p:txBody>
+          <a:bodyPr/>
+          <a:lstStyle/>
+          <a:p>
+            <a:r>
+              <a:rPr lang="en-US" dirty="0"/>
+              <a:t>These are the references and picture credits used to prepare this lesson.</a:t>
+            </a:r>
+            <a:endParaRPr lang="en-US" dirty="0"/>
+          </a:p>
+        </p:txBody>
+      </p:sp>
+      <p:sp>
+        <p:nvSpPr>
+          <p:cNvPr id="4" name="Slide Number Placeholder 3"/>
+          <p:cNvSpPr>
+            <a:spLocks noGrp="1"/>
+          </p:cNvSpPr>
+          <p:nvPr>
+            <p:ph type="sldNum" sz="quarter" idx="10"/>
+          </p:nvPr>
+        </p:nvSpPr>
+        <p:spPr/>
+        <p:txBody>
+          <a:bodyPr/>
+          <a:lstStyle/>
+          <a:p>
+            <a:fld id="{F7021451-1387-4CA6-816F-3879F97B5CBC}" type="slidenum">
+              <a:rPr lang="en-US"/>
+              <a:t>52</a:t>
+            </a:fld>
+            <a:endParaRPr lang="en-US"/>
+          </a:p>
+        </p:txBody>
+      </p:sp>
+    </p:spTree>
+    <p:extLst>
+      <p:ext uri="{BB962C8B-B14F-4D97-AF65-F5344CB8AC3E}">
+        <p14:creationId xmlns:p14="http://schemas.microsoft.com/office/powerpoint/2010/main" val="1024086991"/>
+      </p:ext>
+    </p:extLst>
+  </p:cSld>
+  <p:clrMapOvr>
+    <a:masterClrMapping/>
+  </p:clrMapOvr>
+</p:notes>
+</file>
+
 <file path=ppt/notesSlides/notesSlide6.xml><?xml version="1.0" encoding="utf-8"?>
 <p:notes xmlns:a="http://schemas.openxmlformats.org/drawingml/2006/main" xmlns:r="http://schemas.openxmlformats.org/officeDocument/2006/relationships" xmlns:p="http://schemas.openxmlformats.org/presentationml/2006/main">
   <p:cSld>
@@ -4331,7 +4865,7 @@
           <a:p>
             <a:r>
               <a:rPr lang="en-US" dirty="0"/>
-              <a:t>By the end of this lesson, you should be able to do three things. Number 1: define water scarcity and water stress. Number 2: explain the causes of water scarcity. Number 3: describe its effects. Number 4: describe methods of water conservation.</a:t>
+              <a:t>By the end of this lesson, you should be able to do four things. Number 1: define water scarcity and water stress. Number 2: explain the causes of water scarcity. Number 3: describe its effects. Number 4: describe methods of water conservation.</a:t>
             </a:r>
             <a:endParaRPr lang="en-US" dirty="0"/>
           </a:p>
@@ -4507,7 +5041,7 @@
           <a:p>
             <a:r>
               <a:rPr lang="en-US" dirty="0"/>
-              <a:t>Listen carefully to this situation from real life. Every year in March, the taps in Aminatou's neighbourhood run dry for several days. Women and children queue for hours at the borehole, and water sellers raise their prices. Think about it, because I am going to ask you some questions.</a:t>
+              <a:t>Listen carefully to this situation from real life. Every year in March, the taps in Aminatou's neighbourhood run dry for several days. Women and children queue for hours at the borehole, and water sellers raise their prices. Aminatou asks: "Why is there not enough water, and how can we save it?" Think about it, because I am going to ask you some questions.</a:t>
             </a:r>
             <a:endParaRPr lang="en-US" dirty="0"/>
           </a:p>
@@ -6190,7 +6724,7 @@
                 <a:ea typeface="Times New Roman" pitchFamily="34" charset="-122"/>
                 <a:cs typeface="Times New Roman" pitchFamily="34" charset="-120"/>
               </a:rPr>
-              <a:t>There is not enough water in March.</a:t>
+              <a:t>The neighbourhood lacks water, and Aminatou does not know the causes or how to save water.</a:t>
             </a:r>
             <a:endParaRPr lang="en-US" sz="4000" dirty="0"/>
           </a:p>
@@ -6409,7 +6943,7 @@
                 <a:ea typeface="Times New Roman" pitchFamily="34" charset="-122"/>
                 <a:cs typeface="Times New Roman" pitchFamily="34" charset="-120"/>
               </a:rPr>
-              <a:t>What do the people do?</a:t>
+              <a:t>When do the taps run dry?</a:t>
             </a:r>
             <a:endParaRPr lang="en-US" sz="4000" dirty="0"/>
           </a:p>
@@ -6628,7 +7162,7 @@
                 <a:ea typeface="Times New Roman" pitchFamily="34" charset="-122"/>
                 <a:cs typeface="Times New Roman" pitchFamily="34" charset="-120"/>
               </a:rPr>
-              <a:t>They queue at the borehole or buy water.</a:t>
+              <a:t>In March, in the dry season.</a:t>
             </a:r>
             <a:endParaRPr lang="en-US" sz="4000" dirty="0"/>
           </a:p>
@@ -6847,7 +7381,7 @@
                 <a:ea typeface="Times New Roman" pitchFamily="34" charset="-122"/>
                 <a:cs typeface="Times New Roman" pitchFamily="34" charset="-120"/>
               </a:rPr>
-              <a:t>What can families do?</a:t>
+              <a:t>What do water sellers do?</a:t>
             </a:r>
             <a:endParaRPr lang="en-US" sz="4000" dirty="0"/>
           </a:p>
@@ -7066,7 +7600,7 @@
                 <a:ea typeface="Times New Roman" pitchFamily="34" charset="-122"/>
                 <a:cs typeface="Times New Roman" pitchFamily="34" charset="-120"/>
               </a:rPr>
-              <a:t>Store rain water and save water.</a:t>
+              <a:t>They raise their prices.</a:t>
             </a:r>
             <a:endParaRPr lang="en-US" sz="4000" dirty="0"/>
           </a:p>
@@ -7616,7 +8150,7 @@
                 <a:ea typeface="Calibri" pitchFamily="34" charset="-122"/>
                 <a:cs typeface="Calibri" pitchFamily="34" charset="-120"/>
               </a:rPr>
-              <a:t>1. MEANING OF WATER SCARCITY</a:t>
+              <a:t>DEFINITIONS</a:t>
             </a:r>
             <a:endParaRPr lang="en-US" sz="1400" dirty="0"/>
           </a:p>
@@ -7718,7 +8252,7 @@
                 <a:ea typeface="Times New Roman" pitchFamily="34" charset="-122"/>
                 <a:cs typeface="Times New Roman" pitchFamily="34" charset="-120"/>
               </a:rPr>
-              <a:t>Children fetch water at a hand pump.</a:t>
+              <a:t>People queue at a borehole.</a:t>
             </a:r>
             <a:endParaRPr lang="en-US" sz="1800" dirty="0"/>
           </a:p>
@@ -7830,7 +8364,7 @@
                 <a:ea typeface="Calibri" pitchFamily="34" charset="-122"/>
                 <a:cs typeface="Calibri" pitchFamily="34" charset="-120"/>
               </a:rPr>
-              <a:t>1. MEANING OF WATER SCARCITY</a:t>
+              <a:t>DEFINITIONS</a:t>
             </a:r>
             <a:endParaRPr lang="en-US" sz="1400" dirty="0"/>
           </a:p>
@@ -8644,7 +9178,7 @@
                 <a:ea typeface="Calibri" pitchFamily="34" charset="-122"/>
                 <a:cs typeface="Calibri" pitchFamily="34" charset="-120"/>
               </a:rPr>
-              <a:t>1. MEANING OF WATER SCARCITY</a:t>
+              <a:t>DEFINITIONS</a:t>
             </a:r>
             <a:endParaRPr lang="en-US" sz="1400" dirty="0"/>
           </a:p>
@@ -8863,7 +9397,7 @@
                 <a:ea typeface="Calibri" pitchFamily="34" charset="-122"/>
                 <a:cs typeface="Calibri" pitchFamily="34" charset="-120"/>
               </a:rPr>
-              <a:t>2. CAUSES</a:t>
+              <a:t>1. CAUSES</a:t>
             </a:r>
             <a:endParaRPr lang="en-US" sz="1400" dirty="0"/>
           </a:p>
@@ -8965,7 +9499,7 @@
                 <a:ea typeface="Times New Roman" pitchFamily="34" charset="-122"/>
                 <a:cs typeface="Times New Roman" pitchFamily="34" charset="-120"/>
               </a:rPr>
-              <a:t>A tap that leaks.</a:t>
+              <a:t>A leaking tap.</a:t>
             </a:r>
             <a:endParaRPr lang="en-US" sz="1800" dirty="0"/>
           </a:p>
@@ -9077,7 +9611,7 @@
                 <a:ea typeface="Calibri" pitchFamily="34" charset="-122"/>
                 <a:cs typeface="Calibri" pitchFamily="34" charset="-120"/>
               </a:rPr>
-              <a:t>2. CAUSES</a:t>
+              <a:t>1. CAUSES</a:t>
             </a:r>
             <a:endParaRPr lang="en-US" sz="1400" dirty="0"/>
           </a:p>
@@ -9184,7 +9718,7 @@
                 <a:ea typeface="Times New Roman" pitchFamily="34" charset="-122"/>
                 <a:cs typeface="Times New Roman" pitchFamily="34" charset="-120"/>
               </a:rPr>
-              <a:t>Give one human cause of water scarcity.</a:t>
+              <a:t>How does this tap make water scarcer?</a:t>
             </a:r>
             <a:endParaRPr lang="en-US" sz="4000" dirty="0"/>
           </a:p>
@@ -9296,7 +9830,7 @@
                 <a:ea typeface="Calibri" pitchFamily="34" charset="-122"/>
                 <a:cs typeface="Calibri" pitchFamily="34" charset="-120"/>
               </a:rPr>
-              <a:t>2. CAUSES</a:t>
+              <a:t>1. CAUSES</a:t>
             </a:r>
             <a:endParaRPr lang="en-US" sz="1400" dirty="0"/>
           </a:p>
@@ -9403,7 +9937,7 @@
                 <a:ea typeface="Times New Roman" pitchFamily="34" charset="-122"/>
                 <a:cs typeface="Times New Roman" pitchFamily="34" charset="-120"/>
               </a:rPr>
-              <a:t>Wasting water (leaks) or too many people.</a:t>
+              <a:t>It wastes water all day.</a:t>
             </a:r>
             <a:endParaRPr lang="en-US" sz="4000" dirty="0"/>
           </a:p>
@@ -9515,7 +10049,7 @@
                 <a:ea typeface="Calibri" pitchFamily="34" charset="-122"/>
                 <a:cs typeface="Calibri" pitchFamily="34" charset="-120"/>
               </a:rPr>
-              <a:t>4. WATER CONSERVATION</a:t>
+              <a:t>3. WATER CONSERVATION METHODS</a:t>
             </a:r>
             <a:endParaRPr lang="en-US" sz="1400" dirty="0"/>
           </a:p>
@@ -9617,7 +10151,7 @@
                 <a:ea typeface="Times New Roman" pitchFamily="34" charset="-122"/>
                 <a:cs typeface="Times New Roman" pitchFamily="34" charset="-120"/>
               </a:rPr>
-              <a:t>Collecting rain water.</a:t>
+              <a:t>Water from a roof.</a:t>
             </a:r>
             <a:endParaRPr lang="en-US" sz="1800" dirty="0"/>
           </a:p>
@@ -9729,7 +10263,7 @@
                 <a:ea typeface="Calibri" pitchFamily="34" charset="-122"/>
                 <a:cs typeface="Calibri" pitchFamily="34" charset="-120"/>
               </a:rPr>
-              <a:t>4. WATER CONSERVATION</a:t>
+              <a:t>3. WATER CONSERVATION METHODS</a:t>
             </a:r>
             <a:endParaRPr lang="en-US" sz="1400" dirty="0"/>
           </a:p>
@@ -9948,7 +10482,7 @@
                 <a:ea typeface="Calibri" pitchFamily="34" charset="-122"/>
                 <a:cs typeface="Calibri" pitchFamily="34" charset="-120"/>
               </a:rPr>
-              <a:t>4. WATER CONSERVATION</a:t>
+              <a:t>3. WATER CONSERVATION METHODS</a:t>
             </a:r>
             <a:endParaRPr lang="en-US" sz="1400" dirty="0"/>
           </a:p>
@@ -10055,7 +10589,7 @@
                 <a:ea typeface="Times New Roman" pitchFamily="34" charset="-122"/>
                 <a:cs typeface="Times New Roman" pitchFamily="34" charset="-120"/>
               </a:rPr>
-              <a:t>Collect rain water from the roof in a tank.</a:t>
+              <a:t>By collecting rain water from the roof in a tank.</a:t>
             </a:r>
             <a:endParaRPr lang="en-US" sz="4000" dirty="0"/>
           </a:p>
@@ -10449,7 +10983,7 @@
         <p:spPr>
           <a:xfrm>
             <a:off x="0" y="658368"/>
-            <a:ext cx="5120640" cy="5833872"/>
+            <a:ext cx="2468880" cy="5833872"/>
           </a:xfrm>
           <a:prstGeom prst="rect">
             <a:avLst/>
@@ -10464,8 +10998,8 @@
         </p:nvSpPr>
         <p:spPr>
           <a:xfrm>
-            <a:off x="5349240" y="1005840"/>
-            <a:ext cx="6522415" cy="731520"/>
+            <a:off x="2697480" y="1005840"/>
+            <a:ext cx="9174175" cy="731520"/>
           </a:xfrm>
           <a:prstGeom prst="rect">
             <a:avLst/>
@@ -10491,7 +11025,7 @@
                 <a:ea typeface="Times New Roman" pitchFamily="34" charset="-122"/>
                 <a:cs typeface="Times New Roman" pitchFamily="34" charset="-120"/>
               </a:rPr>
-              <a:t>1. Meaning of Water Scarcity</a:t>
+              <a:t>DEFINITIONS</a:t>
             </a:r>
             <a:endParaRPr lang="en-US" sz="3600" dirty="0"/>
           </a:p>
@@ -10505,8 +11039,8 @@
         </p:nvSpPr>
         <p:spPr>
           <a:xfrm>
-            <a:off x="5349240" y="1783080"/>
-            <a:ext cx="6522415" cy="4663440"/>
+            <a:off x="2697480" y="1783080"/>
+            <a:ext cx="9174175" cy="4663440"/>
           </a:xfrm>
           <a:prstGeom prst="rect">
             <a:avLst/>
@@ -10533,7 +11067,7 @@
                 <a:ea typeface="Times New Roman" pitchFamily="34" charset="-122"/>
                 <a:cs typeface="Times New Roman" pitchFamily="34" charset="-120"/>
               </a:rPr>
-              <a:t>Water scarcity is defined as follows:</a:t>
+              <a:t>The key terms of this lesson are defined as follows:</a:t>
             </a:r>
             <a:endParaRPr lang="en-US" sz="4000" dirty="0"/>
           </a:p>
@@ -10571,6 +11105,43 @@
                 <a:cs typeface="Times New Roman" pitchFamily="34" charset="-120"/>
               </a:rPr>
               <a:t>It is the lack of enough clean water to meet the needs of people.</a:t>
+            </a:r>
+            <a:endParaRPr lang="en-US" sz="4000" dirty="0"/>
+          </a:p>
+          <a:p>
+            <a:pPr algn="l" indent="0" marL="0">
+              <a:spcAft>
+                <a:spcPts val="800"/>
+              </a:spcAft>
+              <a:buNone/>
+            </a:pPr>
+            <a:r>
+              <a:rPr lang="en-US" sz="4000" b="1" dirty="0">
+                <a:solidFill>
+                  <a:srgbClr val="111111"/>
+                </a:solidFill>
+                <a:latin typeface="Times New Roman" pitchFamily="34" charset="0"/>
+                <a:ea typeface="Times New Roman" pitchFamily="34" charset="-122"/>
+                <a:cs typeface="Times New Roman" pitchFamily="34" charset="-120"/>
+              </a:rPr>
+              <a:t>Water stress: </a:t>
+            </a:r>
+            <a:pPr algn="l" indent="0" marL="0">
+              <a:spcAft>
+                <a:spcPts val="800"/>
+              </a:spcAft>
+              <a:buNone/>
+            </a:pPr>
+            <a:r>
+              <a:rPr lang="en-US" sz="4000" dirty="0">
+                <a:solidFill>
+                  <a:srgbClr val="111111"/>
+                </a:solidFill>
+                <a:latin typeface="Times New Roman" pitchFamily="34" charset="0"/>
+                <a:ea typeface="Times New Roman" pitchFamily="34" charset="-122"/>
+                <a:cs typeface="Times New Roman" pitchFamily="34" charset="-120"/>
+              </a:rPr>
+              <a:t>It is a situation where the demand for water is higher than the available supply.</a:t>
             </a:r>
             <a:endParaRPr lang="en-US" sz="4000" dirty="0"/>
           </a:p>
@@ -10705,7 +11276,7 @@
         <p:spPr>
           <a:xfrm>
             <a:off x="0" y="658368"/>
-            <a:ext cx="3840480" cy="5833872"/>
+            <a:ext cx="5120640" cy="5833872"/>
           </a:xfrm>
           <a:prstGeom prst="rect">
             <a:avLst/>
@@ -10720,8 +11291,8 @@
         </p:nvSpPr>
         <p:spPr>
           <a:xfrm>
-            <a:off x="4069080" y="1005840"/>
-            <a:ext cx="7802575" cy="731520"/>
+            <a:off x="5349240" y="1005840"/>
+            <a:ext cx="6522415" cy="731520"/>
           </a:xfrm>
           <a:prstGeom prst="rect">
             <a:avLst/>
@@ -10747,7 +11318,7 @@
                 <a:ea typeface="Times New Roman" pitchFamily="34" charset="-122"/>
                 <a:cs typeface="Times New Roman" pitchFamily="34" charset="-120"/>
               </a:rPr>
-              <a:t>2. Causes of Water Scarcity</a:t>
+              <a:t>DEFINITIONS (continued)</a:t>
             </a:r>
             <a:endParaRPr lang="en-US" sz="3600" dirty="0"/>
           </a:p>
@@ -10761,8 +11332,8 @@
         </p:nvSpPr>
         <p:spPr>
           <a:xfrm>
-            <a:off x="4069080" y="1783080"/>
-            <a:ext cx="7802575" cy="4663440"/>
+            <a:off x="5349240" y="1783080"/>
+            <a:ext cx="6522415" cy="4663440"/>
           </a:xfrm>
           <a:prstGeom prst="rect">
             <a:avLst/>
@@ -10781,7 +11352,7 @@
               <a:buNone/>
             </a:pPr>
             <a:r>
-              <a:rPr lang="en-US" sz="4000" i="1" dirty="0">
+              <a:rPr lang="en-US" sz="4000" b="1" dirty="0">
                 <a:solidFill>
                   <a:srgbClr val="111111"/>
                 </a:solidFill>
@@ -10789,11 +11360,8 @@
                 <a:ea typeface="Times New Roman" pitchFamily="34" charset="-122"/>
                 <a:cs typeface="Times New Roman" pitchFamily="34" charset="-120"/>
               </a:rPr>
-              <a:t>Water scarcity has the following causes:</a:t>
-            </a:r>
-            <a:endParaRPr lang="en-US" sz="4000" dirty="0"/>
-          </a:p>
-          <a:p>
+              <a:t>Water conservation: </a:t>
+            </a:r>
             <a:pPr algn="l" indent="0" marL="0">
               <a:spcAft>
                 <a:spcPts val="800"/>
@@ -10801,7 +11369,7 @@
               <a:buNone/>
             </a:pPr>
             <a:r>
-              <a:rPr lang="en-US" sz="4000" b="1" dirty="0">
+              <a:rPr lang="en-US" sz="4000" dirty="0">
                 <a:solidFill>
                   <a:srgbClr val="111111"/>
                 </a:solidFill>
@@ -10809,61 +11377,7 @@
                 <a:ea typeface="Times New Roman" pitchFamily="34" charset="-122"/>
                 <a:cs typeface="Times New Roman" pitchFamily="34" charset="-120"/>
               </a:rPr>
-              <a:t>Natural causes: </a:t>
-            </a:r>
-            <a:pPr algn="l" indent="0" marL="0">
-              <a:spcAft>
-                <a:spcPts val="800"/>
-              </a:spcAft>
-              <a:buNone/>
-            </a:pPr>
-            <a:r>
-              <a:rPr lang="en-US" sz="4000" dirty="0">
-                <a:solidFill>
-                  <a:srgbClr val="111111"/>
-                </a:solidFill>
-                <a:latin typeface="Times New Roman" pitchFamily="34" charset="0"/>
-                <a:ea typeface="Times New Roman" pitchFamily="34" charset="-122"/>
-                <a:cs typeface="Times New Roman" pitchFamily="34" charset="-120"/>
-              </a:rPr>
-              <a:t>A long dry season and droughts reduce water supply.</a:t>
-            </a:r>
-            <a:endParaRPr lang="en-US" sz="4000" dirty="0"/>
-          </a:p>
-          <a:p>
-            <a:pPr algn="l" indent="0" marL="0">
-              <a:spcAft>
-                <a:spcPts val="800"/>
-              </a:spcAft>
-              <a:buNone/>
-            </a:pPr>
-            <a:r>
-              <a:rPr lang="en-US" sz="4000" b="1" dirty="0">
-                <a:solidFill>
-                  <a:srgbClr val="111111"/>
-                </a:solidFill>
-                <a:latin typeface="Times New Roman" pitchFamily="34" charset="0"/>
-                <a:ea typeface="Times New Roman" pitchFamily="34" charset="-122"/>
-                <a:cs typeface="Times New Roman" pitchFamily="34" charset="-120"/>
-              </a:rPr>
-              <a:t>Human causes: </a:t>
-            </a:r>
-            <a:pPr algn="l" indent="0" marL="0">
-              <a:spcAft>
-                <a:spcPts val="800"/>
-              </a:spcAft>
-              <a:buNone/>
-            </a:pPr>
-            <a:r>
-              <a:rPr lang="en-US" sz="4000" dirty="0">
-                <a:solidFill>
-                  <a:srgbClr val="111111"/>
-                </a:solidFill>
-                <a:latin typeface="Times New Roman" pitchFamily="34" charset="0"/>
-                <a:ea typeface="Times New Roman" pitchFamily="34" charset="-122"/>
-                <a:cs typeface="Times New Roman" pitchFamily="34" charset="-120"/>
-              </a:rPr>
-              <a:t>Population growth, waste and pollution reduce clean water.</a:t>
+              <a:t>It is the careful use and protection of water to avoid waste.</a:t>
             </a:r>
             <a:endParaRPr lang="en-US" sz="4000" dirty="0"/>
           </a:p>
@@ -12049,7 +12563,7 @@
                 <a:ea typeface="Times New Roman" pitchFamily="34" charset="-122"/>
                 <a:cs typeface="Times New Roman" pitchFamily="34" charset="-120"/>
               </a:rPr>
-              <a:t>2. Causes of Water Scarcity (continued)</a:t>
+              <a:t>1. Causes of Water Scarcity</a:t>
             </a:r>
             <a:endParaRPr lang="en-US" sz="3600" dirty="0"/>
           </a:p>
@@ -12083,7 +12597,7 @@
               <a:buNone/>
             </a:pPr>
             <a:r>
-              <a:rPr lang="en-US" sz="4000" b="1" dirty="0">
+              <a:rPr lang="en-US" sz="4000" i="1" dirty="0">
                 <a:solidFill>
                   <a:srgbClr val="111111"/>
                 </a:solidFill>
@@ -12091,8 +12605,11 @@
                 <a:ea typeface="Times New Roman" pitchFamily="34" charset="-122"/>
                 <a:cs typeface="Times New Roman" pitchFamily="34" charset="-120"/>
               </a:rPr>
-              <a:t>Poor networks: </a:t>
-            </a:r>
+              <a:t>Water scarcity has the following causes:</a:t>
+            </a:r>
+            <a:endParaRPr lang="en-US" sz="4000" dirty="0"/>
+          </a:p>
+          <a:p>
             <a:pPr algn="l" indent="0" marL="0">
               <a:spcAft>
                 <a:spcPts val="800"/>
@@ -12100,7 +12617,7 @@
               <a:buNone/>
             </a:pPr>
             <a:r>
-              <a:rPr lang="en-US" sz="4000" dirty="0">
+              <a:rPr lang="en-US" sz="4000" b="1" dirty="0">
                 <a:solidFill>
                   <a:srgbClr val="111111"/>
                 </a:solidFill>
@@ -12108,7 +12625,24 @@
                 <a:ea typeface="Times New Roman" pitchFamily="34" charset="-122"/>
                 <a:cs typeface="Times New Roman" pitchFamily="34" charset="-120"/>
               </a:rPr>
-              <a:t>Old pipes and too few boreholes limit the supply of water.</a:t>
+              <a:t>Climate: </a:t>
+            </a:r>
+            <a:pPr algn="l" indent="0" marL="0">
+              <a:spcAft>
+                <a:spcPts val="800"/>
+              </a:spcAft>
+              <a:buNone/>
+            </a:pPr>
+            <a:r>
+              <a:rPr lang="en-US" sz="4000" dirty="0">
+                <a:solidFill>
+                  <a:srgbClr val="111111"/>
+                </a:solidFill>
+                <a:latin typeface="Times New Roman" pitchFamily="34" charset="0"/>
+                <a:ea typeface="Times New Roman" pitchFamily="34" charset="-122"/>
+                <a:cs typeface="Times New Roman" pitchFamily="34" charset="-120"/>
+              </a:rPr>
+              <a:t>A long dry season, droughts and high evaporation reduce water supply.</a:t>
             </a:r>
             <a:endParaRPr lang="en-US" sz="4000" dirty="0"/>
           </a:p>
@@ -12226,9 +12760,109 @@
           </a:p>
         </p:txBody>
       </p:sp>
+      <p:sp>
+        <p:nvSpPr>
+          <p:cNvPr id="3" name="Text 1"/>
+          <p:cNvSpPr/>
+          <p:nvPr/>
+        </p:nvSpPr>
+        <p:spPr>
+          <a:xfrm>
+            <a:off x="365760" y="1005840"/>
+            <a:ext cx="11460175" cy="731520"/>
+          </a:xfrm>
+          <a:prstGeom prst="rect">
+            <a:avLst/>
+          </a:prstGeom>
+          <a:noFill/>
+          <a:ln/>
+        </p:spPr>
+        <p:txBody>
+          <a:bodyPr wrap="square" lIns="0" tIns="0" rIns="0" bIns="0" rtlCol="0" anchor="ctr">
+            <a:normAutofit/>
+          </a:bodyPr>
+          <a:lstStyle/>
+          <a:p>
+            <a:pPr algn="ctr" indent="0" marL="0">
+              <a:buNone/>
+            </a:pPr>
+            <a:r>
+              <a:rPr lang="en-US" sz="3600" b="1" dirty="0">
+                <a:solidFill>
+                  <a:srgbClr val="990011"/>
+                </a:solidFill>
+                <a:latin typeface="Times New Roman" pitchFamily="34" charset="0"/>
+                <a:ea typeface="Times New Roman" pitchFamily="34" charset="-122"/>
+                <a:cs typeface="Times New Roman" pitchFamily="34" charset="-120"/>
+              </a:rPr>
+              <a:t>1. Causes of Water Scarcity</a:t>
+            </a:r>
+            <a:endParaRPr lang="en-US" sz="3600" dirty="0"/>
+          </a:p>
+        </p:txBody>
+      </p:sp>
+      <p:sp>
+        <p:nvSpPr>
+          <p:cNvPr id="4" name="Text 2"/>
+          <p:cNvSpPr/>
+          <p:nvPr/>
+        </p:nvSpPr>
+        <p:spPr>
+          <a:xfrm>
+            <a:off x="365760" y="1783080"/>
+            <a:ext cx="4846320" cy="4617720"/>
+          </a:xfrm>
+          <a:prstGeom prst="rect">
+            <a:avLst/>
+          </a:prstGeom>
+          <a:noFill/>
+          <a:ln/>
+        </p:spPr>
+        <p:txBody>
+          <a:bodyPr wrap="square" lIns="0" tIns="0" rIns="0" bIns="0" rtlCol="0" anchor="t"/>
+          <a:lstStyle/>
+          <a:p>
+            <a:pPr algn="l" indent="0" marL="0">
+              <a:spcAft>
+                <a:spcPts val="800"/>
+              </a:spcAft>
+              <a:buNone/>
+            </a:pPr>
+            <a:r>
+              <a:rPr lang="en-US" sz="3600" b="1" dirty="0">
+                <a:solidFill>
+                  <a:srgbClr val="111111"/>
+                </a:solidFill>
+                <a:latin typeface="Times New Roman" pitchFamily="34" charset="0"/>
+                <a:ea typeface="Times New Roman" pitchFamily="34" charset="-122"/>
+                <a:cs typeface="Times New Roman" pitchFamily="34" charset="-120"/>
+              </a:rPr>
+              <a:t>Population growth: </a:t>
+            </a:r>
+            <a:pPr algn="l" indent="0" marL="0">
+              <a:spcAft>
+                <a:spcPts val="800"/>
+              </a:spcAft>
+              <a:buNone/>
+            </a:pPr>
+            <a:r>
+              <a:rPr lang="en-US" sz="3600" dirty="0">
+                <a:solidFill>
+                  <a:srgbClr val="111111"/>
+                </a:solidFill>
+                <a:latin typeface="Times New Roman" pitchFamily="34" charset="0"/>
+                <a:ea typeface="Times New Roman" pitchFamily="34" charset="-122"/>
+                <a:cs typeface="Times New Roman" pitchFamily="34" charset="-120"/>
+              </a:rPr>
+              <a:t>Towns such as Garoua grow fast, and demand becomes higher than supply.</a:t>
+            </a:r>
+            <a:endParaRPr lang="en-US" sz="3600" dirty="0"/>
+          </a:p>
+        </p:txBody>
+      </p:sp>
       <p:pic>
         <p:nvPicPr>
-          <p:cNvPr id="3" name="Image 0" descr="/home/claude/f4/img/minesec_sheet.png">    </p:cNvPr>
+          <p:cNvPr id="5" name="Image 0" descr="/home/claude/f4/img/v2/f4_borehole.jpg">    </p:cNvPr>
           <p:cNvPicPr>
             <a:picLocks noChangeAspect="1"/>
           </p:cNvPicPr>
@@ -12242,8 +12876,8 @@
         </p:blipFill>
         <p:spPr>
           <a:xfrm>
-            <a:off x="0" y="658368"/>
-            <a:ext cx="5120640" cy="5833872"/>
+            <a:off x="5349240" y="2071212"/>
+            <a:ext cx="6659575" cy="3693983"/>
           </a:xfrm>
           <a:prstGeom prst="rect">
             <a:avLst/>
@@ -12252,14 +12886,14 @@
       </p:pic>
       <p:sp>
         <p:nvSpPr>
-          <p:cNvPr id="4" name="Text 1"/>
+          <p:cNvPr id="6" name="Text 3"/>
           <p:cNvSpPr/>
           <p:nvPr/>
         </p:nvSpPr>
         <p:spPr>
           <a:xfrm>
-            <a:off x="5349240" y="1005840"/>
-            <a:ext cx="6522415" cy="731520"/>
+            <a:off x="5349240" y="6089904"/>
+            <a:ext cx="6659575" cy="347472"/>
           </a:xfrm>
           <a:prstGeom prst="rect">
             <a:avLst/>
@@ -12268,142 +12902,24 @@
           <a:ln/>
         </p:spPr>
         <p:txBody>
-          <a:bodyPr wrap="square" lIns="0" tIns="0" rIns="0" bIns="0" rtlCol="0" anchor="ctr">
-            <a:normAutofit/>
-          </a:bodyPr>
+          <a:bodyPr wrap="square" lIns="0" tIns="0" rIns="0" bIns="0" rtlCol="0" anchor="ctr"/>
           <a:lstStyle/>
           <a:p>
             <a:pPr algn="ctr" indent="0" marL="0">
               <a:buNone/>
             </a:pPr>
             <a:r>
-              <a:rPr lang="en-US" sz="3600" b="1" dirty="0">
-                <a:solidFill>
-                  <a:srgbClr val="990011"/>
+              <a:rPr lang="en-US" sz="1600" i="1" dirty="0">
+                <a:solidFill>
+                  <a:srgbClr val="555555"/>
                 </a:solidFill>
                 <a:latin typeface="Times New Roman" pitchFamily="34" charset="0"/>
                 <a:ea typeface="Times New Roman" pitchFamily="34" charset="-122"/>
                 <a:cs typeface="Times New Roman" pitchFamily="34" charset="-120"/>
               </a:rPr>
-              <a:t>3. Effects of Water Scarcity</a:t>
-            </a:r>
-            <a:endParaRPr lang="en-US" sz="3600" dirty="0"/>
-          </a:p>
-        </p:txBody>
-      </p:sp>
-      <p:sp>
-        <p:nvSpPr>
-          <p:cNvPr id="5" name="Text 2"/>
-          <p:cNvSpPr/>
-          <p:nvPr/>
-        </p:nvSpPr>
-        <p:spPr>
-          <a:xfrm>
-            <a:off x="5349240" y="1783080"/>
-            <a:ext cx="6522415" cy="4663440"/>
-          </a:xfrm>
-          <a:prstGeom prst="rect">
-            <a:avLst/>
-          </a:prstGeom>
-          <a:noFill/>
-          <a:ln/>
-        </p:spPr>
-        <p:txBody>
-          <a:bodyPr wrap="square" lIns="0" tIns="0" rIns="0" bIns="0" rtlCol="0" anchor="t"/>
-          <a:lstStyle/>
-          <a:p>
-            <a:pPr algn="l" indent="0" marL="0">
-              <a:spcAft>
-                <a:spcPts val="800"/>
-              </a:spcAft>
-              <a:buNone/>
-            </a:pPr>
-            <a:r>
-              <a:rPr lang="en-US" sz="4000" i="1" dirty="0">
-                <a:solidFill>
-                  <a:srgbClr val="111111"/>
-                </a:solidFill>
-                <a:latin typeface="Times New Roman" pitchFamily="34" charset="0"/>
-                <a:ea typeface="Times New Roman" pitchFamily="34" charset="-122"/>
-                <a:cs typeface="Times New Roman" pitchFamily="34" charset="-120"/>
-              </a:rPr>
-              <a:t>Water scarcity has the following effects:</a:t>
-            </a:r>
-            <a:endParaRPr lang="en-US" sz="4000" dirty="0"/>
-          </a:p>
-          <a:p>
-            <a:pPr algn="l" indent="0" marL="0">
-              <a:spcAft>
-                <a:spcPts val="800"/>
-              </a:spcAft>
-              <a:buNone/>
-            </a:pPr>
-            <a:r>
-              <a:rPr lang="en-US" sz="4000" b="1" dirty="0">
-                <a:solidFill>
-                  <a:srgbClr val="111111"/>
-                </a:solidFill>
-                <a:latin typeface="Times New Roman" pitchFamily="34" charset="0"/>
-                <a:ea typeface="Times New Roman" pitchFamily="34" charset="-122"/>
-                <a:cs typeface="Times New Roman" pitchFamily="34" charset="-120"/>
-              </a:rPr>
-              <a:t>Loss of time: </a:t>
-            </a:r>
-            <a:pPr algn="l" indent="0" marL="0">
-              <a:spcAft>
-                <a:spcPts val="800"/>
-              </a:spcAft>
-              <a:buNone/>
-            </a:pPr>
-            <a:r>
-              <a:rPr lang="en-US" sz="4000" dirty="0">
-                <a:solidFill>
-                  <a:srgbClr val="111111"/>
-                </a:solidFill>
-                <a:latin typeface="Times New Roman" pitchFamily="34" charset="0"/>
-                <a:ea typeface="Times New Roman" pitchFamily="34" charset="-122"/>
-                <a:cs typeface="Times New Roman" pitchFamily="34" charset="-120"/>
-              </a:rPr>
-              <a:t>People walk long distances and queue for water.</a:t>
-            </a:r>
-            <a:endParaRPr lang="en-US" sz="4000" dirty="0"/>
-          </a:p>
-          <a:p>
-            <a:pPr algn="l" indent="0" marL="0">
-              <a:spcAft>
-                <a:spcPts val="800"/>
-              </a:spcAft>
-              <a:buNone/>
-            </a:pPr>
-            <a:r>
-              <a:rPr lang="en-US" sz="4000" b="1" dirty="0">
-                <a:solidFill>
-                  <a:srgbClr val="111111"/>
-                </a:solidFill>
-                <a:latin typeface="Times New Roman" pitchFamily="34" charset="0"/>
-                <a:ea typeface="Times New Roman" pitchFamily="34" charset="-122"/>
-                <a:cs typeface="Times New Roman" pitchFamily="34" charset="-120"/>
-              </a:rPr>
-              <a:t>Diseases: </a:t>
-            </a:r>
-            <a:pPr algn="l" indent="0" marL="0">
-              <a:spcAft>
-                <a:spcPts val="800"/>
-              </a:spcAft>
-              <a:buNone/>
-            </a:pPr>
-            <a:r>
-              <a:rPr lang="en-US" sz="4000" dirty="0">
-                <a:solidFill>
-                  <a:srgbClr val="111111"/>
-                </a:solidFill>
-                <a:latin typeface="Times New Roman" pitchFamily="34" charset="0"/>
-                <a:ea typeface="Times New Roman" pitchFamily="34" charset="-122"/>
-                <a:cs typeface="Times New Roman" pitchFamily="34" charset="-120"/>
-              </a:rPr>
-              <a:t>Dirty water causes cholera and diarrhoea.</a:t>
-            </a:r>
-            <a:endParaRPr lang="en-US" sz="4000" dirty="0"/>
+              <a:t>Illustration: a queue at a borehole</a:t>
+            </a:r>
+            <a:endParaRPr lang="en-US" sz="1600" dirty="0"/>
           </a:p>
         </p:txBody>
       </p:sp>
@@ -12578,7 +13094,7 @@
                 <a:ea typeface="Times New Roman" pitchFamily="34" charset="-122"/>
                 <a:cs typeface="Times New Roman" pitchFamily="34" charset="-120"/>
               </a:rPr>
-              <a:t>3. Effects of Water Scarcity (continued)</a:t>
+              <a:t>1. Causes of Water Scarcity</a:t>
             </a:r>
             <a:endParaRPr lang="en-US" sz="3600" dirty="0"/>
           </a:p>
@@ -12620,7 +13136,7 @@
                 <a:ea typeface="Times New Roman" pitchFamily="34" charset="-122"/>
                 <a:cs typeface="Times New Roman" pitchFamily="34" charset="-120"/>
               </a:rPr>
-              <a:t>Cost and schooling: </a:t>
+              <a:t>Pollution: </a:t>
             </a:r>
             <a:pPr algn="l" indent="0" marL="0">
               <a:spcAft>
@@ -12637,7 +13153,7 @@
                 <a:ea typeface="Times New Roman" pitchFamily="34" charset="-122"/>
                 <a:cs typeface="Times New Roman" pitchFamily="34" charset="-120"/>
               </a:rPr>
-              <a:t>Water becomes expensive, and children miss classes to fetch it.</a:t>
+              <a:t>Rubbish, sewage and chemicals make rivers and wells unfit to drink.</a:t>
             </a:r>
             <a:endParaRPr lang="en-US" sz="4000" dirty="0"/>
           </a:p>
@@ -12755,9 +13271,109 @@
           </a:p>
         </p:txBody>
       </p:sp>
+      <p:sp>
+        <p:nvSpPr>
+          <p:cNvPr id="3" name="Text 1"/>
+          <p:cNvSpPr/>
+          <p:nvPr/>
+        </p:nvSpPr>
+        <p:spPr>
+          <a:xfrm>
+            <a:off x="365760" y="1005840"/>
+            <a:ext cx="11460175" cy="731520"/>
+          </a:xfrm>
+          <a:prstGeom prst="rect">
+            <a:avLst/>
+          </a:prstGeom>
+          <a:noFill/>
+          <a:ln/>
+        </p:spPr>
+        <p:txBody>
+          <a:bodyPr wrap="square" lIns="0" tIns="0" rIns="0" bIns="0" rtlCol="0" anchor="ctr">
+            <a:normAutofit/>
+          </a:bodyPr>
+          <a:lstStyle/>
+          <a:p>
+            <a:pPr algn="ctr" indent="0" marL="0">
+              <a:buNone/>
+            </a:pPr>
+            <a:r>
+              <a:rPr lang="en-US" sz="3600" b="1" dirty="0">
+                <a:solidFill>
+                  <a:srgbClr val="990011"/>
+                </a:solidFill>
+                <a:latin typeface="Times New Roman" pitchFamily="34" charset="0"/>
+                <a:ea typeface="Times New Roman" pitchFamily="34" charset="-122"/>
+                <a:cs typeface="Times New Roman" pitchFamily="34" charset="-120"/>
+              </a:rPr>
+              <a:t>1. Causes of Water Scarcity</a:t>
+            </a:r>
+            <a:endParaRPr lang="en-US" sz="3600" dirty="0"/>
+          </a:p>
+        </p:txBody>
+      </p:sp>
+      <p:sp>
+        <p:nvSpPr>
+          <p:cNvPr id="4" name="Text 2"/>
+          <p:cNvSpPr/>
+          <p:nvPr/>
+        </p:nvSpPr>
+        <p:spPr>
+          <a:xfrm>
+            <a:off x="365760" y="1783080"/>
+            <a:ext cx="4846320" cy="4617720"/>
+          </a:xfrm>
+          <a:prstGeom prst="rect">
+            <a:avLst/>
+          </a:prstGeom>
+          <a:noFill/>
+          <a:ln/>
+        </p:spPr>
+        <p:txBody>
+          <a:bodyPr wrap="square" lIns="0" tIns="0" rIns="0" bIns="0" rtlCol="0" anchor="t"/>
+          <a:lstStyle/>
+          <a:p>
+            <a:pPr algn="l" indent="0" marL="0">
+              <a:spcAft>
+                <a:spcPts val="800"/>
+              </a:spcAft>
+              <a:buNone/>
+            </a:pPr>
+            <a:r>
+              <a:rPr lang="en-US" sz="3600" b="1" dirty="0">
+                <a:solidFill>
+                  <a:srgbClr val="111111"/>
+                </a:solidFill>
+                <a:latin typeface="Times New Roman" pitchFamily="34" charset="0"/>
+                <a:ea typeface="Times New Roman" pitchFamily="34" charset="-122"/>
+                <a:cs typeface="Times New Roman" pitchFamily="34" charset="-120"/>
+              </a:rPr>
+              <a:t>Waste: </a:t>
+            </a:r>
+            <a:pPr algn="l" indent="0" marL="0">
+              <a:spcAft>
+                <a:spcPts val="800"/>
+              </a:spcAft>
+              <a:buNone/>
+            </a:pPr>
+            <a:r>
+              <a:rPr lang="en-US" sz="3600" dirty="0">
+                <a:solidFill>
+                  <a:srgbClr val="111111"/>
+                </a:solidFill>
+                <a:latin typeface="Times New Roman" pitchFamily="34" charset="0"/>
+                <a:ea typeface="Times New Roman" pitchFamily="34" charset="-122"/>
+                <a:cs typeface="Times New Roman" pitchFamily="34" charset="-120"/>
+              </a:rPr>
+              <a:t>Leaking pipes and taps, and careless use, waste a lot of water.</a:t>
+            </a:r>
+            <a:endParaRPr lang="en-US" sz="3600" dirty="0"/>
+          </a:p>
+        </p:txBody>
+      </p:sp>
       <p:pic>
         <p:nvPicPr>
-          <p:cNvPr id="3" name="Image 0" descr="/home/claude/f4/img/minesec_sheet.png">    </p:cNvPr>
+          <p:cNvPr id="5" name="Image 0" descr="/home/claude/f4/img/v2/f4_leakingtap.jpg">    </p:cNvPr>
           <p:cNvPicPr>
             <a:picLocks noChangeAspect="1"/>
           </p:cNvPicPr>
@@ -12771,8 +13387,8 @@
         </p:blipFill>
         <p:spPr>
           <a:xfrm>
-            <a:off x="0" y="658368"/>
-            <a:ext cx="3840480" cy="5833872"/>
+            <a:off x="5349240" y="2071212"/>
+            <a:ext cx="6659575" cy="3693983"/>
           </a:xfrm>
           <a:prstGeom prst="rect">
             <a:avLst/>
@@ -12781,14 +13397,14 @@
       </p:pic>
       <p:sp>
         <p:nvSpPr>
-          <p:cNvPr id="4" name="Text 1"/>
+          <p:cNvPr id="6" name="Text 3"/>
           <p:cNvSpPr/>
           <p:nvPr/>
         </p:nvSpPr>
         <p:spPr>
           <a:xfrm>
-            <a:off x="4069080" y="1005840"/>
-            <a:ext cx="7802575" cy="731520"/>
+            <a:off x="5349240" y="6089904"/>
+            <a:ext cx="6659575" cy="347472"/>
           </a:xfrm>
           <a:prstGeom prst="rect">
             <a:avLst/>
@@ -12797,142 +13413,24 @@
           <a:ln/>
         </p:spPr>
         <p:txBody>
-          <a:bodyPr wrap="square" lIns="0" tIns="0" rIns="0" bIns="0" rtlCol="0" anchor="ctr">
-            <a:normAutofit/>
-          </a:bodyPr>
+          <a:bodyPr wrap="square" lIns="0" tIns="0" rIns="0" bIns="0" rtlCol="0" anchor="ctr"/>
           <a:lstStyle/>
           <a:p>
             <a:pPr algn="ctr" indent="0" marL="0">
               <a:buNone/>
             </a:pPr>
             <a:r>
-              <a:rPr lang="en-US" sz="3600" b="1" dirty="0">
-                <a:solidFill>
-                  <a:srgbClr val="990011"/>
+              <a:rPr lang="en-US" sz="1600" i="1" dirty="0">
+                <a:solidFill>
+                  <a:srgbClr val="555555"/>
                 </a:solidFill>
                 <a:latin typeface="Times New Roman" pitchFamily="34" charset="0"/>
                 <a:ea typeface="Times New Roman" pitchFamily="34" charset="-122"/>
                 <a:cs typeface="Times New Roman" pitchFamily="34" charset="-120"/>
               </a:rPr>
-              <a:t>4. Water Conservation Methods</a:t>
-            </a:r>
-            <a:endParaRPr lang="en-US" sz="3600" dirty="0"/>
-          </a:p>
-        </p:txBody>
-      </p:sp>
-      <p:sp>
-        <p:nvSpPr>
-          <p:cNvPr id="5" name="Text 2"/>
-          <p:cNvSpPr/>
-          <p:nvPr/>
-        </p:nvSpPr>
-        <p:spPr>
-          <a:xfrm>
-            <a:off x="4069080" y="1783080"/>
-            <a:ext cx="7802575" cy="4663440"/>
-          </a:xfrm>
-          <a:prstGeom prst="rect">
-            <a:avLst/>
-          </a:prstGeom>
-          <a:noFill/>
-          <a:ln/>
-        </p:spPr>
-        <p:txBody>
-          <a:bodyPr wrap="square" lIns="0" tIns="0" rIns="0" bIns="0" rtlCol="0" anchor="t"/>
-          <a:lstStyle/>
-          <a:p>
-            <a:pPr algn="l" indent="0" marL="0">
-              <a:spcAft>
-                <a:spcPts val="800"/>
-              </a:spcAft>
-              <a:buNone/>
-            </a:pPr>
-            <a:r>
-              <a:rPr lang="en-US" sz="4000" i="1" dirty="0">
-                <a:solidFill>
-                  <a:srgbClr val="111111"/>
-                </a:solidFill>
-                <a:latin typeface="Times New Roman" pitchFamily="34" charset="0"/>
-                <a:ea typeface="Times New Roman" pitchFamily="34" charset="-122"/>
-                <a:cs typeface="Times New Roman" pitchFamily="34" charset="-120"/>
-              </a:rPr>
-              <a:t>Water can be conserved in the following ways:</a:t>
-            </a:r>
-            <a:endParaRPr lang="en-US" sz="4000" dirty="0"/>
-          </a:p>
-          <a:p>
-            <a:pPr algn="l" indent="0" marL="0">
-              <a:spcAft>
-                <a:spcPts val="800"/>
-              </a:spcAft>
-              <a:buNone/>
-            </a:pPr>
-            <a:r>
-              <a:rPr lang="en-US" sz="4000" b="1" dirty="0">
-                <a:solidFill>
-                  <a:srgbClr val="111111"/>
-                </a:solidFill>
-                <a:latin typeface="Times New Roman" pitchFamily="34" charset="0"/>
-                <a:ea typeface="Times New Roman" pitchFamily="34" charset="-122"/>
-                <a:cs typeface="Times New Roman" pitchFamily="34" charset="-120"/>
-              </a:rPr>
-              <a:t>At home: </a:t>
-            </a:r>
-            <a:pPr algn="l" indent="0" marL="0">
-              <a:spcAft>
-                <a:spcPts val="800"/>
-              </a:spcAft>
-              <a:buNone/>
-            </a:pPr>
-            <a:r>
-              <a:rPr lang="en-US" sz="4000" dirty="0">
-                <a:solidFill>
-                  <a:srgbClr val="111111"/>
-                </a:solidFill>
-                <a:latin typeface="Times New Roman" pitchFamily="34" charset="0"/>
-                <a:ea typeface="Times New Roman" pitchFamily="34" charset="-122"/>
-                <a:cs typeface="Times New Roman" pitchFamily="34" charset="-120"/>
-              </a:rPr>
-              <a:t>We should repair leaks and close taps.</a:t>
-            </a:r>
-            <a:endParaRPr lang="en-US" sz="4000" dirty="0"/>
-          </a:p>
-          <a:p>
-            <a:pPr algn="l" indent="0" marL="0">
-              <a:spcAft>
-                <a:spcPts val="800"/>
-              </a:spcAft>
-              <a:buNone/>
-            </a:pPr>
-            <a:r>
-              <a:rPr lang="en-US" sz="4000" b="1" dirty="0">
-                <a:solidFill>
-                  <a:srgbClr val="111111"/>
-                </a:solidFill>
-                <a:latin typeface="Times New Roman" pitchFamily="34" charset="0"/>
-                <a:ea typeface="Times New Roman" pitchFamily="34" charset="-122"/>
-                <a:cs typeface="Times New Roman" pitchFamily="34" charset="-120"/>
-              </a:rPr>
-              <a:t>Rainwater harvesting: </a:t>
-            </a:r>
-            <a:pPr algn="l" indent="0" marL="0">
-              <a:spcAft>
-                <a:spcPts val="800"/>
-              </a:spcAft>
-              <a:buNone/>
-            </a:pPr>
-            <a:r>
-              <a:rPr lang="en-US" sz="4000" dirty="0">
-                <a:solidFill>
-                  <a:srgbClr val="111111"/>
-                </a:solidFill>
-                <a:latin typeface="Times New Roman" pitchFamily="34" charset="0"/>
-                <a:ea typeface="Times New Roman" pitchFamily="34" charset="-122"/>
-                <a:cs typeface="Times New Roman" pitchFamily="34" charset="-120"/>
-              </a:rPr>
-              <a:t>Rainwater can be collected from roofs and stored in tanks.</a:t>
-            </a:r>
-            <a:endParaRPr lang="en-US" sz="4000" dirty="0"/>
+              <a:t>Illustration: a leaking tap</a:t>
+            </a:r>
+            <a:endParaRPr lang="en-US" sz="1600" dirty="0"/>
           </a:p>
         </p:txBody>
       </p:sp>
@@ -13107,7 +13605,7 @@
                 <a:ea typeface="Times New Roman" pitchFamily="34" charset="-122"/>
                 <a:cs typeface="Times New Roman" pitchFamily="34" charset="-120"/>
               </a:rPr>
-              <a:t>4. Water Conservation Methods (continued)</a:t>
+              <a:t>1. Causes of Water Scarcity</a:t>
             </a:r>
             <a:endParaRPr lang="en-US" sz="3600" dirty="0"/>
           </a:p>
@@ -13149,7 +13647,7 @@
                 <a:ea typeface="Times New Roman" pitchFamily="34" charset="-122"/>
                 <a:cs typeface="Times New Roman" pitchFamily="34" charset="-120"/>
               </a:rPr>
-              <a:t>In farming: </a:t>
+              <a:t>Poor networks: </a:t>
             </a:r>
             <a:pPr algn="l" indent="0" marL="0">
               <a:spcAft>
@@ -13166,44 +13664,7 @@
                 <a:ea typeface="Times New Roman" pitchFamily="34" charset="-122"/>
                 <a:cs typeface="Times New Roman" pitchFamily="34" charset="-120"/>
               </a:rPr>
-              <a:t>Drip irrigation gives water directly to the roots of plants.</a:t>
-            </a:r>
-            <a:endParaRPr lang="en-US" sz="4000" dirty="0"/>
-          </a:p>
-          <a:p>
-            <a:pPr algn="l" indent="0" marL="0">
-              <a:spcAft>
-                <a:spcPts val="800"/>
-              </a:spcAft>
-              <a:buNone/>
-            </a:pPr>
-            <a:r>
-              <a:rPr lang="en-US" sz="4000" b="1" dirty="0">
-                <a:solidFill>
-                  <a:srgbClr val="111111"/>
-                </a:solidFill>
-                <a:latin typeface="Times New Roman" pitchFamily="34" charset="0"/>
-                <a:ea typeface="Times New Roman" pitchFamily="34" charset="-122"/>
-                <a:cs typeface="Times New Roman" pitchFamily="34" charset="-120"/>
-              </a:rPr>
-              <a:t>Large projects: </a:t>
-            </a:r>
-            <a:pPr algn="l" indent="0" marL="0">
-              <a:spcAft>
-                <a:spcPts val="800"/>
-              </a:spcAft>
-              <a:buNone/>
-            </a:pPr>
-            <a:r>
-              <a:rPr lang="en-US" sz="4000" dirty="0">
-                <a:solidFill>
-                  <a:srgbClr val="111111"/>
-                </a:solidFill>
-                <a:latin typeface="Times New Roman" pitchFamily="34" charset="0"/>
-                <a:ea typeface="Times New Roman" pitchFamily="34" charset="-122"/>
-                <a:cs typeface="Times New Roman" pitchFamily="34" charset="-120"/>
-              </a:rPr>
-              <a:t>Dams and boreholes store and supply water.</a:t>
+              <a:t>Old pipes, too few boreholes and power cuts at pumping stations limit supply.</a:t>
             </a:r>
             <a:endParaRPr lang="en-US" sz="4000" dirty="0"/>
           </a:p>
@@ -13329,8 +13790,8 @@
         </p:nvSpPr>
         <p:spPr>
           <a:xfrm>
-            <a:off x="457200" y="1005840"/>
-            <a:ext cx="11277295" cy="731520"/>
+            <a:off x="365760" y="1005840"/>
+            <a:ext cx="11460175" cy="731520"/>
           </a:xfrm>
           <a:prstGeom prst="rect">
             <a:avLst/>
@@ -13339,7 +13800,9 @@
           <a:ln/>
         </p:spPr>
         <p:txBody>
-          <a:bodyPr wrap="square" lIns="0" tIns="0" rIns="0" bIns="0" rtlCol="0" anchor="ctr"/>
+          <a:bodyPr wrap="square" lIns="0" tIns="0" rIns="0" bIns="0" rtlCol="0" anchor="ctr">
+            <a:normAutofit/>
+          </a:bodyPr>
           <a:lstStyle/>
           <a:p>
             <a:pPr algn="ctr" indent="0" marL="0">
@@ -13354,7 +13817,86 @@
                 <a:ea typeface="Times New Roman" pitchFamily="34" charset="-122"/>
                 <a:cs typeface="Times New Roman" pitchFamily="34" charset="-120"/>
               </a:rPr>
-              <a:t>4. Water Conservation Methods</a:t>
+              <a:t>2. Effects of Water Scarcity</a:t>
+            </a:r>
+            <a:endParaRPr lang="en-US" sz="3600" dirty="0"/>
+          </a:p>
+        </p:txBody>
+      </p:sp>
+      <p:sp>
+        <p:nvSpPr>
+          <p:cNvPr id="4" name="Text 2"/>
+          <p:cNvSpPr/>
+          <p:nvPr/>
+        </p:nvSpPr>
+        <p:spPr>
+          <a:xfrm>
+            <a:off x="365760" y="1783080"/>
+            <a:ext cx="4846320" cy="4617720"/>
+          </a:xfrm>
+          <a:prstGeom prst="rect">
+            <a:avLst/>
+          </a:prstGeom>
+          <a:noFill/>
+          <a:ln/>
+        </p:spPr>
+        <p:txBody>
+          <a:bodyPr wrap="square" lIns="0" tIns="0" rIns="0" bIns="0" rtlCol="0" anchor="t"/>
+          <a:lstStyle/>
+          <a:p>
+            <a:pPr algn="l" indent="0" marL="0">
+              <a:spcAft>
+                <a:spcPts val="800"/>
+              </a:spcAft>
+              <a:buNone/>
+            </a:pPr>
+            <a:r>
+              <a:rPr lang="en-US" sz="3600" i="1" dirty="0">
+                <a:solidFill>
+                  <a:srgbClr val="111111"/>
+                </a:solidFill>
+                <a:latin typeface="Times New Roman" pitchFamily="34" charset="0"/>
+                <a:ea typeface="Times New Roman" pitchFamily="34" charset="-122"/>
+                <a:cs typeface="Times New Roman" pitchFamily="34" charset="-120"/>
+              </a:rPr>
+              <a:t>Water scarcity has the following effects:</a:t>
+            </a:r>
+            <a:endParaRPr lang="en-US" sz="3600" dirty="0"/>
+          </a:p>
+          <a:p>
+            <a:pPr algn="l" indent="0" marL="0">
+              <a:spcAft>
+                <a:spcPts val="800"/>
+              </a:spcAft>
+              <a:buNone/>
+            </a:pPr>
+            <a:r>
+              <a:rPr lang="en-US" sz="3600" b="1" dirty="0">
+                <a:solidFill>
+                  <a:srgbClr val="111111"/>
+                </a:solidFill>
+                <a:latin typeface="Times New Roman" pitchFamily="34" charset="0"/>
+                <a:ea typeface="Times New Roman" pitchFamily="34" charset="-122"/>
+                <a:cs typeface="Times New Roman" pitchFamily="34" charset="-120"/>
+              </a:rPr>
+              <a:t>Loss of time: </a:t>
+            </a:r>
+            <a:pPr algn="l" indent="0" marL="0">
+              <a:spcAft>
+                <a:spcPts val="800"/>
+              </a:spcAft>
+              <a:buNone/>
+            </a:pPr>
+            <a:r>
+              <a:rPr lang="en-US" sz="3600" dirty="0">
+                <a:solidFill>
+                  <a:srgbClr val="111111"/>
+                </a:solidFill>
+                <a:latin typeface="Times New Roman" pitchFamily="34" charset="0"/>
+                <a:ea typeface="Times New Roman" pitchFamily="34" charset="-122"/>
+                <a:cs typeface="Times New Roman" pitchFamily="34" charset="-120"/>
+              </a:rPr>
+              <a:t>Women and children walk long distances and queue for hours.</a:t>
             </a:r>
             <a:endParaRPr lang="en-US" sz="3600" dirty="0"/>
           </a:p>
@@ -13362,7 +13904,7 @@
       </p:sp>
       <p:pic>
         <p:nvPicPr>
-          <p:cNvPr id="4" name="Image 0" descr="/home/claude/f4/img/v2/rainwater_big.png">    </p:cNvPr>
+          <p:cNvPr id="5" name="Image 0" descr="/home/claude/f4/img/v2/f4_fetchwater.jpg">    </p:cNvPr>
           <p:cNvPicPr>
             <a:picLocks noChangeAspect="1"/>
           </p:cNvPicPr>
@@ -13376,8 +13918,8 @@
         </p:blipFill>
         <p:spPr>
           <a:xfrm>
-            <a:off x="629930" y="1783080"/>
-            <a:ext cx="10931835" cy="4270248"/>
+            <a:off x="5349240" y="2069407"/>
+            <a:ext cx="6659575" cy="3697594"/>
           </a:xfrm>
           <a:prstGeom prst="rect">
             <a:avLst/>
@@ -13386,14 +13928,14 @@
       </p:pic>
       <p:sp>
         <p:nvSpPr>
-          <p:cNvPr id="5" name="Text 2"/>
+          <p:cNvPr id="6" name="Text 3"/>
           <p:cNvSpPr/>
           <p:nvPr/>
         </p:nvSpPr>
         <p:spPr>
           <a:xfrm>
-            <a:off x="457200" y="6089904"/>
-            <a:ext cx="11277295" cy="347472"/>
+            <a:off x="5349240" y="6089904"/>
+            <a:ext cx="6659575" cy="347472"/>
           </a:xfrm>
           <a:prstGeom prst="rect">
             <a:avLst/>
@@ -13409,7 +13951,7 @@
               <a:buNone/>
             </a:pPr>
             <a:r>
-              <a:rPr lang="en-US" sz="1800" i="1" dirty="0">
+              <a:rPr lang="en-US" sz="1600" i="1" dirty="0">
                 <a:solidFill>
                   <a:srgbClr val="555555"/>
                 </a:solidFill>
@@ -13417,9 +13959,9 @@
                 <a:ea typeface="Times New Roman" pitchFamily="34" charset="-122"/>
                 <a:cs typeface="Times New Roman" pitchFamily="34" charset="-120"/>
               </a:rPr>
-              <a:t>Illustration: rainwater harvesting</a:t>
-            </a:r>
-            <a:endParaRPr lang="en-US" sz="1800" dirty="0"/>
+              <a:t>Illustration: fetching water</a:t>
+            </a:r>
+            <a:endParaRPr lang="en-US" sz="1600" dirty="0"/>
           </a:p>
         </p:txBody>
       </p:sp>
@@ -13529,7 +14071,7 @@
                 <a:ea typeface="Calibri" pitchFamily="34" charset="-122"/>
                 <a:cs typeface="Calibri" pitchFamily="34" charset="-120"/>
               </a:rPr>
-              <a:t>FORMATIVE EVALUATION</a:t>
+              <a:t>BOARD SUMMARY</a:t>
             </a:r>
             <a:endParaRPr lang="en-US" sz="1400" dirty="0"/>
           </a:p>
@@ -13552,7 +14094,7 @@
         <p:spPr>
           <a:xfrm>
             <a:off x="0" y="658368"/>
-            <a:ext cx="5120640" cy="5833872"/>
+            <a:ext cx="3840480" cy="5833872"/>
           </a:xfrm>
           <a:prstGeom prst="rect">
             <a:avLst/>
@@ -13567,8 +14109,8 @@
         </p:nvSpPr>
         <p:spPr>
           <a:xfrm>
-            <a:off x="5349240" y="1005840"/>
-            <a:ext cx="6522415" cy="731520"/>
+            <a:off x="4069080" y="1005840"/>
+            <a:ext cx="7802575" cy="731520"/>
           </a:xfrm>
           <a:prstGeom prst="rect">
             <a:avLst/>
@@ -13594,7 +14136,7 @@
                 <a:ea typeface="Times New Roman" pitchFamily="34" charset="-122"/>
                 <a:cs typeface="Times New Roman" pitchFamily="34" charset="-120"/>
               </a:rPr>
-              <a:t>Evaluation 1</a:t>
+              <a:t>2. Effects of Water Scarcity</a:t>
             </a:r>
             <a:endParaRPr lang="en-US" sz="3600" dirty="0"/>
           </a:p>
@@ -13608,8 +14150,8 @@
         </p:nvSpPr>
         <p:spPr>
           <a:xfrm>
-            <a:off x="5349240" y="1783080"/>
-            <a:ext cx="6522415" cy="4663440"/>
+            <a:off x="4069080" y="1783080"/>
+            <a:ext cx="7802575" cy="4663440"/>
           </a:xfrm>
           <a:prstGeom prst="rect">
             <a:avLst/>
@@ -13628,7 +14170,7 @@
               <a:buNone/>
             </a:pPr>
             <a:r>
-              <a:rPr lang="en-US" sz="4000" dirty="0">
+              <a:rPr lang="en-US" sz="4000" b="1" dirty="0">
                 <a:solidFill>
                   <a:srgbClr val="111111"/>
                 </a:solidFill>
@@ -13636,7 +14178,98 @@
                 <a:ea typeface="Times New Roman" pitchFamily="34" charset="-122"/>
                 <a:cs typeface="Times New Roman" pitchFamily="34" charset="-120"/>
               </a:rPr>
-              <a:t>Give two effects of water scarcity.</a:t>
+              <a:t>Diseases: </a:t>
+            </a:r>
+            <a:pPr algn="l" indent="0" marL="0">
+              <a:spcAft>
+                <a:spcPts val="800"/>
+              </a:spcAft>
+              <a:buNone/>
+            </a:pPr>
+            <a:r>
+              <a:rPr lang="en-US" sz="4000" dirty="0">
+                <a:solidFill>
+                  <a:srgbClr val="111111"/>
+                </a:solidFill>
+                <a:latin typeface="Times New Roman" pitchFamily="34" charset="0"/>
+                <a:ea typeface="Times New Roman" pitchFamily="34" charset="-122"/>
+                <a:cs typeface="Times New Roman" pitchFamily="34" charset="-120"/>
+              </a:rPr>
+              <a:t>Dirty water causes cholera, typhoid and diarrhoea.</a:t>
+            </a:r>
+            <a:endParaRPr lang="en-US" sz="4000" dirty="0"/>
+          </a:p>
+          <a:p>
+            <a:pPr algn="l" indent="0" marL="0">
+              <a:spcAft>
+                <a:spcPts val="800"/>
+              </a:spcAft>
+              <a:buNone/>
+            </a:pPr>
+            <a:r>
+              <a:rPr lang="en-US" sz="4000" b="1" dirty="0">
+                <a:solidFill>
+                  <a:srgbClr val="111111"/>
+                </a:solidFill>
+                <a:latin typeface="Times New Roman" pitchFamily="34" charset="0"/>
+                <a:ea typeface="Times New Roman" pitchFamily="34" charset="-122"/>
+                <a:cs typeface="Times New Roman" pitchFamily="34" charset="-120"/>
+              </a:rPr>
+              <a:t>High cost: </a:t>
+            </a:r>
+            <a:pPr algn="l" indent="0" marL="0">
+              <a:spcAft>
+                <a:spcPts val="800"/>
+              </a:spcAft>
+              <a:buNone/>
+            </a:pPr>
+            <a:r>
+              <a:rPr lang="en-US" sz="4000" dirty="0">
+                <a:solidFill>
+                  <a:srgbClr val="111111"/>
+                </a:solidFill>
+                <a:latin typeface="Times New Roman" pitchFamily="34" charset="0"/>
+                <a:ea typeface="Times New Roman" pitchFamily="34" charset="-122"/>
+                <a:cs typeface="Times New Roman" pitchFamily="34" charset="-120"/>
+              </a:rPr>
+              <a:t>Water sellers raise prices, and poor families spend more.</a:t>
+            </a:r>
+            <a:endParaRPr lang="en-US" sz="4000" dirty="0"/>
+          </a:p>
+          <a:p>
+            <a:pPr algn="l" indent="0" marL="0">
+              <a:spcAft>
+                <a:spcPts val="800"/>
+              </a:spcAft>
+              <a:buNone/>
+            </a:pPr>
+            <a:r>
+              <a:rPr lang="en-US" sz="4000" b="1" dirty="0">
+                <a:solidFill>
+                  <a:srgbClr val="111111"/>
+                </a:solidFill>
+                <a:latin typeface="Times New Roman" pitchFamily="34" charset="0"/>
+                <a:ea typeface="Times New Roman" pitchFamily="34" charset="-122"/>
+                <a:cs typeface="Times New Roman" pitchFamily="34" charset="-120"/>
+              </a:rPr>
+              <a:t>Schooling: </a:t>
+            </a:r>
+            <a:pPr algn="l" indent="0" marL="0">
+              <a:spcAft>
+                <a:spcPts val="800"/>
+              </a:spcAft>
+              <a:buNone/>
+            </a:pPr>
+            <a:r>
+              <a:rPr lang="en-US" sz="4000" dirty="0">
+                <a:solidFill>
+                  <a:srgbClr val="111111"/>
+                </a:solidFill>
+                <a:latin typeface="Times New Roman" pitchFamily="34" charset="0"/>
+                <a:ea typeface="Times New Roman" pitchFamily="34" charset="-122"/>
+                <a:cs typeface="Times New Roman" pitchFamily="34" charset="-120"/>
+              </a:rPr>
+              <a:t>Children miss classes to fetch water.</a:t>
             </a:r>
             <a:endParaRPr lang="en-US" sz="4000" dirty="0"/>
           </a:p>
@@ -13748,7 +14381,7 @@
                 <a:ea typeface="Calibri" pitchFamily="34" charset="-122"/>
                 <a:cs typeface="Calibri" pitchFamily="34" charset="-120"/>
               </a:rPr>
-              <a:t>FORMATIVE EVALUATION</a:t>
+              <a:t>BOARD SUMMARY</a:t>
             </a:r>
             <a:endParaRPr lang="en-US" sz="1400" dirty="0"/>
           </a:p>
@@ -13813,7 +14446,7 @@
                 <a:ea typeface="Times New Roman" pitchFamily="34" charset="-122"/>
                 <a:cs typeface="Times New Roman" pitchFamily="34" charset="-120"/>
               </a:rPr>
-              <a:t>Expected Answer</a:t>
+              <a:t>2. Effects of Water Scarcity (continued)</a:t>
             </a:r>
             <a:endParaRPr lang="en-US" sz="3600" dirty="0"/>
           </a:p>
@@ -13847,7 +14480,7 @@
               <a:buNone/>
             </a:pPr>
             <a:r>
-              <a:rPr lang="en-US" sz="4000" dirty="0">
+              <a:rPr lang="en-US" sz="4000" b="1" dirty="0">
                 <a:solidFill>
                   <a:srgbClr val="111111"/>
                 </a:solidFill>
@@ -13855,7 +14488,24 @@
                 <a:ea typeface="Times New Roman" pitchFamily="34" charset="-122"/>
                 <a:cs typeface="Times New Roman" pitchFamily="34" charset="-120"/>
               </a:rPr>
-              <a:t>Long queues and diseases like cholera.</a:t>
+              <a:t>Farming and conflicts: </a:t>
+            </a:r>
+            <a:pPr algn="l" indent="0" marL="0">
+              <a:spcAft>
+                <a:spcPts val="800"/>
+              </a:spcAft>
+              <a:buNone/>
+            </a:pPr>
+            <a:r>
+              <a:rPr lang="en-US" sz="4000" dirty="0">
+                <a:solidFill>
+                  <a:srgbClr val="111111"/>
+                </a:solidFill>
+                <a:latin typeface="Times New Roman" pitchFamily="34" charset="0"/>
+                <a:ea typeface="Times New Roman" pitchFamily="34" charset="-122"/>
+                <a:cs typeface="Times New Roman" pitchFamily="34" charset="-120"/>
+              </a:rPr>
+              <a:t>Crops and animals suffer, and people quarrel over water points.</a:t>
             </a:r>
             <a:endParaRPr lang="en-US" sz="4000" dirty="0"/>
           </a:p>
@@ -13967,7 +14617,7 @@
                 <a:ea typeface="Calibri" pitchFamily="34" charset="-122"/>
                 <a:cs typeface="Calibri" pitchFamily="34" charset="-120"/>
               </a:rPr>
-              <a:t>FORMATIVE EVALUATION</a:t>
+              <a:t>BOARD SUMMARY</a:t>
             </a:r>
             <a:endParaRPr lang="en-US" sz="1400" dirty="0"/>
           </a:p>
@@ -14032,7 +14682,7 @@
                 <a:ea typeface="Times New Roman" pitchFamily="34" charset="-122"/>
                 <a:cs typeface="Times New Roman" pitchFamily="34" charset="-120"/>
               </a:rPr>
-              <a:t>Evaluation 2</a:t>
+              <a:t>3. Water Conservation Methods</a:t>
             </a:r>
             <a:endParaRPr lang="en-US" sz="3600" dirty="0"/>
           </a:p>
@@ -14066,7 +14716,7 @@
               <a:buNone/>
             </a:pPr>
             <a:r>
-              <a:rPr lang="en-US" sz="4000" dirty="0">
+              <a:rPr lang="en-US" sz="4000" i="1" dirty="0">
                 <a:solidFill>
                   <a:srgbClr val="111111"/>
                 </a:solidFill>
@@ -14074,7 +14724,44 @@
                 <a:ea typeface="Times New Roman" pitchFamily="34" charset="-122"/>
                 <a:cs typeface="Times New Roman" pitchFamily="34" charset="-120"/>
               </a:rPr>
-              <a:t>Give two ways of saving water at home.</a:t>
+              <a:t>Water can be conserved in the following ways:</a:t>
+            </a:r>
+            <a:endParaRPr lang="en-US" sz="4000" dirty="0"/>
+          </a:p>
+          <a:p>
+            <a:pPr algn="l" indent="0" marL="0">
+              <a:spcAft>
+                <a:spcPts val="800"/>
+              </a:spcAft>
+              <a:buNone/>
+            </a:pPr>
+            <a:r>
+              <a:rPr lang="en-US" sz="4000" b="1" dirty="0">
+                <a:solidFill>
+                  <a:srgbClr val="111111"/>
+                </a:solidFill>
+                <a:latin typeface="Times New Roman" pitchFamily="34" charset="0"/>
+                <a:ea typeface="Times New Roman" pitchFamily="34" charset="-122"/>
+                <a:cs typeface="Times New Roman" pitchFamily="34" charset="-120"/>
+              </a:rPr>
+              <a:t>At home: </a:t>
+            </a:r>
+            <a:pPr algn="l" indent="0" marL="0">
+              <a:spcAft>
+                <a:spcPts val="800"/>
+              </a:spcAft>
+              <a:buNone/>
+            </a:pPr>
+            <a:r>
+              <a:rPr lang="en-US" sz="4000" dirty="0">
+                <a:solidFill>
+                  <a:srgbClr val="111111"/>
+                </a:solidFill>
+                <a:latin typeface="Times New Roman" pitchFamily="34" charset="0"/>
+                <a:ea typeface="Times New Roman" pitchFamily="34" charset="-122"/>
+                <a:cs typeface="Times New Roman" pitchFamily="34" charset="-120"/>
+              </a:rPr>
+              <a:t>We repair leaks, close taps and reuse water, for example for plants.</a:t>
             </a:r>
             <a:endParaRPr lang="en-US" sz="4000" dirty="0"/>
           </a:p>
@@ -14186,15 +14873,115 @@
                 <a:ea typeface="Calibri" pitchFamily="34" charset="-122"/>
                 <a:cs typeface="Calibri" pitchFamily="34" charset="-120"/>
               </a:rPr>
-              <a:t>FORMATIVE EVALUATION</a:t>
+              <a:t>BOARD SUMMARY</a:t>
             </a:r>
             <a:endParaRPr lang="en-US" sz="1400" dirty="0"/>
+          </a:p>
+        </p:txBody>
+      </p:sp>
+      <p:sp>
+        <p:nvSpPr>
+          <p:cNvPr id="3" name="Text 1"/>
+          <p:cNvSpPr/>
+          <p:nvPr/>
+        </p:nvSpPr>
+        <p:spPr>
+          <a:xfrm>
+            <a:off x="365760" y="1005840"/>
+            <a:ext cx="11460175" cy="731520"/>
+          </a:xfrm>
+          <a:prstGeom prst="rect">
+            <a:avLst/>
+          </a:prstGeom>
+          <a:noFill/>
+          <a:ln/>
+        </p:spPr>
+        <p:txBody>
+          <a:bodyPr wrap="square" lIns="0" tIns="0" rIns="0" bIns="0" rtlCol="0" anchor="ctr">
+            <a:normAutofit/>
+          </a:bodyPr>
+          <a:lstStyle/>
+          <a:p>
+            <a:pPr algn="ctr" indent="0" marL="0">
+              <a:buNone/>
+            </a:pPr>
+            <a:r>
+              <a:rPr lang="en-US" sz="3600" b="1" dirty="0">
+                <a:solidFill>
+                  <a:srgbClr val="990011"/>
+                </a:solidFill>
+                <a:latin typeface="Times New Roman" pitchFamily="34" charset="0"/>
+                <a:ea typeface="Times New Roman" pitchFamily="34" charset="-122"/>
+                <a:cs typeface="Times New Roman" pitchFamily="34" charset="-120"/>
+              </a:rPr>
+              <a:t>3. Water Conservation Methods</a:t>
+            </a:r>
+            <a:endParaRPr lang="en-US" sz="3600" dirty="0"/>
+          </a:p>
+        </p:txBody>
+      </p:sp>
+      <p:sp>
+        <p:nvSpPr>
+          <p:cNvPr id="4" name="Text 2"/>
+          <p:cNvSpPr/>
+          <p:nvPr/>
+        </p:nvSpPr>
+        <p:spPr>
+          <a:xfrm>
+            <a:off x="365760" y="1783080"/>
+            <a:ext cx="4846320" cy="4617720"/>
+          </a:xfrm>
+          <a:prstGeom prst="rect">
+            <a:avLst/>
+          </a:prstGeom>
+          <a:noFill/>
+          <a:ln/>
+        </p:spPr>
+        <p:txBody>
+          <a:bodyPr wrap="square" lIns="0" tIns="0" rIns="0" bIns="0" rtlCol="0" anchor="t"/>
+          <a:lstStyle/>
+          <a:p>
+            <a:pPr algn="l" indent="0" marL="0">
+              <a:spcAft>
+                <a:spcPts val="800"/>
+              </a:spcAft>
+              <a:buNone/>
+            </a:pPr>
+            <a:r>
+              <a:rPr lang="en-US" sz="3600" b="1" dirty="0">
+                <a:solidFill>
+                  <a:srgbClr val="111111"/>
+                </a:solidFill>
+                <a:latin typeface="Times New Roman" pitchFamily="34" charset="0"/>
+                <a:ea typeface="Times New Roman" pitchFamily="34" charset="-122"/>
+                <a:cs typeface="Times New Roman" pitchFamily="34" charset="-120"/>
+              </a:rPr>
+              <a:t>Rainwater harvesting: </a:t>
+            </a:r>
+            <a:pPr algn="l" indent="0" marL="0">
+              <a:spcAft>
+                <a:spcPts val="800"/>
+              </a:spcAft>
+              <a:buNone/>
+            </a:pPr>
+            <a:r>
+              <a:rPr lang="en-US" sz="3600" dirty="0">
+                <a:solidFill>
+                  <a:srgbClr val="111111"/>
+                </a:solidFill>
+                <a:latin typeface="Times New Roman" pitchFamily="34" charset="0"/>
+                <a:ea typeface="Times New Roman" pitchFamily="34" charset="-122"/>
+                <a:cs typeface="Times New Roman" pitchFamily="34" charset="-120"/>
+              </a:rPr>
+              <a:t>Rain water is collected from roofs and stored in tanks.</a:t>
+            </a:r>
+            <a:endParaRPr lang="en-US" sz="3600" dirty="0"/>
           </a:p>
         </p:txBody>
       </p:sp>
       <p:pic>
         <p:nvPicPr>
-          <p:cNvPr id="3" name="Image 0" descr="/home/claude/f4/img/minesec_sheet.png">    </p:cNvPr>
+          <p:cNvPr id="5" name="Image 0" descr="/home/claude/f4/img/v2/rainwater_big.png">    </p:cNvPr>
           <p:cNvPicPr>
             <a:picLocks noChangeAspect="1"/>
           </p:cNvPicPr>
@@ -14208,8 +14995,8 @@
         </p:blipFill>
         <p:spPr>
           <a:xfrm>
-            <a:off x="0" y="658368"/>
-            <a:ext cx="5120640" cy="5833872"/>
+            <a:off x="5349240" y="2617506"/>
+            <a:ext cx="6659575" cy="2601397"/>
           </a:xfrm>
           <a:prstGeom prst="rect">
             <a:avLst/>
@@ -14218,14 +15005,14 @@
       </p:pic>
       <p:sp>
         <p:nvSpPr>
-          <p:cNvPr id="4" name="Text 1"/>
+          <p:cNvPr id="6" name="Text 3"/>
           <p:cNvSpPr/>
           <p:nvPr/>
         </p:nvSpPr>
         <p:spPr>
           <a:xfrm>
-            <a:off x="5349240" y="1005840"/>
-            <a:ext cx="6522415" cy="731520"/>
+            <a:off x="5349240" y="6089904"/>
+            <a:ext cx="6659575" cy="347472"/>
           </a:xfrm>
           <a:prstGeom prst="rect">
             <a:avLst/>
@@ -14234,68 +15021,24 @@
           <a:ln/>
         </p:spPr>
         <p:txBody>
-          <a:bodyPr wrap="square" lIns="0" tIns="0" rIns="0" bIns="0" rtlCol="0" anchor="ctr">
-            <a:normAutofit/>
-          </a:bodyPr>
+          <a:bodyPr wrap="square" lIns="0" tIns="0" rIns="0" bIns="0" rtlCol="0" anchor="ctr"/>
           <a:lstStyle/>
           <a:p>
             <a:pPr algn="ctr" indent="0" marL="0">
               <a:buNone/>
             </a:pPr>
             <a:r>
-              <a:rPr lang="en-US" sz="3600" b="1" dirty="0">
-                <a:solidFill>
-                  <a:srgbClr val="990011"/>
+              <a:rPr lang="en-US" sz="1600" i="1" dirty="0">
+                <a:solidFill>
+                  <a:srgbClr val="555555"/>
                 </a:solidFill>
                 <a:latin typeface="Times New Roman" pitchFamily="34" charset="0"/>
                 <a:ea typeface="Times New Roman" pitchFamily="34" charset="-122"/>
                 <a:cs typeface="Times New Roman" pitchFamily="34" charset="-120"/>
               </a:rPr>
-              <a:t>Expected Answer</a:t>
-            </a:r>
-            <a:endParaRPr lang="en-US" sz="3600" dirty="0"/>
-          </a:p>
-        </p:txBody>
-      </p:sp>
-      <p:sp>
-        <p:nvSpPr>
-          <p:cNvPr id="5" name="Text 2"/>
-          <p:cNvSpPr/>
-          <p:nvPr/>
-        </p:nvSpPr>
-        <p:spPr>
-          <a:xfrm>
-            <a:off x="5349240" y="1783080"/>
-            <a:ext cx="6522415" cy="4663440"/>
-          </a:xfrm>
-          <a:prstGeom prst="rect">
-            <a:avLst/>
-          </a:prstGeom>
-          <a:noFill/>
-          <a:ln/>
-        </p:spPr>
-        <p:txBody>
-          <a:bodyPr wrap="square" lIns="0" tIns="0" rIns="0" bIns="0" rtlCol="0" anchor="t"/>
-          <a:lstStyle/>
-          <a:p>
-            <a:pPr algn="l" indent="0" marL="0">
-              <a:spcAft>
-                <a:spcPts val="800"/>
-              </a:spcAft>
-              <a:buNone/>
-            </a:pPr>
-            <a:r>
-              <a:rPr lang="en-US" sz="4000" dirty="0">
-                <a:solidFill>
-                  <a:srgbClr val="111111"/>
-                </a:solidFill>
-                <a:latin typeface="Times New Roman" pitchFamily="34" charset="0"/>
-                <a:ea typeface="Times New Roman" pitchFamily="34" charset="-122"/>
-                <a:cs typeface="Times New Roman" pitchFamily="34" charset="-120"/>
-              </a:rPr>
-              <a:t>Repair leaks and close taps.</a:t>
-            </a:r>
-            <a:endParaRPr lang="en-US" sz="4000" dirty="0"/>
+              <a:t>Illustration: rainwater harvesting</a:t>
+            </a:r>
+            <a:endParaRPr lang="en-US" sz="1600" dirty="0"/>
           </a:p>
         </p:txBody>
       </p:sp>
@@ -14644,7 +15387,7 @@
                 <a:ea typeface="Calibri" pitchFamily="34" charset="-122"/>
                 <a:cs typeface="Calibri" pitchFamily="34" charset="-120"/>
               </a:rPr>
-              <a:t>REMEDIATION</a:t>
+              <a:t>BOARD SUMMARY</a:t>
             </a:r>
             <a:endParaRPr lang="en-US" sz="1400" dirty="0"/>
           </a:p>
@@ -14667,7 +15410,7 @@
         <p:spPr>
           <a:xfrm>
             <a:off x="0" y="658368"/>
-            <a:ext cx="2468880" cy="5833872"/>
+            <a:ext cx="3840480" cy="5833872"/>
           </a:xfrm>
           <a:prstGeom prst="rect">
             <a:avLst/>
@@ -14682,8 +15425,8 @@
         </p:nvSpPr>
         <p:spPr>
           <a:xfrm>
-            <a:off x="2697480" y="1005840"/>
-            <a:ext cx="9174175" cy="731520"/>
+            <a:off x="4069080" y="1005840"/>
+            <a:ext cx="7802575" cy="731520"/>
           </a:xfrm>
           <a:prstGeom prst="rect">
             <a:avLst/>
@@ -14709,7 +15452,7 @@
                 <a:ea typeface="Times New Roman" pitchFamily="34" charset="-122"/>
                 <a:cs typeface="Times New Roman" pitchFamily="34" charset="-120"/>
               </a:rPr>
-              <a:t>Remediation</a:t>
+              <a:t>3. Water Conservation Methods</a:t>
             </a:r>
             <a:endParaRPr lang="en-US" sz="3600" dirty="0"/>
           </a:p>
@@ -14723,8 +15466,8 @@
         </p:nvSpPr>
         <p:spPr>
           <a:xfrm>
-            <a:off x="2697480" y="1783080"/>
-            <a:ext cx="9174175" cy="4663440"/>
+            <a:off x="4069080" y="1783080"/>
+            <a:ext cx="7802575" cy="4663440"/>
           </a:xfrm>
           <a:prstGeom prst="rect">
             <a:avLst/>
@@ -14751,18 +15494,13 @@
                 <a:ea typeface="Times New Roman" pitchFamily="34" charset="-122"/>
                 <a:cs typeface="Times New Roman" pitchFamily="34" charset="-120"/>
               </a:rPr>
-              <a:t>Fill in the blanks:</a:t>
-            </a:r>
-            <a:endParaRPr lang="en-US" sz="4000" dirty="0"/>
-          </a:p>
-          <a:p>
-            <a:pPr algn="l" marL="342900" indent="-342900">
+              <a:t>In farming: </a:t>
+            </a:r>
+            <a:pPr algn="l" indent="0" marL="0">
               <a:spcAft>
                 <a:spcPts val="800"/>
               </a:spcAft>
-              <a:buSzPct val="100000"/>
-              <a:buFont typeface="+mj-lt"/>
-              <a:buAutoNum type="arabicPeriod" startAt="1"/>
+              <a:buNone/>
             </a:pPr>
             <a:r>
               <a:rPr lang="en-US" sz="4000" dirty="0">
@@ -14773,21 +15511,19 @@
                 <a:ea typeface="Times New Roman" pitchFamily="34" charset="-122"/>
                 <a:cs typeface="Times New Roman" pitchFamily="34" charset="-120"/>
               </a:rPr>
-              <a:t>Not enough clean water is water ______.</a:t>
+              <a:t>Drip irrigation and mulching give water directly to plants and reduce evaporation.</a:t>
             </a:r>
             <a:endParaRPr lang="en-US" sz="4000" dirty="0"/>
           </a:p>
           <a:p>
-            <a:pPr algn="l" marL="342900" indent="-342900">
+            <a:pPr algn="l" indent="0" marL="0">
               <a:spcAft>
                 <a:spcPts val="800"/>
               </a:spcAft>
-              <a:buSzPct val="100000"/>
-              <a:buFont typeface="+mj-lt"/>
-              <a:buAutoNum type="arabicPeriod" startAt="1"/>
+              <a:buNone/>
             </a:pPr>
             <a:r>
-              <a:rPr lang="en-US" sz="4000" dirty="0">
+              <a:rPr lang="en-US" sz="4000" b="1" dirty="0">
                 <a:solidFill>
                   <a:srgbClr val="111111"/>
                 </a:solidFill>
@@ -14795,18 +15531,13 @@
                 <a:ea typeface="Times New Roman" pitchFamily="34" charset="-122"/>
                 <a:cs typeface="Times New Roman" pitchFamily="34" charset="-120"/>
               </a:rPr>
-              <a:t>Using water carefully is water ______.</a:t>
-            </a:r>
-            <a:endParaRPr lang="en-US" sz="4000" dirty="0"/>
-          </a:p>
-          <a:p>
-            <a:pPr algn="l" marL="342900" indent="-342900">
+              <a:t>Protecting sources: </a:t>
+            </a:r>
+            <a:pPr algn="l" indent="0" marL="0">
               <a:spcAft>
                 <a:spcPts val="800"/>
               </a:spcAft>
-              <a:buSzPct val="100000"/>
-              <a:buFont typeface="+mj-lt"/>
-              <a:buAutoNum type="arabicPeriod" startAt="1"/>
+              <a:buNone/>
             </a:pPr>
             <a:r>
               <a:rPr lang="en-US" sz="4000" dirty="0">
@@ -14817,7 +15548,7 @@
                 <a:ea typeface="Times New Roman" pitchFamily="34" charset="-122"/>
                 <a:cs typeface="Times New Roman" pitchFamily="34" charset="-120"/>
               </a:rPr>
-              <a:t>Rain water can be stored in a ______.</a:t>
+              <a:t>Wells and rivers are kept clean, and trees are planted around sources.</a:t>
             </a:r>
             <a:endParaRPr lang="en-US" sz="4000" dirty="0"/>
           </a:p>
@@ -14929,7 +15660,7 @@
                 <a:ea typeface="Calibri" pitchFamily="34" charset="-122"/>
                 <a:cs typeface="Calibri" pitchFamily="34" charset="-120"/>
               </a:rPr>
-              <a:t>HOMEWORK</a:t>
+              <a:t>BOARD SUMMARY</a:t>
             </a:r>
             <a:endParaRPr lang="en-US" sz="1400" dirty="0"/>
           </a:p>
@@ -14994,7 +15725,7 @@
                 <a:ea typeface="Times New Roman" pitchFamily="34" charset="-122"/>
                 <a:cs typeface="Times New Roman" pitchFamily="34" charset="-120"/>
               </a:rPr>
-              <a:t>Homework</a:t>
+              <a:t>3. Water Conservation Methods (continued)</a:t>
             </a:r>
             <a:endParaRPr lang="en-US" sz="3600" dirty="0"/>
           </a:p>
@@ -15028,7 +15759,7 @@
               <a:buNone/>
             </a:pPr>
             <a:r>
-              <a:rPr lang="en-US" sz="4000" dirty="0">
+              <a:rPr lang="en-US" sz="4000" b="1" dirty="0">
                 <a:solidFill>
                   <a:srgbClr val="111111"/>
                 </a:solidFill>
@@ -15036,7 +15767,24 @@
                 <a:ea typeface="Times New Roman" pitchFamily="34" charset="-122"/>
                 <a:cs typeface="Times New Roman" pitchFamily="34" charset="-120"/>
               </a:rPr>
-              <a:t>Revise Lessons 30 to 42. Draw one diagram of your choice (layers of the atmosphere, Stevenson screen, types of rainfall, pressure belts or water cycle) and label it.</a:t>
+              <a:t>Large projects: </a:t>
+            </a:r>
+            <a:pPr algn="l" indent="0" marL="0">
+              <a:spcAft>
+                <a:spcPts val="800"/>
+              </a:spcAft>
+              <a:buNone/>
+            </a:pPr>
+            <a:r>
+              <a:rPr lang="en-US" sz="4000" dirty="0">
+                <a:solidFill>
+                  <a:srgbClr val="111111"/>
+                </a:solidFill>
+                <a:latin typeface="Times New Roman" pitchFamily="34" charset="0"/>
+                <a:ea typeface="Times New Roman" pitchFamily="34" charset="-122"/>
+                <a:cs typeface="Times New Roman" pitchFamily="34" charset="-120"/>
+              </a:rPr>
+              <a:t>Dams, reservoirs and new boreholes store and supply water.</a:t>
             </a:r>
             <a:endParaRPr lang="en-US" sz="4000" dirty="0"/>
           </a:p>
@@ -15148,6 +15896,1386 @@
                 <a:ea typeface="Calibri" pitchFamily="34" charset="-122"/>
                 <a:cs typeface="Calibri" pitchFamily="34" charset="-120"/>
               </a:rPr>
+              <a:t>FORMATIVE EVALUATION</a:t>
+            </a:r>
+            <a:endParaRPr lang="en-US" sz="1400" dirty="0"/>
+          </a:p>
+        </p:txBody>
+      </p:sp>
+      <p:pic>
+        <p:nvPicPr>
+          <p:cNvPr id="3" name="Image 0" descr="/home/claude/f4/img/minesec_sheet.png">    </p:cNvPr>
+          <p:cNvPicPr>
+            <a:picLocks noChangeAspect="1"/>
+          </p:cNvPicPr>
+          <p:nvPr/>
+        </p:nvPicPr>
+        <p:blipFill>
+          <a:blip r:embed="rId1"/>
+          <a:stretch>
+            <a:fillRect/>
+          </a:stretch>
+        </p:blipFill>
+        <p:spPr>
+          <a:xfrm>
+            <a:off x="0" y="658368"/>
+            <a:ext cx="5120640" cy="5833872"/>
+          </a:xfrm>
+          <a:prstGeom prst="rect">
+            <a:avLst/>
+          </a:prstGeom>
+        </p:spPr>
+      </p:pic>
+      <p:sp>
+        <p:nvSpPr>
+          <p:cNvPr id="4" name="Text 1"/>
+          <p:cNvSpPr/>
+          <p:nvPr/>
+        </p:nvSpPr>
+        <p:spPr>
+          <a:xfrm>
+            <a:off x="5349240" y="1005840"/>
+            <a:ext cx="6522415" cy="731520"/>
+          </a:xfrm>
+          <a:prstGeom prst="rect">
+            <a:avLst/>
+          </a:prstGeom>
+          <a:noFill/>
+          <a:ln/>
+        </p:spPr>
+        <p:txBody>
+          <a:bodyPr wrap="square" lIns="0" tIns="0" rIns="0" bIns="0" rtlCol="0" anchor="ctr">
+            <a:normAutofit/>
+          </a:bodyPr>
+          <a:lstStyle/>
+          <a:p>
+            <a:pPr algn="ctr" indent="0" marL="0">
+              <a:buNone/>
+            </a:pPr>
+            <a:r>
+              <a:rPr lang="en-US" sz="3600" b="1" dirty="0">
+                <a:solidFill>
+                  <a:srgbClr val="990011"/>
+                </a:solidFill>
+                <a:latin typeface="Times New Roman" pitchFamily="34" charset="0"/>
+                <a:ea typeface="Times New Roman" pitchFamily="34" charset="-122"/>
+                <a:cs typeface="Times New Roman" pitchFamily="34" charset="-120"/>
+              </a:rPr>
+              <a:t>Evaluation 1</a:t>
+            </a:r>
+            <a:endParaRPr lang="en-US" sz="3600" dirty="0"/>
+          </a:p>
+        </p:txBody>
+      </p:sp>
+      <p:sp>
+        <p:nvSpPr>
+          <p:cNvPr id="5" name="Text 2"/>
+          <p:cNvSpPr/>
+          <p:nvPr/>
+        </p:nvSpPr>
+        <p:spPr>
+          <a:xfrm>
+            <a:off x="5349240" y="1783080"/>
+            <a:ext cx="6522415" cy="4663440"/>
+          </a:xfrm>
+          <a:prstGeom prst="rect">
+            <a:avLst/>
+          </a:prstGeom>
+          <a:noFill/>
+          <a:ln/>
+        </p:spPr>
+        <p:txBody>
+          <a:bodyPr wrap="square" lIns="0" tIns="0" rIns="0" bIns="0" rtlCol="0" anchor="t"/>
+          <a:lstStyle/>
+          <a:p>
+            <a:pPr algn="l" indent="0" marL="0">
+              <a:spcAft>
+                <a:spcPts val="800"/>
+              </a:spcAft>
+              <a:buNone/>
+            </a:pPr>
+            <a:r>
+              <a:rPr lang="en-US" sz="4000" dirty="0">
+                <a:solidFill>
+                  <a:srgbClr val="111111"/>
+                </a:solidFill>
+                <a:latin typeface="Times New Roman" pitchFamily="34" charset="0"/>
+                <a:ea typeface="Times New Roman" pitchFamily="34" charset="-122"/>
+                <a:cs typeface="Times New Roman" pitchFamily="34" charset="-120"/>
+              </a:rPr>
+              <a:t>Give two effects of water scarcity.</a:t>
+            </a:r>
+            <a:endParaRPr lang="en-US" sz="4000" dirty="0"/>
+          </a:p>
+        </p:txBody>
+      </p:sp>
+      <p:sp>
+        <p:nvSpPr>
+          <p:cNvPr id="25" name="Slide Number Placeholder 0"/>
+          <p:cNvSpPr>
+            <a:spLocks noGrp="1"/>
+          </p:cNvSpPr>
+          <p:nvPr>
+            <p:ph type="sldNum" sz="quarter" idx="4294967295"/>
+          </p:nvPr>
+        </p:nvSpPr>
+        <p:spPr>
+          <a:xfrm>
+            <a:off x="27432" y="91440"/>
+            <a:ext cx="585216" cy="475488"/>
+          </a:xfrm>
+          <a:prstGeom prst="rect">
+            <a:avLst/>
+          </a:prstGeom>
+          <a:extLst>
+            <a:ext uri="{C572A759-6A51-4108-AA02-DFA0A04FC94B}">
+              <ma14:wrappingTextBoxFlag xmlns:ma14="http://schemas.microsoft.com/office/mac/drawingml/2011/main" val="0"/>
+            </a:ext>
+          </a:extLst>
+        </p:spPr>
+        <p:txBody>
+          <a:bodyPr/>
+          <a:lstStyle>
+            <a:lvl1pPr>
+              <a:defRPr sz="2000">
+                <a:solidFill>
+                  <a:srgbClr val="FFFFFF"/>
+                </a:solidFill>
+                <a:latin typeface="Calibri"/>
+                <a:ea typeface="Calibri"/>
+                <a:cs typeface="Calibri"/>
+              </a:defRPr>
+            </a:lvl1pPr>
+          </a:lstStyle>
+          <a:p>
+            <a:pPr algn="ctr"/>
+            <a:fld id="{F7021451-1387-4CA6-816F-3879F97B5CBC}" type="slidenum">
+              <a:rPr b="1" lang="en-US"/>
+              <a:t>42</a:t>
+            </a:fld>
+            <a:endParaRPr lang="en-US"/>
+          </a:p>
+        </p:txBody>
+      </p:sp>
+    </p:spTree>
+  </p:cSld>
+  <p:clrMapOvr>
+    <a:masterClrMapping/>
+  </p:clrMapOvr>
+</p:sld>
+</file>
+
+<file path=ppt/slides/slide43.xml><?xml version="1.0" encoding="utf-8"?>
+<p:sld xmlns:a="http://schemas.openxmlformats.org/drawingml/2006/main" xmlns:r="http://schemas.openxmlformats.org/officeDocument/2006/relationships" xmlns:p="http://schemas.openxmlformats.org/presentationml/2006/main">
+  <p:cSld name="Slide 43">
+    <p:spTree>
+      <p:nvGrpSpPr>
+        <p:cNvPr id="1" name=""/>
+        <p:cNvGrpSpPr/>
+        <p:nvPr/>
+      </p:nvGrpSpPr>
+      <p:grpSpPr>
+        <a:xfrm>
+          <a:off x="0" y="0"/>
+          <a:ext cx="0" cy="0"/>
+          <a:chOff x="0" y="0"/>
+          <a:chExt cx="0" cy="0"/>
+        </a:xfrm>
+      </p:grpSpPr>
+      <p:sp>
+        <p:nvSpPr>
+          <p:cNvPr id="2" name="Text 0"/>
+          <p:cNvSpPr/>
+          <p:nvPr/>
+        </p:nvSpPr>
+        <p:spPr>
+          <a:xfrm>
+            <a:off x="457200" y="713232"/>
+            <a:ext cx="11368735" cy="274320"/>
+          </a:xfrm>
+          <a:prstGeom prst="rect">
+            <a:avLst/>
+          </a:prstGeom>
+          <a:noFill/>
+          <a:ln/>
+        </p:spPr>
+        <p:txBody>
+          <a:bodyPr wrap="square" lIns="0" tIns="0" rIns="0" bIns="0" rtlCol="0" anchor="ctr"/>
+          <a:lstStyle/>
+          <a:p>
+            <a:pPr algn="r" indent="0" marL="0">
+              <a:buNone/>
+            </a:pPr>
+            <a:r>
+              <a:rPr lang="en-US" sz="1400" b="1" dirty="0">
+                <a:solidFill>
+                  <a:srgbClr val="1C3F6E"/>
+                </a:solidFill>
+                <a:latin typeface="Calibri" pitchFamily="34" charset="0"/>
+                <a:ea typeface="Calibri" pitchFamily="34" charset="-122"/>
+                <a:cs typeface="Calibri" pitchFamily="34" charset="-120"/>
+              </a:rPr>
+              <a:t>FORMATIVE EVALUATION</a:t>
+            </a:r>
+            <a:endParaRPr lang="en-US" sz="1400" dirty="0"/>
+          </a:p>
+        </p:txBody>
+      </p:sp>
+      <p:pic>
+        <p:nvPicPr>
+          <p:cNvPr id="3" name="Image 0" descr="/home/claude/f4/img/minesec_sheet.png">    </p:cNvPr>
+          <p:cNvPicPr>
+            <a:picLocks noChangeAspect="1"/>
+          </p:cNvPicPr>
+          <p:nvPr/>
+        </p:nvPicPr>
+        <p:blipFill>
+          <a:blip r:embed="rId1"/>
+          <a:stretch>
+            <a:fillRect/>
+          </a:stretch>
+        </p:blipFill>
+        <p:spPr>
+          <a:xfrm>
+            <a:off x="0" y="658368"/>
+            <a:ext cx="5120640" cy="5833872"/>
+          </a:xfrm>
+          <a:prstGeom prst="rect">
+            <a:avLst/>
+          </a:prstGeom>
+        </p:spPr>
+      </p:pic>
+      <p:sp>
+        <p:nvSpPr>
+          <p:cNvPr id="4" name="Text 1"/>
+          <p:cNvSpPr/>
+          <p:nvPr/>
+        </p:nvSpPr>
+        <p:spPr>
+          <a:xfrm>
+            <a:off x="5349240" y="1005840"/>
+            <a:ext cx="6522415" cy="731520"/>
+          </a:xfrm>
+          <a:prstGeom prst="rect">
+            <a:avLst/>
+          </a:prstGeom>
+          <a:noFill/>
+          <a:ln/>
+        </p:spPr>
+        <p:txBody>
+          <a:bodyPr wrap="square" lIns="0" tIns="0" rIns="0" bIns="0" rtlCol="0" anchor="ctr">
+            <a:normAutofit/>
+          </a:bodyPr>
+          <a:lstStyle/>
+          <a:p>
+            <a:pPr algn="ctr" indent="0" marL="0">
+              <a:buNone/>
+            </a:pPr>
+            <a:r>
+              <a:rPr lang="en-US" sz="3600" b="1" dirty="0">
+                <a:solidFill>
+                  <a:srgbClr val="990011"/>
+                </a:solidFill>
+                <a:latin typeface="Times New Roman" pitchFamily="34" charset="0"/>
+                <a:ea typeface="Times New Roman" pitchFamily="34" charset="-122"/>
+                <a:cs typeface="Times New Roman" pitchFamily="34" charset="-120"/>
+              </a:rPr>
+              <a:t>Expected Answer</a:t>
+            </a:r>
+            <a:endParaRPr lang="en-US" sz="3600" dirty="0"/>
+          </a:p>
+        </p:txBody>
+      </p:sp>
+      <p:sp>
+        <p:nvSpPr>
+          <p:cNvPr id="5" name="Text 2"/>
+          <p:cNvSpPr/>
+          <p:nvPr/>
+        </p:nvSpPr>
+        <p:spPr>
+          <a:xfrm>
+            <a:off x="5349240" y="1783080"/>
+            <a:ext cx="6522415" cy="4663440"/>
+          </a:xfrm>
+          <a:prstGeom prst="rect">
+            <a:avLst/>
+          </a:prstGeom>
+          <a:noFill/>
+          <a:ln/>
+        </p:spPr>
+        <p:txBody>
+          <a:bodyPr wrap="square" lIns="0" tIns="0" rIns="0" bIns="0" rtlCol="0" anchor="t"/>
+          <a:lstStyle/>
+          <a:p>
+            <a:pPr algn="l" indent="0" marL="0">
+              <a:spcAft>
+                <a:spcPts val="800"/>
+              </a:spcAft>
+              <a:buNone/>
+            </a:pPr>
+            <a:r>
+              <a:rPr lang="en-US" sz="4000" dirty="0">
+                <a:solidFill>
+                  <a:srgbClr val="111111"/>
+                </a:solidFill>
+                <a:latin typeface="Times New Roman" pitchFamily="34" charset="0"/>
+                <a:ea typeface="Times New Roman" pitchFamily="34" charset="-122"/>
+                <a:cs typeface="Times New Roman" pitchFamily="34" charset="-120"/>
+              </a:rPr>
+              <a:t>Long queues and diseases like cholera.</a:t>
+            </a:r>
+            <a:endParaRPr lang="en-US" sz="4000" dirty="0"/>
+          </a:p>
+        </p:txBody>
+      </p:sp>
+      <p:sp>
+        <p:nvSpPr>
+          <p:cNvPr id="25" name="Slide Number Placeholder 0"/>
+          <p:cNvSpPr>
+            <a:spLocks noGrp="1"/>
+          </p:cNvSpPr>
+          <p:nvPr>
+            <p:ph type="sldNum" sz="quarter" idx="4294967295"/>
+          </p:nvPr>
+        </p:nvSpPr>
+        <p:spPr>
+          <a:xfrm>
+            <a:off x="27432" y="91440"/>
+            <a:ext cx="585216" cy="475488"/>
+          </a:xfrm>
+          <a:prstGeom prst="rect">
+            <a:avLst/>
+          </a:prstGeom>
+          <a:extLst>
+            <a:ext uri="{C572A759-6A51-4108-AA02-DFA0A04FC94B}">
+              <ma14:wrappingTextBoxFlag xmlns:ma14="http://schemas.microsoft.com/office/mac/drawingml/2011/main" val="0"/>
+            </a:ext>
+          </a:extLst>
+        </p:spPr>
+        <p:txBody>
+          <a:bodyPr/>
+          <a:lstStyle>
+            <a:lvl1pPr>
+              <a:defRPr sz="2000">
+                <a:solidFill>
+                  <a:srgbClr val="FFFFFF"/>
+                </a:solidFill>
+                <a:latin typeface="Calibri"/>
+                <a:ea typeface="Calibri"/>
+                <a:cs typeface="Calibri"/>
+              </a:defRPr>
+            </a:lvl1pPr>
+          </a:lstStyle>
+          <a:p>
+            <a:pPr algn="ctr"/>
+            <a:fld id="{F7021451-1387-4CA6-816F-3879F97B5CBC}" type="slidenum">
+              <a:rPr b="1" lang="en-US"/>
+              <a:t>43</a:t>
+            </a:fld>
+            <a:endParaRPr lang="en-US"/>
+          </a:p>
+        </p:txBody>
+      </p:sp>
+    </p:spTree>
+  </p:cSld>
+  <p:clrMapOvr>
+    <a:masterClrMapping/>
+  </p:clrMapOvr>
+</p:sld>
+</file>
+
+<file path=ppt/slides/slide44.xml><?xml version="1.0" encoding="utf-8"?>
+<p:sld xmlns:a="http://schemas.openxmlformats.org/drawingml/2006/main" xmlns:r="http://schemas.openxmlformats.org/officeDocument/2006/relationships" xmlns:p="http://schemas.openxmlformats.org/presentationml/2006/main">
+  <p:cSld name="Slide 44">
+    <p:spTree>
+      <p:nvGrpSpPr>
+        <p:cNvPr id="1" name=""/>
+        <p:cNvGrpSpPr/>
+        <p:nvPr/>
+      </p:nvGrpSpPr>
+      <p:grpSpPr>
+        <a:xfrm>
+          <a:off x="0" y="0"/>
+          <a:ext cx="0" cy="0"/>
+          <a:chOff x="0" y="0"/>
+          <a:chExt cx="0" cy="0"/>
+        </a:xfrm>
+      </p:grpSpPr>
+      <p:sp>
+        <p:nvSpPr>
+          <p:cNvPr id="2" name="Text 0"/>
+          <p:cNvSpPr/>
+          <p:nvPr/>
+        </p:nvSpPr>
+        <p:spPr>
+          <a:xfrm>
+            <a:off x="457200" y="713232"/>
+            <a:ext cx="11368735" cy="274320"/>
+          </a:xfrm>
+          <a:prstGeom prst="rect">
+            <a:avLst/>
+          </a:prstGeom>
+          <a:noFill/>
+          <a:ln/>
+        </p:spPr>
+        <p:txBody>
+          <a:bodyPr wrap="square" lIns="0" tIns="0" rIns="0" bIns="0" rtlCol="0" anchor="ctr"/>
+          <a:lstStyle/>
+          <a:p>
+            <a:pPr algn="r" indent="0" marL="0">
+              <a:buNone/>
+            </a:pPr>
+            <a:r>
+              <a:rPr lang="en-US" sz="1400" b="1" dirty="0">
+                <a:solidFill>
+                  <a:srgbClr val="1C3F6E"/>
+                </a:solidFill>
+                <a:latin typeface="Calibri" pitchFamily="34" charset="0"/>
+                <a:ea typeface="Calibri" pitchFamily="34" charset="-122"/>
+                <a:cs typeface="Calibri" pitchFamily="34" charset="-120"/>
+              </a:rPr>
+              <a:t>FORMATIVE EVALUATION</a:t>
+            </a:r>
+            <a:endParaRPr lang="en-US" sz="1400" dirty="0"/>
+          </a:p>
+        </p:txBody>
+      </p:sp>
+      <p:pic>
+        <p:nvPicPr>
+          <p:cNvPr id="3" name="Image 0" descr="/home/claude/f4/img/minesec_sheet.png">    </p:cNvPr>
+          <p:cNvPicPr>
+            <a:picLocks noChangeAspect="1"/>
+          </p:cNvPicPr>
+          <p:nvPr/>
+        </p:nvPicPr>
+        <p:blipFill>
+          <a:blip r:embed="rId1"/>
+          <a:stretch>
+            <a:fillRect/>
+          </a:stretch>
+        </p:blipFill>
+        <p:spPr>
+          <a:xfrm>
+            <a:off x="0" y="658368"/>
+            <a:ext cx="5120640" cy="5833872"/>
+          </a:xfrm>
+          <a:prstGeom prst="rect">
+            <a:avLst/>
+          </a:prstGeom>
+        </p:spPr>
+      </p:pic>
+      <p:sp>
+        <p:nvSpPr>
+          <p:cNvPr id="4" name="Text 1"/>
+          <p:cNvSpPr/>
+          <p:nvPr/>
+        </p:nvSpPr>
+        <p:spPr>
+          <a:xfrm>
+            <a:off x="5349240" y="1005840"/>
+            <a:ext cx="6522415" cy="731520"/>
+          </a:xfrm>
+          <a:prstGeom prst="rect">
+            <a:avLst/>
+          </a:prstGeom>
+          <a:noFill/>
+          <a:ln/>
+        </p:spPr>
+        <p:txBody>
+          <a:bodyPr wrap="square" lIns="0" tIns="0" rIns="0" bIns="0" rtlCol="0" anchor="ctr">
+            <a:normAutofit/>
+          </a:bodyPr>
+          <a:lstStyle/>
+          <a:p>
+            <a:pPr algn="ctr" indent="0" marL="0">
+              <a:buNone/>
+            </a:pPr>
+            <a:r>
+              <a:rPr lang="en-US" sz="3600" b="1" dirty="0">
+                <a:solidFill>
+                  <a:srgbClr val="990011"/>
+                </a:solidFill>
+                <a:latin typeface="Times New Roman" pitchFamily="34" charset="0"/>
+                <a:ea typeface="Times New Roman" pitchFamily="34" charset="-122"/>
+                <a:cs typeface="Times New Roman" pitchFamily="34" charset="-120"/>
+              </a:rPr>
+              <a:t>Evaluation 2</a:t>
+            </a:r>
+            <a:endParaRPr lang="en-US" sz="3600" dirty="0"/>
+          </a:p>
+        </p:txBody>
+      </p:sp>
+      <p:sp>
+        <p:nvSpPr>
+          <p:cNvPr id="5" name="Text 2"/>
+          <p:cNvSpPr/>
+          <p:nvPr/>
+        </p:nvSpPr>
+        <p:spPr>
+          <a:xfrm>
+            <a:off x="5349240" y="1783080"/>
+            <a:ext cx="6522415" cy="4663440"/>
+          </a:xfrm>
+          <a:prstGeom prst="rect">
+            <a:avLst/>
+          </a:prstGeom>
+          <a:noFill/>
+          <a:ln/>
+        </p:spPr>
+        <p:txBody>
+          <a:bodyPr wrap="square" lIns="0" tIns="0" rIns="0" bIns="0" rtlCol="0" anchor="t"/>
+          <a:lstStyle/>
+          <a:p>
+            <a:pPr algn="l" indent="0" marL="0">
+              <a:spcAft>
+                <a:spcPts val="800"/>
+              </a:spcAft>
+              <a:buNone/>
+            </a:pPr>
+            <a:r>
+              <a:rPr lang="en-US" sz="4000" dirty="0">
+                <a:solidFill>
+                  <a:srgbClr val="111111"/>
+                </a:solidFill>
+                <a:latin typeface="Times New Roman" pitchFamily="34" charset="0"/>
+                <a:ea typeface="Times New Roman" pitchFamily="34" charset="-122"/>
+                <a:cs typeface="Times New Roman" pitchFamily="34" charset="-120"/>
+              </a:rPr>
+              <a:t>Give two ways of saving water at home.</a:t>
+            </a:r>
+            <a:endParaRPr lang="en-US" sz="4000" dirty="0"/>
+          </a:p>
+        </p:txBody>
+      </p:sp>
+      <p:sp>
+        <p:nvSpPr>
+          <p:cNvPr id="25" name="Slide Number Placeholder 0"/>
+          <p:cNvSpPr>
+            <a:spLocks noGrp="1"/>
+          </p:cNvSpPr>
+          <p:nvPr>
+            <p:ph type="sldNum" sz="quarter" idx="4294967295"/>
+          </p:nvPr>
+        </p:nvSpPr>
+        <p:spPr>
+          <a:xfrm>
+            <a:off x="27432" y="91440"/>
+            <a:ext cx="585216" cy="475488"/>
+          </a:xfrm>
+          <a:prstGeom prst="rect">
+            <a:avLst/>
+          </a:prstGeom>
+          <a:extLst>
+            <a:ext uri="{C572A759-6A51-4108-AA02-DFA0A04FC94B}">
+              <ma14:wrappingTextBoxFlag xmlns:ma14="http://schemas.microsoft.com/office/mac/drawingml/2011/main" val="0"/>
+            </a:ext>
+          </a:extLst>
+        </p:spPr>
+        <p:txBody>
+          <a:bodyPr/>
+          <a:lstStyle>
+            <a:lvl1pPr>
+              <a:defRPr sz="2000">
+                <a:solidFill>
+                  <a:srgbClr val="FFFFFF"/>
+                </a:solidFill>
+                <a:latin typeface="Calibri"/>
+                <a:ea typeface="Calibri"/>
+                <a:cs typeface="Calibri"/>
+              </a:defRPr>
+            </a:lvl1pPr>
+          </a:lstStyle>
+          <a:p>
+            <a:pPr algn="ctr"/>
+            <a:fld id="{F7021451-1387-4CA6-816F-3879F97B5CBC}" type="slidenum">
+              <a:rPr b="1" lang="en-US"/>
+              <a:t>44</a:t>
+            </a:fld>
+            <a:endParaRPr lang="en-US"/>
+          </a:p>
+        </p:txBody>
+      </p:sp>
+    </p:spTree>
+  </p:cSld>
+  <p:clrMapOvr>
+    <a:masterClrMapping/>
+  </p:clrMapOvr>
+</p:sld>
+</file>
+
+<file path=ppt/slides/slide45.xml><?xml version="1.0" encoding="utf-8"?>
+<p:sld xmlns:a="http://schemas.openxmlformats.org/drawingml/2006/main" xmlns:r="http://schemas.openxmlformats.org/officeDocument/2006/relationships" xmlns:p="http://schemas.openxmlformats.org/presentationml/2006/main">
+  <p:cSld name="Slide 45">
+    <p:spTree>
+      <p:nvGrpSpPr>
+        <p:cNvPr id="1" name=""/>
+        <p:cNvGrpSpPr/>
+        <p:nvPr/>
+      </p:nvGrpSpPr>
+      <p:grpSpPr>
+        <a:xfrm>
+          <a:off x="0" y="0"/>
+          <a:ext cx="0" cy="0"/>
+          <a:chOff x="0" y="0"/>
+          <a:chExt cx="0" cy="0"/>
+        </a:xfrm>
+      </p:grpSpPr>
+      <p:sp>
+        <p:nvSpPr>
+          <p:cNvPr id="2" name="Text 0"/>
+          <p:cNvSpPr/>
+          <p:nvPr/>
+        </p:nvSpPr>
+        <p:spPr>
+          <a:xfrm>
+            <a:off x="457200" y="713232"/>
+            <a:ext cx="11368735" cy="274320"/>
+          </a:xfrm>
+          <a:prstGeom prst="rect">
+            <a:avLst/>
+          </a:prstGeom>
+          <a:noFill/>
+          <a:ln/>
+        </p:spPr>
+        <p:txBody>
+          <a:bodyPr wrap="square" lIns="0" tIns="0" rIns="0" bIns="0" rtlCol="0" anchor="ctr"/>
+          <a:lstStyle/>
+          <a:p>
+            <a:pPr algn="r" indent="0" marL="0">
+              <a:buNone/>
+            </a:pPr>
+            <a:r>
+              <a:rPr lang="en-US" sz="1400" b="1" dirty="0">
+                <a:solidFill>
+                  <a:srgbClr val="1C3F6E"/>
+                </a:solidFill>
+                <a:latin typeface="Calibri" pitchFamily="34" charset="0"/>
+                <a:ea typeface="Calibri" pitchFamily="34" charset="-122"/>
+                <a:cs typeface="Calibri" pitchFamily="34" charset="-120"/>
+              </a:rPr>
+              <a:t>FORMATIVE EVALUATION</a:t>
+            </a:r>
+            <a:endParaRPr lang="en-US" sz="1400" dirty="0"/>
+          </a:p>
+        </p:txBody>
+      </p:sp>
+      <p:pic>
+        <p:nvPicPr>
+          <p:cNvPr id="3" name="Image 0" descr="/home/claude/f4/img/minesec_sheet.png">    </p:cNvPr>
+          <p:cNvPicPr>
+            <a:picLocks noChangeAspect="1"/>
+          </p:cNvPicPr>
+          <p:nvPr/>
+        </p:nvPicPr>
+        <p:blipFill>
+          <a:blip r:embed="rId1"/>
+          <a:stretch>
+            <a:fillRect/>
+          </a:stretch>
+        </p:blipFill>
+        <p:spPr>
+          <a:xfrm>
+            <a:off x="0" y="658368"/>
+            <a:ext cx="5120640" cy="5833872"/>
+          </a:xfrm>
+          <a:prstGeom prst="rect">
+            <a:avLst/>
+          </a:prstGeom>
+        </p:spPr>
+      </p:pic>
+      <p:sp>
+        <p:nvSpPr>
+          <p:cNvPr id="4" name="Text 1"/>
+          <p:cNvSpPr/>
+          <p:nvPr/>
+        </p:nvSpPr>
+        <p:spPr>
+          <a:xfrm>
+            <a:off x="5349240" y="1005840"/>
+            <a:ext cx="6522415" cy="731520"/>
+          </a:xfrm>
+          <a:prstGeom prst="rect">
+            <a:avLst/>
+          </a:prstGeom>
+          <a:noFill/>
+          <a:ln/>
+        </p:spPr>
+        <p:txBody>
+          <a:bodyPr wrap="square" lIns="0" tIns="0" rIns="0" bIns="0" rtlCol="0" anchor="ctr">
+            <a:normAutofit/>
+          </a:bodyPr>
+          <a:lstStyle/>
+          <a:p>
+            <a:pPr algn="ctr" indent="0" marL="0">
+              <a:buNone/>
+            </a:pPr>
+            <a:r>
+              <a:rPr lang="en-US" sz="3600" b="1" dirty="0">
+                <a:solidFill>
+                  <a:srgbClr val="990011"/>
+                </a:solidFill>
+                <a:latin typeface="Times New Roman" pitchFamily="34" charset="0"/>
+                <a:ea typeface="Times New Roman" pitchFamily="34" charset="-122"/>
+                <a:cs typeface="Times New Roman" pitchFamily="34" charset="-120"/>
+              </a:rPr>
+              <a:t>Expected Answer</a:t>
+            </a:r>
+            <a:endParaRPr lang="en-US" sz="3600" dirty="0"/>
+          </a:p>
+        </p:txBody>
+      </p:sp>
+      <p:sp>
+        <p:nvSpPr>
+          <p:cNvPr id="5" name="Text 2"/>
+          <p:cNvSpPr/>
+          <p:nvPr/>
+        </p:nvSpPr>
+        <p:spPr>
+          <a:xfrm>
+            <a:off x="5349240" y="1783080"/>
+            <a:ext cx="6522415" cy="4663440"/>
+          </a:xfrm>
+          <a:prstGeom prst="rect">
+            <a:avLst/>
+          </a:prstGeom>
+          <a:noFill/>
+          <a:ln/>
+        </p:spPr>
+        <p:txBody>
+          <a:bodyPr wrap="square" lIns="0" tIns="0" rIns="0" bIns="0" rtlCol="0" anchor="t"/>
+          <a:lstStyle/>
+          <a:p>
+            <a:pPr algn="l" indent="0" marL="0">
+              <a:spcAft>
+                <a:spcPts val="800"/>
+              </a:spcAft>
+              <a:buNone/>
+            </a:pPr>
+            <a:r>
+              <a:rPr lang="en-US" sz="4000" dirty="0">
+                <a:solidFill>
+                  <a:srgbClr val="111111"/>
+                </a:solidFill>
+                <a:latin typeface="Times New Roman" pitchFamily="34" charset="0"/>
+                <a:ea typeface="Times New Roman" pitchFamily="34" charset="-122"/>
+                <a:cs typeface="Times New Roman" pitchFamily="34" charset="-120"/>
+              </a:rPr>
+              <a:t>Repair leaks and close taps.</a:t>
+            </a:r>
+            <a:endParaRPr lang="en-US" sz="4000" dirty="0"/>
+          </a:p>
+        </p:txBody>
+      </p:sp>
+      <p:sp>
+        <p:nvSpPr>
+          <p:cNvPr id="25" name="Slide Number Placeholder 0"/>
+          <p:cNvSpPr>
+            <a:spLocks noGrp="1"/>
+          </p:cNvSpPr>
+          <p:nvPr>
+            <p:ph type="sldNum" sz="quarter" idx="4294967295"/>
+          </p:nvPr>
+        </p:nvSpPr>
+        <p:spPr>
+          <a:xfrm>
+            <a:off x="27432" y="91440"/>
+            <a:ext cx="585216" cy="475488"/>
+          </a:xfrm>
+          <a:prstGeom prst="rect">
+            <a:avLst/>
+          </a:prstGeom>
+          <a:extLst>
+            <a:ext uri="{C572A759-6A51-4108-AA02-DFA0A04FC94B}">
+              <ma14:wrappingTextBoxFlag xmlns:ma14="http://schemas.microsoft.com/office/mac/drawingml/2011/main" val="0"/>
+            </a:ext>
+          </a:extLst>
+        </p:spPr>
+        <p:txBody>
+          <a:bodyPr/>
+          <a:lstStyle>
+            <a:lvl1pPr>
+              <a:defRPr sz="2000">
+                <a:solidFill>
+                  <a:srgbClr val="FFFFFF"/>
+                </a:solidFill>
+                <a:latin typeface="Calibri"/>
+                <a:ea typeface="Calibri"/>
+                <a:cs typeface="Calibri"/>
+              </a:defRPr>
+            </a:lvl1pPr>
+          </a:lstStyle>
+          <a:p>
+            <a:pPr algn="ctr"/>
+            <a:fld id="{F7021451-1387-4CA6-816F-3879F97B5CBC}" type="slidenum">
+              <a:rPr b="1" lang="en-US"/>
+              <a:t>45</a:t>
+            </a:fld>
+            <a:endParaRPr lang="en-US"/>
+          </a:p>
+        </p:txBody>
+      </p:sp>
+    </p:spTree>
+  </p:cSld>
+  <p:clrMapOvr>
+    <a:masterClrMapping/>
+  </p:clrMapOvr>
+</p:sld>
+</file>
+
+<file path=ppt/slides/slide46.xml><?xml version="1.0" encoding="utf-8"?>
+<p:sld xmlns:a="http://schemas.openxmlformats.org/drawingml/2006/main" xmlns:r="http://schemas.openxmlformats.org/officeDocument/2006/relationships" xmlns:p="http://schemas.openxmlformats.org/presentationml/2006/main">
+  <p:cSld name="Slide 46">
+    <p:spTree>
+      <p:nvGrpSpPr>
+        <p:cNvPr id="1" name=""/>
+        <p:cNvGrpSpPr/>
+        <p:nvPr/>
+      </p:nvGrpSpPr>
+      <p:grpSpPr>
+        <a:xfrm>
+          <a:off x="0" y="0"/>
+          <a:ext cx="0" cy="0"/>
+          <a:chOff x="0" y="0"/>
+          <a:chExt cx="0" cy="0"/>
+        </a:xfrm>
+      </p:grpSpPr>
+      <p:sp>
+        <p:nvSpPr>
+          <p:cNvPr id="2" name="Text 0"/>
+          <p:cNvSpPr/>
+          <p:nvPr/>
+        </p:nvSpPr>
+        <p:spPr>
+          <a:xfrm>
+            <a:off x="457200" y="713232"/>
+            <a:ext cx="11368735" cy="274320"/>
+          </a:xfrm>
+          <a:prstGeom prst="rect">
+            <a:avLst/>
+          </a:prstGeom>
+          <a:noFill/>
+          <a:ln/>
+        </p:spPr>
+        <p:txBody>
+          <a:bodyPr wrap="square" lIns="0" tIns="0" rIns="0" bIns="0" rtlCol="0" anchor="ctr"/>
+          <a:lstStyle/>
+          <a:p>
+            <a:pPr algn="r" indent="0" marL="0">
+              <a:buNone/>
+            </a:pPr>
+            <a:r>
+              <a:rPr lang="en-US" sz="1400" b="1" dirty="0">
+                <a:solidFill>
+                  <a:srgbClr val="1C3F6E"/>
+                </a:solidFill>
+                <a:latin typeface="Calibri" pitchFamily="34" charset="0"/>
+                <a:ea typeface="Calibri" pitchFamily="34" charset="-122"/>
+                <a:cs typeface="Calibri" pitchFamily="34" charset="-120"/>
+              </a:rPr>
+              <a:t>REMEDIATION</a:t>
+            </a:r>
+            <a:endParaRPr lang="en-US" sz="1400" dirty="0"/>
+          </a:p>
+        </p:txBody>
+      </p:sp>
+      <p:pic>
+        <p:nvPicPr>
+          <p:cNvPr id="3" name="Image 0" descr="/home/claude/f4/img/minesec_sheet.png">    </p:cNvPr>
+          <p:cNvPicPr>
+            <a:picLocks noChangeAspect="1"/>
+          </p:cNvPicPr>
+          <p:nvPr/>
+        </p:nvPicPr>
+        <p:blipFill>
+          <a:blip r:embed="rId1"/>
+          <a:stretch>
+            <a:fillRect/>
+          </a:stretch>
+        </p:blipFill>
+        <p:spPr>
+          <a:xfrm>
+            <a:off x="0" y="658368"/>
+            <a:ext cx="2468880" cy="5833872"/>
+          </a:xfrm>
+          <a:prstGeom prst="rect">
+            <a:avLst/>
+          </a:prstGeom>
+        </p:spPr>
+      </p:pic>
+      <p:sp>
+        <p:nvSpPr>
+          <p:cNvPr id="4" name="Text 1"/>
+          <p:cNvSpPr/>
+          <p:nvPr/>
+        </p:nvSpPr>
+        <p:spPr>
+          <a:xfrm>
+            <a:off x="2697480" y="1005840"/>
+            <a:ext cx="9174175" cy="731520"/>
+          </a:xfrm>
+          <a:prstGeom prst="rect">
+            <a:avLst/>
+          </a:prstGeom>
+          <a:noFill/>
+          <a:ln/>
+        </p:spPr>
+        <p:txBody>
+          <a:bodyPr wrap="square" lIns="0" tIns="0" rIns="0" bIns="0" rtlCol="0" anchor="ctr">
+            <a:normAutofit/>
+          </a:bodyPr>
+          <a:lstStyle/>
+          <a:p>
+            <a:pPr algn="ctr" indent="0" marL="0">
+              <a:buNone/>
+            </a:pPr>
+            <a:r>
+              <a:rPr lang="en-US" sz="3600" b="1" dirty="0">
+                <a:solidFill>
+                  <a:srgbClr val="990011"/>
+                </a:solidFill>
+                <a:latin typeface="Times New Roman" pitchFamily="34" charset="0"/>
+                <a:ea typeface="Times New Roman" pitchFamily="34" charset="-122"/>
+                <a:cs typeface="Times New Roman" pitchFamily="34" charset="-120"/>
+              </a:rPr>
+              <a:t>Remediation</a:t>
+            </a:r>
+            <a:endParaRPr lang="en-US" sz="3600" dirty="0"/>
+          </a:p>
+        </p:txBody>
+      </p:sp>
+      <p:sp>
+        <p:nvSpPr>
+          <p:cNvPr id="5" name="Text 2"/>
+          <p:cNvSpPr/>
+          <p:nvPr/>
+        </p:nvSpPr>
+        <p:spPr>
+          <a:xfrm>
+            <a:off x="2697480" y="1783080"/>
+            <a:ext cx="9174175" cy="4663440"/>
+          </a:xfrm>
+          <a:prstGeom prst="rect">
+            <a:avLst/>
+          </a:prstGeom>
+          <a:noFill/>
+          <a:ln/>
+        </p:spPr>
+        <p:txBody>
+          <a:bodyPr wrap="square" lIns="0" tIns="0" rIns="0" bIns="0" rtlCol="0" anchor="t"/>
+          <a:lstStyle/>
+          <a:p>
+            <a:pPr algn="l" indent="0" marL="0">
+              <a:spcAft>
+                <a:spcPts val="800"/>
+              </a:spcAft>
+              <a:buNone/>
+            </a:pPr>
+            <a:r>
+              <a:rPr lang="en-US" sz="4000" b="1" dirty="0">
+                <a:solidFill>
+                  <a:srgbClr val="111111"/>
+                </a:solidFill>
+                <a:latin typeface="Times New Roman" pitchFamily="34" charset="0"/>
+                <a:ea typeface="Times New Roman" pitchFamily="34" charset="-122"/>
+                <a:cs typeface="Times New Roman" pitchFamily="34" charset="-120"/>
+              </a:rPr>
+              <a:t>Fill in the blanks:</a:t>
+            </a:r>
+            <a:endParaRPr lang="en-US" sz="4000" dirty="0"/>
+          </a:p>
+          <a:p>
+            <a:pPr algn="l" marL="342900" indent="-342900">
+              <a:spcAft>
+                <a:spcPts val="800"/>
+              </a:spcAft>
+              <a:buSzPct val="100000"/>
+              <a:buFont typeface="+mj-lt"/>
+              <a:buAutoNum type="arabicPeriod" startAt="1"/>
+            </a:pPr>
+            <a:r>
+              <a:rPr lang="en-US" sz="4000" dirty="0">
+                <a:solidFill>
+                  <a:srgbClr val="111111"/>
+                </a:solidFill>
+                <a:latin typeface="Times New Roman" pitchFamily="34" charset="0"/>
+                <a:ea typeface="Times New Roman" pitchFamily="34" charset="-122"/>
+                <a:cs typeface="Times New Roman" pitchFamily="34" charset="-120"/>
+              </a:rPr>
+              <a:t>Not enough clean water is water ______.</a:t>
+            </a:r>
+            <a:endParaRPr lang="en-US" sz="4000" dirty="0"/>
+          </a:p>
+          <a:p>
+            <a:pPr algn="l" marL="342900" indent="-342900">
+              <a:spcAft>
+                <a:spcPts val="800"/>
+              </a:spcAft>
+              <a:buSzPct val="100000"/>
+              <a:buFont typeface="+mj-lt"/>
+              <a:buAutoNum type="arabicPeriod" startAt="1"/>
+            </a:pPr>
+            <a:r>
+              <a:rPr lang="en-US" sz="4000" dirty="0">
+                <a:solidFill>
+                  <a:srgbClr val="111111"/>
+                </a:solidFill>
+                <a:latin typeface="Times New Roman" pitchFamily="34" charset="0"/>
+                <a:ea typeface="Times New Roman" pitchFamily="34" charset="-122"/>
+                <a:cs typeface="Times New Roman" pitchFamily="34" charset="-120"/>
+              </a:rPr>
+              <a:t>Using water carefully is water ______.</a:t>
+            </a:r>
+            <a:endParaRPr lang="en-US" sz="4000" dirty="0"/>
+          </a:p>
+          <a:p>
+            <a:pPr algn="l" marL="342900" indent="-342900">
+              <a:spcAft>
+                <a:spcPts val="800"/>
+              </a:spcAft>
+              <a:buSzPct val="100000"/>
+              <a:buFont typeface="+mj-lt"/>
+              <a:buAutoNum type="arabicPeriod" startAt="1"/>
+            </a:pPr>
+            <a:r>
+              <a:rPr lang="en-US" sz="4000" dirty="0">
+                <a:solidFill>
+                  <a:srgbClr val="111111"/>
+                </a:solidFill>
+                <a:latin typeface="Times New Roman" pitchFamily="34" charset="0"/>
+                <a:ea typeface="Times New Roman" pitchFamily="34" charset="-122"/>
+                <a:cs typeface="Times New Roman" pitchFamily="34" charset="-120"/>
+              </a:rPr>
+              <a:t>Rain water can be stored in a ______.</a:t>
+            </a:r>
+            <a:endParaRPr lang="en-US" sz="4000" dirty="0"/>
+          </a:p>
+        </p:txBody>
+      </p:sp>
+      <p:sp>
+        <p:nvSpPr>
+          <p:cNvPr id="25" name="Slide Number Placeholder 0"/>
+          <p:cNvSpPr>
+            <a:spLocks noGrp="1"/>
+          </p:cNvSpPr>
+          <p:nvPr>
+            <p:ph type="sldNum" sz="quarter" idx="4294967295"/>
+          </p:nvPr>
+        </p:nvSpPr>
+        <p:spPr>
+          <a:xfrm>
+            <a:off x="27432" y="91440"/>
+            <a:ext cx="585216" cy="475488"/>
+          </a:xfrm>
+          <a:prstGeom prst="rect">
+            <a:avLst/>
+          </a:prstGeom>
+          <a:extLst>
+            <a:ext uri="{C572A759-6A51-4108-AA02-DFA0A04FC94B}">
+              <ma14:wrappingTextBoxFlag xmlns:ma14="http://schemas.microsoft.com/office/mac/drawingml/2011/main" val="0"/>
+            </a:ext>
+          </a:extLst>
+        </p:spPr>
+        <p:txBody>
+          <a:bodyPr/>
+          <a:lstStyle>
+            <a:lvl1pPr>
+              <a:defRPr sz="2000">
+                <a:solidFill>
+                  <a:srgbClr val="FFFFFF"/>
+                </a:solidFill>
+                <a:latin typeface="Calibri"/>
+                <a:ea typeface="Calibri"/>
+                <a:cs typeface="Calibri"/>
+              </a:defRPr>
+            </a:lvl1pPr>
+          </a:lstStyle>
+          <a:p>
+            <a:pPr algn="ctr"/>
+            <a:fld id="{F7021451-1387-4CA6-816F-3879F97B5CBC}" type="slidenum">
+              <a:rPr b="1" lang="en-US"/>
+              <a:t>46</a:t>
+            </a:fld>
+            <a:endParaRPr lang="en-US"/>
+          </a:p>
+        </p:txBody>
+      </p:sp>
+    </p:spTree>
+  </p:cSld>
+  <p:clrMapOvr>
+    <a:masterClrMapping/>
+  </p:clrMapOvr>
+</p:sld>
+</file>
+
+<file path=ppt/slides/slide47.xml><?xml version="1.0" encoding="utf-8"?>
+<p:sld xmlns:a="http://schemas.openxmlformats.org/drawingml/2006/main" xmlns:r="http://schemas.openxmlformats.org/officeDocument/2006/relationships" xmlns:p="http://schemas.openxmlformats.org/presentationml/2006/main">
+  <p:cSld name="Slide 47">
+    <p:spTree>
+      <p:nvGrpSpPr>
+        <p:cNvPr id="1" name=""/>
+        <p:cNvGrpSpPr/>
+        <p:nvPr/>
+      </p:nvGrpSpPr>
+      <p:grpSpPr>
+        <a:xfrm>
+          <a:off x="0" y="0"/>
+          <a:ext cx="0" cy="0"/>
+          <a:chOff x="0" y="0"/>
+          <a:chExt cx="0" cy="0"/>
+        </a:xfrm>
+      </p:grpSpPr>
+      <p:sp>
+        <p:nvSpPr>
+          <p:cNvPr id="2" name="Text 0"/>
+          <p:cNvSpPr/>
+          <p:nvPr/>
+        </p:nvSpPr>
+        <p:spPr>
+          <a:xfrm>
+            <a:off x="457200" y="713232"/>
+            <a:ext cx="11368735" cy="274320"/>
+          </a:xfrm>
+          <a:prstGeom prst="rect">
+            <a:avLst/>
+          </a:prstGeom>
+          <a:noFill/>
+          <a:ln/>
+        </p:spPr>
+        <p:txBody>
+          <a:bodyPr wrap="square" lIns="0" tIns="0" rIns="0" bIns="0" rtlCol="0" anchor="ctr"/>
+          <a:lstStyle/>
+          <a:p>
+            <a:pPr algn="r" indent="0" marL="0">
+              <a:buNone/>
+            </a:pPr>
+            <a:r>
+              <a:rPr lang="en-US" sz="1400" b="1" dirty="0">
+                <a:solidFill>
+                  <a:srgbClr val="1C3F6E"/>
+                </a:solidFill>
+                <a:latin typeface="Calibri" pitchFamily="34" charset="0"/>
+                <a:ea typeface="Calibri" pitchFamily="34" charset="-122"/>
+                <a:cs typeface="Calibri" pitchFamily="34" charset="-120"/>
+              </a:rPr>
+              <a:t>HOMEWORK</a:t>
+            </a:r>
+            <a:endParaRPr lang="en-US" sz="1400" dirty="0"/>
+          </a:p>
+        </p:txBody>
+      </p:sp>
+      <p:pic>
+        <p:nvPicPr>
+          <p:cNvPr id="3" name="Image 0" descr="/home/claude/f4/img/minesec_sheet.png">    </p:cNvPr>
+          <p:cNvPicPr>
+            <a:picLocks noChangeAspect="1"/>
+          </p:cNvPicPr>
+          <p:nvPr/>
+        </p:nvPicPr>
+        <p:blipFill>
+          <a:blip r:embed="rId1"/>
+          <a:stretch>
+            <a:fillRect/>
+          </a:stretch>
+        </p:blipFill>
+        <p:spPr>
+          <a:xfrm>
+            <a:off x="0" y="658368"/>
+            <a:ext cx="5120640" cy="5833872"/>
+          </a:xfrm>
+          <a:prstGeom prst="rect">
+            <a:avLst/>
+          </a:prstGeom>
+        </p:spPr>
+      </p:pic>
+      <p:sp>
+        <p:nvSpPr>
+          <p:cNvPr id="4" name="Text 1"/>
+          <p:cNvSpPr/>
+          <p:nvPr/>
+        </p:nvSpPr>
+        <p:spPr>
+          <a:xfrm>
+            <a:off x="5349240" y="1005840"/>
+            <a:ext cx="6522415" cy="731520"/>
+          </a:xfrm>
+          <a:prstGeom prst="rect">
+            <a:avLst/>
+          </a:prstGeom>
+          <a:noFill/>
+          <a:ln/>
+        </p:spPr>
+        <p:txBody>
+          <a:bodyPr wrap="square" lIns="0" tIns="0" rIns="0" bIns="0" rtlCol="0" anchor="ctr">
+            <a:normAutofit/>
+          </a:bodyPr>
+          <a:lstStyle/>
+          <a:p>
+            <a:pPr algn="ctr" indent="0" marL="0">
+              <a:buNone/>
+            </a:pPr>
+            <a:r>
+              <a:rPr lang="en-US" sz="3600" b="1" dirty="0">
+                <a:solidFill>
+                  <a:srgbClr val="990011"/>
+                </a:solidFill>
+                <a:latin typeface="Times New Roman" pitchFamily="34" charset="0"/>
+                <a:ea typeface="Times New Roman" pitchFamily="34" charset="-122"/>
+                <a:cs typeface="Times New Roman" pitchFamily="34" charset="-120"/>
+              </a:rPr>
+              <a:t>Homework</a:t>
+            </a:r>
+            <a:endParaRPr lang="en-US" sz="3600" dirty="0"/>
+          </a:p>
+        </p:txBody>
+      </p:sp>
+      <p:sp>
+        <p:nvSpPr>
+          <p:cNvPr id="5" name="Text 2"/>
+          <p:cNvSpPr/>
+          <p:nvPr/>
+        </p:nvSpPr>
+        <p:spPr>
+          <a:xfrm>
+            <a:off x="5349240" y="1783080"/>
+            <a:ext cx="6522415" cy="4663440"/>
+          </a:xfrm>
+          <a:prstGeom prst="rect">
+            <a:avLst/>
+          </a:prstGeom>
+          <a:noFill/>
+          <a:ln/>
+        </p:spPr>
+        <p:txBody>
+          <a:bodyPr wrap="square" lIns="0" tIns="0" rIns="0" bIns="0" rtlCol="0" anchor="t"/>
+          <a:lstStyle/>
+          <a:p>
+            <a:pPr algn="l" indent="0" marL="0">
+              <a:spcAft>
+                <a:spcPts val="800"/>
+              </a:spcAft>
+              <a:buNone/>
+            </a:pPr>
+            <a:r>
+              <a:rPr lang="en-US" sz="4000" dirty="0">
+                <a:solidFill>
+                  <a:srgbClr val="111111"/>
+                </a:solidFill>
+                <a:latin typeface="Times New Roman" pitchFamily="34" charset="0"/>
+                <a:ea typeface="Times New Roman" pitchFamily="34" charset="-122"/>
+                <a:cs typeface="Times New Roman" pitchFamily="34" charset="-120"/>
+              </a:rPr>
+              <a:t>Revise Lessons 30 to 42. Draw one diagram of your choice (layers of the atmosphere, Stevenson screen, types of rainfall, pressure belts or water cycle) and label it.</a:t>
+            </a:r>
+            <a:endParaRPr lang="en-US" sz="4000" dirty="0"/>
+          </a:p>
+        </p:txBody>
+      </p:sp>
+      <p:sp>
+        <p:nvSpPr>
+          <p:cNvPr id="25" name="Slide Number Placeholder 0"/>
+          <p:cNvSpPr>
+            <a:spLocks noGrp="1"/>
+          </p:cNvSpPr>
+          <p:nvPr>
+            <p:ph type="sldNum" sz="quarter" idx="4294967295"/>
+          </p:nvPr>
+        </p:nvSpPr>
+        <p:spPr>
+          <a:xfrm>
+            <a:off x="27432" y="91440"/>
+            <a:ext cx="585216" cy="475488"/>
+          </a:xfrm>
+          <a:prstGeom prst="rect">
+            <a:avLst/>
+          </a:prstGeom>
+          <a:extLst>
+            <a:ext uri="{C572A759-6A51-4108-AA02-DFA0A04FC94B}">
+              <ma14:wrappingTextBoxFlag xmlns:ma14="http://schemas.microsoft.com/office/mac/drawingml/2011/main" val="0"/>
+            </a:ext>
+          </a:extLst>
+        </p:spPr>
+        <p:txBody>
+          <a:bodyPr/>
+          <a:lstStyle>
+            <a:lvl1pPr>
+              <a:defRPr sz="2000">
+                <a:solidFill>
+                  <a:srgbClr val="FFFFFF"/>
+                </a:solidFill>
+                <a:latin typeface="Calibri"/>
+                <a:ea typeface="Calibri"/>
+                <a:cs typeface="Calibri"/>
+              </a:defRPr>
+            </a:lvl1pPr>
+          </a:lstStyle>
+          <a:p>
+            <a:pPr algn="ctr"/>
+            <a:fld id="{F7021451-1387-4CA6-816F-3879F97B5CBC}" type="slidenum">
+              <a:rPr b="1" lang="en-US"/>
+              <a:t>47</a:t>
+            </a:fld>
+            <a:endParaRPr lang="en-US"/>
+          </a:p>
+        </p:txBody>
+      </p:sp>
+    </p:spTree>
+  </p:cSld>
+  <p:clrMapOvr>
+    <a:masterClrMapping/>
+  </p:clrMapOvr>
+</p:sld>
+</file>
+
+<file path=ppt/slides/slide48.xml><?xml version="1.0" encoding="utf-8"?>
+<p:sld xmlns:a="http://schemas.openxmlformats.org/drawingml/2006/main" xmlns:r="http://schemas.openxmlformats.org/officeDocument/2006/relationships" xmlns:p="http://schemas.openxmlformats.org/presentationml/2006/main">
+  <p:cSld name="Slide 48">
+    <p:spTree>
+      <p:nvGrpSpPr>
+        <p:cNvPr id="1" name=""/>
+        <p:cNvGrpSpPr/>
+        <p:nvPr/>
+      </p:nvGrpSpPr>
+      <p:grpSpPr>
+        <a:xfrm>
+          <a:off x="0" y="0"/>
+          <a:ext cx="0" cy="0"/>
+          <a:chOff x="0" y="0"/>
+          <a:chExt cx="0" cy="0"/>
+        </a:xfrm>
+      </p:grpSpPr>
+      <p:sp>
+        <p:nvSpPr>
+          <p:cNvPr id="2" name="Text 0"/>
+          <p:cNvSpPr/>
+          <p:nvPr/>
+        </p:nvSpPr>
+        <p:spPr>
+          <a:xfrm>
+            <a:off x="457200" y="713232"/>
+            <a:ext cx="11368735" cy="274320"/>
+          </a:xfrm>
+          <a:prstGeom prst="rect">
+            <a:avLst/>
+          </a:prstGeom>
+          <a:noFill/>
+          <a:ln/>
+        </p:spPr>
+        <p:txBody>
+          <a:bodyPr wrap="square" lIns="0" tIns="0" rIns="0" bIns="0" rtlCol="0" anchor="ctr"/>
+          <a:lstStyle/>
+          <a:p>
+            <a:pPr algn="r" indent="0" marL="0">
+              <a:buNone/>
+            </a:pPr>
+            <a:r>
+              <a:rPr lang="en-US" sz="1400" b="1" dirty="0">
+                <a:solidFill>
+                  <a:srgbClr val="1C3F6E"/>
+                </a:solidFill>
+                <a:latin typeface="Calibri" pitchFamily="34" charset="0"/>
+                <a:ea typeface="Calibri" pitchFamily="34" charset="-122"/>
+                <a:cs typeface="Calibri" pitchFamily="34" charset="-120"/>
+              </a:rPr>
               <a:t>BILINGUAL GAME</a:t>
             </a:r>
             <a:endParaRPr lang="en-US" sz="1400" dirty="0"/>
@@ -15195,7 +17323,7 @@
       </p:sp>
       <p:graphicFrame>
         <p:nvGraphicFramePr>
-          <p:cNvPr id="43" name="Table 0"/>
+          <p:cNvPr id="49" name="Table 0"/>
           <p:cNvGraphicFramePr>
             <a:graphicFrameLocks noGrp="1"/>
           </p:cNvGraphicFramePr>
@@ -16507,7 +18635,7 @@
             <a:pPr algn="ctr"/>
             <a:fld id="{F7021451-1387-4CA6-816F-3879F97B5CBC}" type="slidenum">
               <a:rPr b="1" lang="en-US"/>
-              <a:t>42</a:t>
+              <a:t>48</a:t>
             </a:fld>
             <a:endParaRPr lang="en-US"/>
           </a:p>
@@ -16521,9 +18649,9 @@
 </p:sld>
 </file>
 
-<file path=ppt/slides/slide43.xml><?xml version="1.0" encoding="utf-8"?>
+<file path=ppt/slides/slide49.xml><?xml version="1.0" encoding="utf-8"?>
 <p:sld xmlns:a="http://schemas.openxmlformats.org/drawingml/2006/main" xmlns:r="http://schemas.openxmlformats.org/officeDocument/2006/relationships" xmlns:p="http://schemas.openxmlformats.org/presentationml/2006/main">
-  <p:cSld name="Slide 43">
+  <p:cSld name="Slide 49">
     <p:spTree>
       <p:nvGrpSpPr>
         <p:cNvPr id="1" name=""/>
@@ -16618,7 +18746,7 @@
       </p:sp>
       <p:graphicFrame>
         <p:nvGraphicFramePr>
-          <p:cNvPr id="44" name="Table 0"/>
+          <p:cNvPr id="50" name="Table 0"/>
           <p:cNvGraphicFramePr>
             <a:graphicFrameLocks noGrp="1"/>
           </p:cNvGraphicFramePr>
@@ -17240,7 +19368,7 @@
             <a:pPr algn="ctr"/>
             <a:fld id="{F7021451-1387-4CA6-816F-3879F97B5CBC}" type="slidenum">
               <a:rPr b="1" lang="en-US"/>
-              <a:t>43</a:t>
+              <a:t>49</a:t>
             </a:fld>
             <a:endParaRPr lang="en-US"/>
           </a:p>
@@ -17254,9 +19382,9 @@
 </p:sld>
 </file>
 
-<file path=ppt/slides/slide44.xml><?xml version="1.0" encoding="utf-8"?>
+<file path=ppt/slides/slide5.xml><?xml version="1.0" encoding="utf-8"?>
 <p:sld xmlns:a="http://schemas.openxmlformats.org/drawingml/2006/main" xmlns:r="http://schemas.openxmlformats.org/officeDocument/2006/relationships" xmlns:p="http://schemas.openxmlformats.org/presentationml/2006/main">
-  <p:cSld name="Slide 44">
+  <p:cSld name="Slide 5">
     <p:spTree>
       <p:nvGrpSpPr>
         <p:cNvPr id="1" name=""/>
@@ -17304,6 +19432,225 @@
                 <a:ea typeface="Calibri" pitchFamily="34" charset="-122"/>
                 <a:cs typeface="Calibri" pitchFamily="34" charset="-120"/>
               </a:rPr>
+              <a:t>HOMEWORK CORRECTION</a:t>
+            </a:r>
+            <a:endParaRPr lang="en-US" sz="1400" dirty="0"/>
+          </a:p>
+        </p:txBody>
+      </p:sp>
+      <p:pic>
+        <p:nvPicPr>
+          <p:cNvPr id="3" name="Image 0" descr="/home/claude/f4/img/minesec_sheet.png">    </p:cNvPr>
+          <p:cNvPicPr>
+            <a:picLocks noChangeAspect="1"/>
+          </p:cNvPicPr>
+          <p:nvPr/>
+        </p:nvPicPr>
+        <p:blipFill>
+          <a:blip r:embed="rId1"/>
+          <a:stretch>
+            <a:fillRect/>
+          </a:stretch>
+        </p:blipFill>
+        <p:spPr>
+          <a:xfrm>
+            <a:off x="0" y="658368"/>
+            <a:ext cx="5120640" cy="5833872"/>
+          </a:xfrm>
+          <a:prstGeom prst="rect">
+            <a:avLst/>
+          </a:prstGeom>
+        </p:spPr>
+      </p:pic>
+      <p:sp>
+        <p:nvSpPr>
+          <p:cNvPr id="4" name="Text 1"/>
+          <p:cNvSpPr/>
+          <p:nvPr/>
+        </p:nvSpPr>
+        <p:spPr>
+          <a:xfrm>
+            <a:off x="5349240" y="1005840"/>
+            <a:ext cx="6522415" cy="731520"/>
+          </a:xfrm>
+          <a:prstGeom prst="rect">
+            <a:avLst/>
+          </a:prstGeom>
+          <a:noFill/>
+          <a:ln/>
+        </p:spPr>
+        <p:txBody>
+          <a:bodyPr wrap="square" lIns="0" tIns="0" rIns="0" bIns="0" rtlCol="0" anchor="ctr">
+            <a:normAutofit/>
+          </a:bodyPr>
+          <a:lstStyle/>
+          <a:p>
+            <a:pPr algn="ctr" indent="0" marL="0">
+              <a:buNone/>
+            </a:pPr>
+            <a:r>
+              <a:rPr lang="en-US" sz="3600" b="1" dirty="0">
+                <a:solidFill>
+                  <a:srgbClr val="990011"/>
+                </a:solidFill>
+                <a:latin typeface="Times New Roman" pitchFamily="34" charset="0"/>
+                <a:ea typeface="Times New Roman" pitchFamily="34" charset="-122"/>
+                <a:cs typeface="Times New Roman" pitchFamily="34" charset="-120"/>
+              </a:rPr>
+              <a:t>Correction: Possible Answer</a:t>
+            </a:r>
+            <a:endParaRPr lang="en-US" sz="3600" dirty="0"/>
+          </a:p>
+        </p:txBody>
+      </p:sp>
+      <p:sp>
+        <p:nvSpPr>
+          <p:cNvPr id="5" name="Text 2"/>
+          <p:cNvSpPr/>
+          <p:nvPr/>
+        </p:nvSpPr>
+        <p:spPr>
+          <a:xfrm>
+            <a:off x="5349240" y="1783080"/>
+            <a:ext cx="6522415" cy="4663440"/>
+          </a:xfrm>
+          <a:prstGeom prst="rect">
+            <a:avLst/>
+          </a:prstGeom>
+          <a:noFill/>
+          <a:ln/>
+        </p:spPr>
+        <p:txBody>
+          <a:bodyPr wrap="square" lIns="0" tIns="0" rIns="0" bIns="0" rtlCol="0" anchor="t"/>
+          <a:lstStyle/>
+          <a:p>
+            <a:pPr algn="l" indent="0" marL="0">
+              <a:spcAft>
+                <a:spcPts val="800"/>
+              </a:spcAft>
+              <a:buNone/>
+            </a:pPr>
+            <a:r>
+              <a:rPr lang="en-US" sz="4000" dirty="0">
+                <a:solidFill>
+                  <a:srgbClr val="111111"/>
+                </a:solidFill>
+                <a:latin typeface="Times New Roman" pitchFamily="34" charset="0"/>
+                <a:ea typeface="Times New Roman" pitchFamily="34" charset="-122"/>
+                <a:cs typeface="Times New Roman" pitchFamily="34" charset="-120"/>
+              </a:rPr>
+              <a:t>Example: a family of 8 uses about 10 buckets (about 150 litres) a day: drinking 1, cooking 2, washing dishes 2, bathing 3, laundry and cleaning 2.</a:t>
+            </a:r>
+            <a:endParaRPr lang="en-US" sz="4000" dirty="0"/>
+          </a:p>
+        </p:txBody>
+      </p:sp>
+      <p:sp>
+        <p:nvSpPr>
+          <p:cNvPr id="25" name="Slide Number Placeholder 0"/>
+          <p:cNvSpPr>
+            <a:spLocks noGrp="1"/>
+          </p:cNvSpPr>
+          <p:nvPr>
+            <p:ph type="sldNum" sz="quarter" idx="4294967295"/>
+          </p:nvPr>
+        </p:nvSpPr>
+        <p:spPr>
+          <a:xfrm>
+            <a:off x="27432" y="91440"/>
+            <a:ext cx="585216" cy="475488"/>
+          </a:xfrm>
+          <a:prstGeom prst="rect">
+            <a:avLst/>
+          </a:prstGeom>
+          <a:extLst>
+            <a:ext uri="{C572A759-6A51-4108-AA02-DFA0A04FC94B}">
+              <ma14:wrappingTextBoxFlag xmlns:ma14="http://schemas.microsoft.com/office/mac/drawingml/2011/main" val="0"/>
+            </a:ext>
+          </a:extLst>
+        </p:spPr>
+        <p:txBody>
+          <a:bodyPr/>
+          <a:lstStyle>
+            <a:lvl1pPr>
+              <a:defRPr sz="2000">
+                <a:solidFill>
+                  <a:srgbClr val="FFFFFF"/>
+                </a:solidFill>
+                <a:latin typeface="Calibri"/>
+                <a:ea typeface="Calibri"/>
+                <a:cs typeface="Calibri"/>
+              </a:defRPr>
+            </a:lvl1pPr>
+          </a:lstStyle>
+          <a:p>
+            <a:pPr algn="ctr"/>
+            <a:fld id="{F7021451-1387-4CA6-816F-3879F97B5CBC}" type="slidenum">
+              <a:rPr b="1" lang="en-US"/>
+              <a:t>5</a:t>
+            </a:fld>
+            <a:endParaRPr lang="en-US"/>
+          </a:p>
+        </p:txBody>
+      </p:sp>
+    </p:spTree>
+  </p:cSld>
+  <p:clrMapOvr>
+    <a:masterClrMapping/>
+  </p:clrMapOvr>
+</p:sld>
+</file>
+
+<file path=ppt/slides/slide50.xml><?xml version="1.0" encoding="utf-8"?>
+<p:sld xmlns:a="http://schemas.openxmlformats.org/drawingml/2006/main" xmlns:r="http://schemas.openxmlformats.org/officeDocument/2006/relationships" xmlns:p="http://schemas.openxmlformats.org/presentationml/2006/main">
+  <p:cSld name="Slide 50">
+    <p:spTree>
+      <p:nvGrpSpPr>
+        <p:cNvPr id="1" name=""/>
+        <p:cNvGrpSpPr/>
+        <p:nvPr/>
+      </p:nvGrpSpPr>
+      <p:grpSpPr>
+        <a:xfrm>
+          <a:off x="0" y="0"/>
+          <a:ext cx="0" cy="0"/>
+          <a:chOff x="0" y="0"/>
+          <a:chExt cx="0" cy="0"/>
+        </a:xfrm>
+      </p:grpSpPr>
+      <p:sp>
+        <p:nvSpPr>
+          <p:cNvPr id="2" name="Text 0"/>
+          <p:cNvSpPr/>
+          <p:nvPr/>
+        </p:nvSpPr>
+        <p:spPr>
+          <a:xfrm>
+            <a:off x="457200" y="713232"/>
+            <a:ext cx="11368735" cy="274320"/>
+          </a:xfrm>
+          <a:prstGeom prst="rect">
+            <a:avLst/>
+          </a:prstGeom>
+          <a:noFill/>
+          <a:ln/>
+        </p:spPr>
+        <p:txBody>
+          <a:bodyPr wrap="square" lIns="0" tIns="0" rIns="0" bIns="0" rtlCol="0" anchor="ctr"/>
+          <a:lstStyle/>
+          <a:p>
+            <a:pPr algn="r" indent="0" marL="0">
+              <a:buNone/>
+            </a:pPr>
+            <a:r>
+              <a:rPr lang="en-US" sz="1400" b="1" dirty="0">
+                <a:solidFill>
+                  <a:srgbClr val="1C3F6E"/>
+                </a:solidFill>
+                <a:latin typeface="Calibri" pitchFamily="34" charset="0"/>
+                <a:ea typeface="Calibri" pitchFamily="34" charset="-122"/>
+                <a:cs typeface="Calibri" pitchFamily="34" charset="-120"/>
+              </a:rPr>
               <a:t>LOGBOOK</a:t>
             </a:r>
             <a:endParaRPr lang="en-US" sz="1400" dirty="0"/>
@@ -17351,7 +19698,7 @@
       </p:sp>
       <p:graphicFrame>
         <p:nvGraphicFramePr>
-          <p:cNvPr id="45" name="Table 0"/>
+          <p:cNvPr id="51" name="Table 0"/>
           <p:cNvGraphicFramePr>
             <a:graphicFrameLocks noGrp="1"/>
           </p:cNvGraphicFramePr>
@@ -17461,7 +19808,7 @@
                           <a:ea typeface="Calibri" pitchFamily="34" charset="-122"/>
                           <a:cs typeface="Calibri" pitchFamily="34" charset="-120"/>
                         </a:rPr>
-                        <a:t>Meaning of Water Scarcity; Causes of Water Scarcity; Effects of Water Scarcity; Water Conservation Methods.</a:t>
+                        <a:t>DEFINITIONS; Causes of Water Scarcity; Effects of Water Scarcity; Water Conservation Methods.</a:t>
                       </a:r>
                       <a:endParaRPr lang="en-US" sz="1600" dirty="0">
                         <a:latin typeface="Calibri" charset="0"/>
@@ -18111,7 +20458,7 @@
             <a:pPr algn="ctr"/>
             <a:fld id="{F7021451-1387-4CA6-816F-3879F97B5CBC}" type="slidenum">
               <a:rPr b="1" lang="en-US"/>
-              <a:t>44</a:t>
+              <a:t>50</a:t>
             </a:fld>
             <a:endParaRPr lang="en-US"/>
           </a:p>
@@ -18125,9 +20472,9 @@
 </p:sld>
 </file>
 
-<file path=ppt/slides/slide45.xml><?xml version="1.0" encoding="utf-8"?>
+<file path=ppt/slides/slide51.xml><?xml version="1.0" encoding="utf-8"?>
 <p:sld xmlns:a="http://schemas.openxmlformats.org/drawingml/2006/main" xmlns:r="http://schemas.openxmlformats.org/officeDocument/2006/relationships" xmlns:p="http://schemas.openxmlformats.org/presentationml/2006/main">
-  <p:cSld name="Slide 45">
+  <p:cSld name="Slide 51">
     <p:spTree>
       <p:nvGrpSpPr>
         <p:cNvPr id="1" name=""/>
@@ -18304,7 +20651,7 @@
                 <a:ea typeface="Calibri" pitchFamily="34" charset="-122"/>
                 <a:cs typeface="Calibri" pitchFamily="34" charset="-120"/>
               </a:rPr>
-              <a:t>Without the projector (Activity 1): use the situation of Aminatou.</a:t>
+              <a:t>Without the projector (Activity 1): ask learners where their family gets water.</a:t>
             </a:r>
             <a:endParaRPr lang="en-US" sz="2000" dirty="0"/>
           </a:p>
@@ -18325,7 +20672,7 @@
                 <a:ea typeface="Calibri" pitchFamily="34" charset="-122"/>
                 <a:cs typeface="Calibri" pitchFamily="34" charset="-120"/>
               </a:rPr>
-              <a:t>Without the projector (Activity 2): ask learners where water is wasted at school.</a:t>
+              <a:t>Without the projector (Activity 2): count the drops from a tap in one minute.</a:t>
             </a:r>
             <a:endParaRPr lang="en-US" sz="2000" dirty="0"/>
           </a:p>
@@ -18346,7 +20693,7 @@
                 <a:ea typeface="Calibri" pitchFamily="34" charset="-122"/>
                 <a:cs typeface="Calibri" pitchFamily="34" charset="-120"/>
               </a:rPr>
-              <a:t>Without the projector (Activity 3): draw a house, a pipe and a tank.</a:t>
+              <a:t>Without the projector (Activity 3): draw a house with a gutter and a tank.</a:t>
             </a:r>
             <a:endParaRPr lang="en-US" sz="2000" dirty="0"/>
           </a:p>
@@ -18394,7 +20741,7 @@
             <a:pPr algn="ctr"/>
             <a:fld id="{F7021451-1387-4CA6-816F-3879F97B5CBC}" type="slidenum">
               <a:rPr b="1" lang="en-US"/>
-              <a:t>45</a:t>
+              <a:t>51</a:t>
             </a:fld>
             <a:endParaRPr lang="en-US"/>
           </a:p>
@@ -18408,9 +20755,9 @@
 </p:sld>
 </file>
 
-<file path=ppt/slides/slide46.xml><?xml version="1.0" encoding="utf-8"?>
+<file path=ppt/slides/slide52.xml><?xml version="1.0" encoding="utf-8"?>
 <p:sld xmlns:a="http://schemas.openxmlformats.org/drawingml/2006/main" xmlns:r="http://schemas.openxmlformats.org/officeDocument/2006/relationships" xmlns:p="http://schemas.openxmlformats.org/presentationml/2006/main">
-  <p:cSld name="Slide 46">
+  <p:cSld name="Slide 52">
     <p:spTree>
       <p:nvGrpSpPr>
         <p:cNvPr id="1" name=""/>
@@ -18481,7 +20828,7 @@
         <p:spPr>
           <a:xfrm>
             <a:off x="0" y="658368"/>
-            <a:ext cx="5120640" cy="5833872"/>
+            <a:ext cx="3840480" cy="5833872"/>
           </a:xfrm>
           <a:prstGeom prst="rect">
             <a:avLst/>
@@ -18496,8 +20843,8 @@
         </p:nvSpPr>
         <p:spPr>
           <a:xfrm>
-            <a:off x="5349240" y="1005840"/>
-            <a:ext cx="6522415" cy="731520"/>
+            <a:off x="4069080" y="1005840"/>
+            <a:ext cx="7802575" cy="731520"/>
           </a:xfrm>
           <a:prstGeom prst="rect">
             <a:avLst/>
@@ -18537,8 +20884,8 @@
         </p:nvSpPr>
         <p:spPr>
           <a:xfrm>
-            <a:off x="5349240" y="1783080"/>
-            <a:ext cx="6522415" cy="4663440"/>
+            <a:off x="4069080" y="1783080"/>
+            <a:ext cx="7802575" cy="4663440"/>
           </a:xfrm>
           <a:prstGeom prst="rect">
             <a:avLst/>
@@ -18671,6 +21018,27 @@
                 <a:ea typeface="Calibri" pitchFamily="34" charset="-122"/>
                 <a:cs typeface="Calibri" pitchFamily="34" charset="-120"/>
               </a:rPr>
+              <a:t>Photo, board summary (Loss of time): “Women fetch water in Kilte-Awlaelo woreda, Tigray” by UNICEF Ethiopia, CC BY-NC-ND 2.0, via Flickr (https://www.flickr.com/photos/86783452@N02/14056445728)</a:t>
+            </a:r>
+            <a:endParaRPr lang="en-US" sz="1800" dirty="0"/>
+          </a:p>
+          <a:p>
+            <a:pPr algn="l" marL="342900" indent="-342900">
+              <a:spcAft>
+                <a:spcPts val="800"/>
+              </a:spcAft>
+              <a:buSzPct val="100000"/>
+              <a:buChar char="•"/>
+            </a:pPr>
+            <a:r>
+              <a:rPr lang="en-US" sz="1800" dirty="0">
+                <a:solidFill>
+                  <a:srgbClr val="111111"/>
+                </a:solidFill>
+                <a:latin typeface="Calibri" pitchFamily="34" charset="0"/>
+                <a:ea typeface="Calibri" pitchFamily="34" charset="-122"/>
+                <a:cs typeface="Calibri" pitchFamily="34" charset="-120"/>
+              </a:rPr>
               <a:t>Diagrams and animations: drawn for this lesson (Geography Department).</a:t>
             </a:r>
             <a:endParaRPr lang="en-US" sz="1800" dirty="0"/>
@@ -18719,226 +21087,7 @@
             <a:pPr algn="ctr"/>
             <a:fld id="{F7021451-1387-4CA6-816F-3879F97B5CBC}" type="slidenum">
               <a:rPr b="1" lang="en-US"/>
-              <a:t>46</a:t>
-            </a:fld>
-            <a:endParaRPr lang="en-US"/>
-          </a:p>
-        </p:txBody>
-      </p:sp>
-    </p:spTree>
-  </p:cSld>
-  <p:clrMapOvr>
-    <a:masterClrMapping/>
-  </p:clrMapOvr>
-</p:sld>
-</file>
-
-<file path=ppt/slides/slide5.xml><?xml version="1.0" encoding="utf-8"?>
-<p:sld xmlns:a="http://schemas.openxmlformats.org/drawingml/2006/main" xmlns:r="http://schemas.openxmlformats.org/officeDocument/2006/relationships" xmlns:p="http://schemas.openxmlformats.org/presentationml/2006/main">
-  <p:cSld name="Slide 5">
-    <p:spTree>
-      <p:nvGrpSpPr>
-        <p:cNvPr id="1" name=""/>
-        <p:cNvGrpSpPr/>
-        <p:nvPr/>
-      </p:nvGrpSpPr>
-      <p:grpSpPr>
-        <a:xfrm>
-          <a:off x="0" y="0"/>
-          <a:ext cx="0" cy="0"/>
-          <a:chOff x="0" y="0"/>
-          <a:chExt cx="0" cy="0"/>
-        </a:xfrm>
-      </p:grpSpPr>
-      <p:sp>
-        <p:nvSpPr>
-          <p:cNvPr id="2" name="Text 0"/>
-          <p:cNvSpPr/>
-          <p:nvPr/>
-        </p:nvSpPr>
-        <p:spPr>
-          <a:xfrm>
-            <a:off x="457200" y="713232"/>
-            <a:ext cx="11368735" cy="274320"/>
-          </a:xfrm>
-          <a:prstGeom prst="rect">
-            <a:avLst/>
-          </a:prstGeom>
-          <a:noFill/>
-          <a:ln/>
-        </p:spPr>
-        <p:txBody>
-          <a:bodyPr wrap="square" lIns="0" tIns="0" rIns="0" bIns="0" rtlCol="0" anchor="ctr"/>
-          <a:lstStyle/>
-          <a:p>
-            <a:pPr algn="r" indent="0" marL="0">
-              <a:buNone/>
-            </a:pPr>
-            <a:r>
-              <a:rPr lang="en-US" sz="1400" b="1" dirty="0">
-                <a:solidFill>
-                  <a:srgbClr val="1C3F6E"/>
-                </a:solidFill>
-                <a:latin typeface="Calibri" pitchFamily="34" charset="0"/>
-                <a:ea typeface="Calibri" pitchFamily="34" charset="-122"/>
-                <a:cs typeface="Calibri" pitchFamily="34" charset="-120"/>
-              </a:rPr>
-              <a:t>HOMEWORK CORRECTION</a:t>
-            </a:r>
-            <a:endParaRPr lang="en-US" sz="1400" dirty="0"/>
-          </a:p>
-        </p:txBody>
-      </p:sp>
-      <p:pic>
-        <p:nvPicPr>
-          <p:cNvPr id="3" name="Image 0" descr="/home/claude/f4/img/minesec_sheet.png">    </p:cNvPr>
-          <p:cNvPicPr>
-            <a:picLocks noChangeAspect="1"/>
-          </p:cNvPicPr>
-          <p:nvPr/>
-        </p:nvPicPr>
-        <p:blipFill>
-          <a:blip r:embed="rId1"/>
-          <a:stretch>
-            <a:fillRect/>
-          </a:stretch>
-        </p:blipFill>
-        <p:spPr>
-          <a:xfrm>
-            <a:off x="0" y="658368"/>
-            <a:ext cx="5120640" cy="5833872"/>
-          </a:xfrm>
-          <a:prstGeom prst="rect">
-            <a:avLst/>
-          </a:prstGeom>
-        </p:spPr>
-      </p:pic>
-      <p:sp>
-        <p:nvSpPr>
-          <p:cNvPr id="4" name="Text 1"/>
-          <p:cNvSpPr/>
-          <p:nvPr/>
-        </p:nvSpPr>
-        <p:spPr>
-          <a:xfrm>
-            <a:off x="5349240" y="1005840"/>
-            <a:ext cx="6522415" cy="731520"/>
-          </a:xfrm>
-          <a:prstGeom prst="rect">
-            <a:avLst/>
-          </a:prstGeom>
-          <a:noFill/>
-          <a:ln/>
-        </p:spPr>
-        <p:txBody>
-          <a:bodyPr wrap="square" lIns="0" tIns="0" rIns="0" bIns="0" rtlCol="0" anchor="ctr">
-            <a:normAutofit/>
-          </a:bodyPr>
-          <a:lstStyle/>
-          <a:p>
-            <a:pPr algn="ctr" indent="0" marL="0">
-              <a:buNone/>
-            </a:pPr>
-            <a:r>
-              <a:rPr lang="en-US" sz="3600" b="1" dirty="0">
-                <a:solidFill>
-                  <a:srgbClr val="990011"/>
-                </a:solidFill>
-                <a:latin typeface="Times New Roman" pitchFamily="34" charset="0"/>
-                <a:ea typeface="Times New Roman" pitchFamily="34" charset="-122"/>
-                <a:cs typeface="Times New Roman" pitchFamily="34" charset="-120"/>
-              </a:rPr>
-              <a:t>Correction: Possible Answer</a:t>
-            </a:r>
-            <a:endParaRPr lang="en-US" sz="3600" dirty="0"/>
-          </a:p>
-        </p:txBody>
-      </p:sp>
-      <p:sp>
-        <p:nvSpPr>
-          <p:cNvPr id="5" name="Text 2"/>
-          <p:cNvSpPr/>
-          <p:nvPr/>
-        </p:nvSpPr>
-        <p:spPr>
-          <a:xfrm>
-            <a:off x="5349240" y="1783080"/>
-            <a:ext cx="6522415" cy="4663440"/>
-          </a:xfrm>
-          <a:prstGeom prst="rect">
-            <a:avLst/>
-          </a:prstGeom>
-          <a:noFill/>
-          <a:ln/>
-        </p:spPr>
-        <p:txBody>
-          <a:bodyPr wrap="square" lIns="0" tIns="0" rIns="0" bIns="0" rtlCol="0" anchor="t"/>
-          <a:lstStyle/>
-          <a:p>
-            <a:pPr algn="l" indent="0" marL="0">
-              <a:spcAft>
-                <a:spcPts val="800"/>
-              </a:spcAft>
-              <a:buNone/>
-            </a:pPr>
-            <a:r>
-              <a:rPr lang="en-US" sz="4000" dirty="0">
-                <a:solidFill>
-                  <a:srgbClr val="111111"/>
-                </a:solidFill>
-                <a:latin typeface="Times New Roman" pitchFamily="34" charset="0"/>
-                <a:ea typeface="Times New Roman" pitchFamily="34" charset="-122"/>
-                <a:cs typeface="Times New Roman" pitchFamily="34" charset="-120"/>
-              </a:rPr>
-              <a:t>Example: a family of 8 uses about 10 buckets (about 150 litres) a day: drinking 1, cooking 2, washing dishes 2, bathing 3, laundry and cleaning 2.</a:t>
-            </a:r>
-            <a:endParaRPr lang="en-US" sz="4000" dirty="0"/>
-          </a:p>
-        </p:txBody>
-      </p:sp>
-      <p:sp>
-        <p:nvSpPr>
-          <p:cNvPr id="25" name="Slide Number Placeholder 0"/>
-          <p:cNvSpPr>
-            <a:spLocks noGrp="1"/>
-          </p:cNvSpPr>
-          <p:nvPr>
-            <p:ph type="sldNum" sz="quarter" idx="4294967295"/>
-          </p:nvPr>
-        </p:nvSpPr>
-        <p:spPr>
-          <a:xfrm>
-            <a:off x="27432" y="91440"/>
-            <a:ext cx="585216" cy="475488"/>
-          </a:xfrm>
-          <a:prstGeom prst="rect">
-            <a:avLst/>
-          </a:prstGeom>
-          <a:extLst>
-            <a:ext uri="{C572A759-6A51-4108-AA02-DFA0A04FC94B}">
-              <ma14:wrappingTextBoxFlag xmlns:ma14="http://schemas.microsoft.com/office/mac/drawingml/2011/main" val="0"/>
-            </a:ext>
-          </a:extLst>
-        </p:spPr>
-        <p:txBody>
-          <a:bodyPr/>
-          <a:lstStyle>
-            <a:lvl1pPr>
-              <a:defRPr sz="2000">
-                <a:solidFill>
-                  <a:srgbClr val="FFFFFF"/>
-                </a:solidFill>
-                <a:latin typeface="Calibri"/>
-                <a:ea typeface="Calibri"/>
-                <a:cs typeface="Calibri"/>
-              </a:defRPr>
-            </a:lvl1pPr>
-          </a:lstStyle>
-          <a:p>
-            <a:pPr algn="ctr"/>
-            <a:fld id="{F7021451-1387-4CA6-816F-3879F97B5CBC}" type="slidenum">
-              <a:rPr b="1" lang="en-US"/>
-              <a:t>5</a:t>
+              <a:t>52</a:t>
             </a:fld>
             <a:endParaRPr lang="en-US"/>
           </a:p>
@@ -19925,7 +22074,7 @@
         <p:spPr>
           <a:xfrm>
             <a:off x="0" y="658368"/>
-            <a:ext cx="5120640" cy="5833872"/>
+            <a:ext cx="2468880" cy="5833872"/>
           </a:xfrm>
           <a:prstGeom prst="rect">
             <a:avLst/>
@@ -19940,8 +22089,8 @@
         </p:nvSpPr>
         <p:spPr>
           <a:xfrm>
-            <a:off x="5349240" y="1005840"/>
-            <a:ext cx="6522415" cy="731520"/>
+            <a:off x="2697480" y="1005840"/>
+            <a:ext cx="9174175" cy="731520"/>
           </a:xfrm>
           <a:prstGeom prst="rect">
             <a:avLst/>
@@ -19981,8 +22130,8 @@
         </p:nvSpPr>
         <p:spPr>
           <a:xfrm>
-            <a:off x="5349240" y="1783080"/>
-            <a:ext cx="6522415" cy="4663440"/>
+            <a:off x="2697480" y="1783080"/>
+            <a:ext cx="9174175" cy="4663440"/>
           </a:xfrm>
           <a:prstGeom prst="rect">
             <a:avLst/>
@@ -20009,7 +22158,7 @@
                 <a:ea typeface="Times New Roman" pitchFamily="34" charset="-122"/>
                 <a:cs typeface="Times New Roman" pitchFamily="34" charset="-120"/>
               </a:rPr>
-              <a:t>Every year in March, the taps in Aminatou's neighbourhood run dry for several days. Women and children queue for hours at the borehole, and water sellers raise their prices.</a:t>
+              <a:t>Every year in March, the taps in Aminatou's neighbourhood run dry for several days. Women and children queue for hours at the borehole, and water sellers raise their prices. Aminatou asks: "Why is there not enough water, and how can we save it?"</a:t>
             </a:r>
             <a:endParaRPr lang="en-US" sz="4000" dirty="0"/>
           </a:p>

--- a/lecons/F3/46_FORM4_LESSON42_Water_Scarcity.pptx
+++ b/lecons/F3/46_FORM4_LESSON42_Water_Scarcity.pptx
@@ -3457,7 +3457,7 @@
           <a:p>
             <a:r>
               <a:rPr lang="en-US" dirty="0"/>
-              <a:t>Before we start the new lesson, let us correct the homework I gave you at the end of Lesson 41: Floods, Droughts and Desertification. The question was: Count how many buckets (or litres) of water your family uses in one day, and list the main uses (drinking, cooking, washing). Take out your exercise books.</a:t>
+              <a:t>Before we start the new lesson, let us correct the homework I gave you at the end of Lesson 41: Floods, Droughts and Desertification. The question was: Give two causes of water scarcity. Take out your exercise books.</a:t>
             </a:r>
             <a:endParaRPr lang="en-US" dirty="0"/>
           </a:p>
@@ -4161,7 +4161,7 @@
           <a:p>
             <a:r>
               <a:rPr lang="en-US" dirty="0"/>
-              <a:t>For your homework: Revise Lessons 30 to 42. Draw one diagram of your choice (layers of the atmosphere, Stevenson screen, types of rainfall, pressure belts or water cycle) and label it. We shall correct it at the beginning of our next lesson.</a:t>
+              <a:t>For your homework: Give three ways to conserve water at home. We shall correct it at the beginning of our next lesson.</a:t>
             </a:r>
             <a:endParaRPr lang="en-US" dirty="0"/>
           </a:p>
@@ -4425,7 +4425,7 @@
           <a:p>
             <a:r>
               <a:rPr lang="en-US" dirty="0"/>
-              <a:t>Here is a good answer. Example: a family of 8 uses about 10 buckets (about 150 litres) a day: drinking 1, cooking 2, washing dishes 2, bathing 3, laundry and cleaning 2. Compare it with your own answer and correct your work in red.</a:t>
+              <a:t>Here is a good answer. A long dry season and population growth (also pollution and waste). Compare it with your own answer and correct your work in red.</a:t>
             </a:r>
             <a:endParaRPr lang="en-US" dirty="0"/>
           </a:p>
@@ -15171,7 +15171,7 @@
         <p:spPr>
           <a:xfrm>
             <a:off x="0" y="658368"/>
-            <a:ext cx="3840480" cy="5833872"/>
+            <a:ext cx="5120640" cy="5833872"/>
           </a:xfrm>
           <a:prstGeom prst="rect">
             <a:avLst/>
@@ -15186,8 +15186,8 @@
         </p:nvSpPr>
         <p:spPr>
           <a:xfrm>
-            <a:off x="4069080" y="1005840"/>
-            <a:ext cx="7802575" cy="731520"/>
+            <a:off x="5349240" y="1005840"/>
+            <a:ext cx="6522415" cy="731520"/>
           </a:xfrm>
           <a:prstGeom prst="rect">
             <a:avLst/>
@@ -15227,8 +15227,8 @@
         </p:nvSpPr>
         <p:spPr>
           <a:xfrm>
-            <a:off x="4069080" y="1783080"/>
-            <a:ext cx="7802575" cy="4663440"/>
+            <a:off x="5349240" y="1783080"/>
+            <a:ext cx="6522415" cy="4663440"/>
           </a:xfrm>
           <a:prstGeom prst="rect">
             <a:avLst/>
@@ -15275,7 +15275,7 @@
                 <a:ea typeface="Times New Roman" pitchFamily="34" charset="-122"/>
                 <a:cs typeface="Times New Roman" pitchFamily="34" charset="-120"/>
               </a:rPr>
-              <a:t>Count how many buckets (or litres) of water your family uses in one day, and list the main uses (drinking, cooking, washing).</a:t>
+              <a:t>Give two causes of water scarcity.</a:t>
             </a:r>
             <a:endParaRPr lang="en-US" sz="4000" dirty="0"/>
           </a:p>
@@ -17164,7 +17164,7 @@
                 <a:ea typeface="Times New Roman" pitchFamily="34" charset="-122"/>
                 <a:cs typeface="Times New Roman" pitchFamily="34" charset="-120"/>
               </a:rPr>
-              <a:t>Revise Lessons 30 to 42. Draw one diagram of your choice (layers of the atmosphere, Stevenson screen, types of rainfall, pressure belts or water cycle) and label it.</a:t>
+              <a:t>Give three ways to conserve water at home.</a:t>
             </a:r>
             <a:endParaRPr lang="en-US" sz="4000" dirty="0"/>
           </a:p>
@@ -19539,7 +19539,7 @@
                 <a:ea typeface="Times New Roman" pitchFamily="34" charset="-122"/>
                 <a:cs typeface="Times New Roman" pitchFamily="34" charset="-120"/>
               </a:rPr>
-              <a:t>Example: a family of 8 uses about 10 buckets (about 150 litres) a day: drinking 1, cooking 2, washing dishes 2, bathing 3, laundry and cleaning 2.</a:t>
+              <a:t>A long dry season and population growth (also pollution and waste).</a:t>
             </a:r>
             <a:endParaRPr lang="en-US" sz="4000" dirty="0"/>
           </a:p>
@@ -20084,7 +20084,7 @@
                           <a:ea typeface="Calibri" pitchFamily="34" charset="-122"/>
                           <a:cs typeface="Calibri" pitchFamily="34" charset="-120"/>
                         </a:rPr>
-                        <a:t>Revise Lessons 30 to 42. Draw one diagram of your choice (layers of the atmosphere, Stevenson screen, types of rainfall, pressure belts or water cycle) and label it.</a:t>
+                        <a:t>Give three ways to conserve water at home.</a:t>
                       </a:r>
                       <a:endParaRPr lang="en-US" sz="1600" dirty="0">
                         <a:latin typeface="Calibri" charset="0"/>
